--- a/Final/碩士總結/Ren_Ying_defense_v1.pptx
+++ b/Final/碩士總結/Ren_Ying_defense_v1.pptx
@@ -222,7 +222,7 @@
           <a:p>
             <a:fld id="{C394A7B6-1C40-4E50-A661-C1BB58DFEE8B}" type="datetimeFigureOut">
               <a:rPr lang="zh-TW" altLang="en-US" smtClean="0"/>
-              <a:t>2026/5/29</a:t>
+              <a:t>2026/6/29</a:t>
             </a:fld>
             <a:endParaRPr lang="zh-TW" altLang="en-US"/>
           </a:p>
@@ -400,7 +400,7 @@
           <a:p>
             <a:fld id="{29FA95AB-11A6-4F50-981D-2F517B9BD07B}" type="datetimeFigureOut">
               <a:rPr lang="zh-TW" altLang="en-US" smtClean="0"/>
-              <a:t>2026/5/29</a:t>
+              <a:t>2026/6/29</a:t>
             </a:fld>
             <a:endParaRPr lang="zh-TW" altLang="en-US"/>
           </a:p>
@@ -813,9 +813,9 @@
           <a:bodyPr/>
           <a:lstStyle/>
           <a:p>
-            <a:fld id="{A47B1F57-EE61-4A7A-842F-878F1B85AAE0}" type="datetime1">
+            <a:fld id="{B6967EAE-E217-4C13-B1D4-C1D2362BCCD6}" type="datetime1">
               <a:rPr lang="zh-TW" altLang="en-US" smtClean="0"/>
-              <a:t>2026/5/29</a:t>
+              <a:t>2026/6/29</a:t>
             </a:fld>
             <a:endParaRPr lang="zh-TW" altLang="en-US"/>
           </a:p>
@@ -862,7 +862,12 @@
             <p:ph type="sldNum" sz="quarter" idx="12"/>
           </p:nvPr>
         </p:nvSpPr>
-        <p:spPr/>
+        <p:spPr>
+          <a:xfrm>
+            <a:off x="9440174" y="6561"/>
+            <a:ext cx="2743200" cy="365125"/>
+          </a:xfrm>
+        </p:spPr>
         <p:txBody>
           <a:bodyPr/>
           <a:lstStyle/>
@@ -1011,9 +1016,9 @@
           <a:bodyPr/>
           <a:lstStyle/>
           <a:p>
-            <a:fld id="{3ED1BB09-50AA-4BFB-8722-FD395A8A8D8C}" type="datetime1">
+            <a:fld id="{1076042C-E665-4C51-80B3-C45E4AEFB00B}" type="datetime1">
               <a:rPr lang="zh-TW" altLang="en-US" smtClean="0"/>
-              <a:t>2026/5/29</a:t>
+              <a:t>2026/6/29</a:t>
             </a:fld>
             <a:endParaRPr lang="zh-TW" altLang="en-US"/>
           </a:p>
@@ -1219,9 +1224,9 @@
           <a:bodyPr/>
           <a:lstStyle/>
           <a:p>
-            <a:fld id="{CCB5EEDF-DF37-43A9-9611-0FB9CD478392}" type="datetime1">
+            <a:fld id="{6FF6AB9C-E9F3-448F-BAEF-2980284577BF}" type="datetime1">
               <a:rPr lang="zh-TW" altLang="en-US" smtClean="0"/>
-              <a:t>2026/5/29</a:t>
+              <a:t>2026/6/29</a:t>
             </a:fld>
             <a:endParaRPr lang="zh-TW" altLang="en-US"/>
           </a:p>
@@ -1417,9 +1422,9 @@
           <a:bodyPr/>
           <a:lstStyle/>
           <a:p>
-            <a:fld id="{233020B1-2EC9-4080-BB01-4C866668B3BF}" type="datetime1">
+            <a:fld id="{E4312E92-078D-445D-A315-241AB512DF4E}" type="datetime1">
               <a:rPr lang="zh-TW" altLang="en-US" smtClean="0"/>
-              <a:t>2026/5/29</a:t>
+              <a:t>2026/6/29</a:t>
             </a:fld>
             <a:endParaRPr lang="zh-TW" altLang="en-US"/>
           </a:p>
@@ -1692,9 +1697,9 @@
           <a:bodyPr/>
           <a:lstStyle/>
           <a:p>
-            <a:fld id="{C74158CA-3D60-425C-89AB-4AB1AC93CCC3}" type="datetime1">
+            <a:fld id="{166F5C96-160B-4F0F-BE3F-3AAE2032A14A}" type="datetime1">
               <a:rPr lang="zh-TW" altLang="en-US" smtClean="0"/>
-              <a:t>2026/5/29</a:t>
+              <a:t>2026/6/29</a:t>
             </a:fld>
             <a:endParaRPr lang="zh-TW" altLang="en-US"/>
           </a:p>
@@ -1957,9 +1962,9 @@
           <a:bodyPr/>
           <a:lstStyle/>
           <a:p>
-            <a:fld id="{91A4AC51-4E1E-4A8A-91AC-27FEEF37DBDA}" type="datetime1">
+            <a:fld id="{5C5DE22B-68CD-40D7-BF74-022E0380697F}" type="datetime1">
               <a:rPr lang="zh-TW" altLang="en-US" smtClean="0"/>
-              <a:t>2026/5/29</a:t>
+              <a:t>2026/6/29</a:t>
             </a:fld>
             <a:endParaRPr lang="zh-TW" altLang="en-US"/>
           </a:p>
@@ -2369,9 +2374,9 @@
           <a:bodyPr/>
           <a:lstStyle/>
           <a:p>
-            <a:fld id="{E18441AA-45BB-4427-BF7F-3FF492D877DF}" type="datetime1">
+            <a:fld id="{9D47BC32-EEEC-42AD-9FB7-1F67CBD9006C}" type="datetime1">
               <a:rPr lang="zh-TW" altLang="en-US" smtClean="0"/>
-              <a:t>2026/5/29</a:t>
+              <a:t>2026/6/29</a:t>
             </a:fld>
             <a:endParaRPr lang="zh-TW" altLang="en-US"/>
           </a:p>
@@ -2510,9 +2515,9 @@
           <a:bodyPr/>
           <a:lstStyle/>
           <a:p>
-            <a:fld id="{67E6968C-71A5-4AAA-AE9A-75E48F81AC4B}" type="datetime1">
+            <a:fld id="{8E8834FD-B989-4DC7-B0C3-3D9481DCB247}" type="datetime1">
               <a:rPr lang="zh-TW" altLang="en-US" smtClean="0"/>
-              <a:t>2026/5/29</a:t>
+              <a:t>2026/6/29</a:t>
             </a:fld>
             <a:endParaRPr lang="zh-TW" altLang="en-US"/>
           </a:p>
@@ -2623,9 +2628,9 @@
           <a:bodyPr/>
           <a:lstStyle/>
           <a:p>
-            <a:fld id="{F26B9425-3309-4029-B364-9A6145ADEAB5}" type="datetime1">
+            <a:fld id="{18AEB7E6-3D99-40BE-9488-75C5C51CD267}" type="datetime1">
               <a:rPr lang="zh-TW" altLang="en-US" smtClean="0"/>
-              <a:t>2026/5/29</a:t>
+              <a:t>2026/6/29</a:t>
             </a:fld>
             <a:endParaRPr lang="zh-TW" altLang="en-US"/>
           </a:p>
@@ -2934,9 +2939,9 @@
           <a:bodyPr/>
           <a:lstStyle/>
           <a:p>
-            <a:fld id="{51F395D1-D96C-4FDE-8F09-92167F77916D}" type="datetime1">
+            <a:fld id="{DEBC679B-3B15-42DA-A497-282AB7671468}" type="datetime1">
               <a:rPr lang="zh-TW" altLang="en-US" smtClean="0"/>
-              <a:t>2026/5/29</a:t>
+              <a:t>2026/6/29</a:t>
             </a:fld>
             <a:endParaRPr lang="zh-TW" altLang="en-US"/>
           </a:p>
@@ -3222,9 +3227,9 @@
           <a:bodyPr/>
           <a:lstStyle/>
           <a:p>
-            <a:fld id="{5E77BE7C-0601-4AB7-BC80-D417CF370B12}" type="datetime1">
+            <a:fld id="{84000812-8F6A-47B7-8300-ABC68422A82D}" type="datetime1">
               <a:rPr lang="zh-TW" altLang="en-US" smtClean="0"/>
-              <a:t>2026/5/29</a:t>
+              <a:t>2026/6/29</a:t>
             </a:fld>
             <a:endParaRPr lang="zh-TW" altLang="en-US"/>
           </a:p>
@@ -3463,9 +3468,9 @@
             </a:lvl1pPr>
           </a:lstStyle>
           <a:p>
-            <a:fld id="{F62E692E-6FB4-4287-9701-DD2AD3537E23}" type="datetime1">
+            <a:fld id="{1C55E079-4510-46F8-9023-A4DE6DD9B4B9}" type="datetime1">
               <a:rPr lang="zh-TW" altLang="en-US" smtClean="0"/>
-              <a:t>2026/5/29</a:t>
+              <a:t>2026/6/29</a:t>
             </a:fld>
             <a:endParaRPr lang="zh-TW" altLang="en-US"/>
           </a:p>
@@ -3532,7 +3537,7 @@
         </p:nvSpPr>
         <p:spPr>
           <a:xfrm>
-            <a:off x="8610600" y="6356350"/>
+            <a:off x="9448800" y="0"/>
             <a:ext cx="2743200" cy="365125"/>
           </a:xfrm>
           <a:prstGeom prst="rect">
@@ -3945,6 +3950,35 @@
           </a:p>
         </p:txBody>
       </p:sp>
+      <p:sp>
+        <p:nvSpPr>
+          <p:cNvPr id="3" name="投影片編號版面配置區 2">
+            <a:extLst>
+              <a:ext uri="{FF2B5EF4-FFF2-40B4-BE49-F238E27FC236}">
+                <a16:creationId xmlns:a16="http://schemas.microsoft.com/office/drawing/2014/main" id="{1E6261B0-EBD3-4C22-9F81-7398932D8FDC}"/>
+              </a:ext>
+            </a:extLst>
+          </p:cNvPr>
+          <p:cNvSpPr>
+            <a:spLocks noGrp="1"/>
+          </p:cNvSpPr>
+          <p:nvPr>
+            <p:ph type="sldNum" sz="quarter" idx="12"/>
+          </p:nvPr>
+        </p:nvSpPr>
+        <p:spPr/>
+        <p:txBody>
+          <a:bodyPr/>
+          <a:lstStyle/>
+          <a:p>
+            <a:fld id="{9094BDCA-F584-4E62-B2F1-580C4F37E8BD}" type="slidenum">
+              <a:rPr lang="zh-TW" altLang="en-US" smtClean="0"/>
+              <a:t>1</a:t>
+            </a:fld>
+            <a:endParaRPr lang="zh-TW" altLang="en-US"/>
+          </a:p>
+        </p:txBody>
+      </p:sp>
     </p:spTree>
     <p:extLst>
       <p:ext uri="{BB962C8B-B14F-4D97-AF65-F5344CB8AC3E}">
@@ -4413,35 +4447,6 @@
       </p:sp>
       <p:sp>
         <p:nvSpPr>
-          <p:cNvPr id="2" name="投影片編號版面配置區 1">
-            <a:extLst>
-              <a:ext uri="{FF2B5EF4-FFF2-40B4-BE49-F238E27FC236}">
-                <a16:creationId xmlns:a16="http://schemas.microsoft.com/office/drawing/2014/main" id="{98B65FA9-2C67-4FDA-8DAC-794A05FB29BA}"/>
-              </a:ext>
-            </a:extLst>
-          </p:cNvPr>
-          <p:cNvSpPr>
-            <a:spLocks noGrp="1"/>
-          </p:cNvSpPr>
-          <p:nvPr>
-            <p:ph type="sldNum" sz="quarter" idx="12"/>
-          </p:nvPr>
-        </p:nvSpPr>
-        <p:spPr/>
-        <p:txBody>
-          <a:bodyPr/>
-          <a:lstStyle/>
-          <a:p>
-            <a:r>
-              <a:rPr lang="en-US" altLang="zh-TW" dirty="0"/>
-              <a:t>1</a:t>
-            </a:r>
-            <a:endParaRPr lang="zh-TW" altLang="en-US" dirty="0"/>
-          </a:p>
-        </p:txBody>
-      </p:sp>
-      <p:sp>
-        <p:nvSpPr>
           <p:cNvPr id="6" name="內容版面配置區 5">
             <a:extLst>
               <a:ext uri="{FF2B5EF4-FFF2-40B4-BE49-F238E27FC236}">
@@ -4461,6 +4466,35 @@
           <a:bodyPr/>
           <a:lstStyle/>
           <a:p>
+            <a:endParaRPr lang="zh-TW" altLang="en-US"/>
+          </a:p>
+        </p:txBody>
+      </p:sp>
+      <p:sp>
+        <p:nvSpPr>
+          <p:cNvPr id="3" name="投影片編號版面配置區 2">
+            <a:extLst>
+              <a:ext uri="{FF2B5EF4-FFF2-40B4-BE49-F238E27FC236}">
+                <a16:creationId xmlns:a16="http://schemas.microsoft.com/office/drawing/2014/main" id="{B6F4F919-BABA-4A16-B156-B411B9B35497}"/>
+              </a:ext>
+            </a:extLst>
+          </p:cNvPr>
+          <p:cNvSpPr>
+            <a:spLocks noGrp="1"/>
+          </p:cNvSpPr>
+          <p:nvPr>
+            <p:ph type="sldNum" sz="quarter" idx="12"/>
+          </p:nvPr>
+        </p:nvSpPr>
+        <p:spPr/>
+        <p:txBody>
+          <a:bodyPr/>
+          <a:lstStyle/>
+          <a:p>
+            <a:fld id="{9094BDCA-F584-4E62-B2F1-580C4F37E8BD}" type="slidenum">
+              <a:rPr lang="zh-TW" altLang="en-US" smtClean="0"/>
+              <a:t>10</a:t>
+            </a:fld>
             <a:endParaRPr lang="zh-TW" altLang="en-US"/>
           </a:p>
         </p:txBody>
@@ -4933,35 +4967,6 @@
       </p:sp>
       <p:sp>
         <p:nvSpPr>
-          <p:cNvPr id="2" name="投影片編號版面配置區 1">
-            <a:extLst>
-              <a:ext uri="{FF2B5EF4-FFF2-40B4-BE49-F238E27FC236}">
-                <a16:creationId xmlns:a16="http://schemas.microsoft.com/office/drawing/2014/main" id="{98B65FA9-2C67-4FDA-8DAC-794A05FB29BA}"/>
-              </a:ext>
-            </a:extLst>
-          </p:cNvPr>
-          <p:cNvSpPr>
-            <a:spLocks noGrp="1"/>
-          </p:cNvSpPr>
-          <p:nvPr>
-            <p:ph type="sldNum" sz="quarter" idx="12"/>
-          </p:nvPr>
-        </p:nvSpPr>
-        <p:spPr/>
-        <p:txBody>
-          <a:bodyPr/>
-          <a:lstStyle/>
-          <a:p>
-            <a:r>
-              <a:rPr lang="en-US" altLang="zh-TW" dirty="0"/>
-              <a:t>1</a:t>
-            </a:r>
-            <a:endParaRPr lang="zh-TW" altLang="en-US" dirty="0"/>
-          </a:p>
-        </p:txBody>
-      </p:sp>
-      <p:sp>
-        <p:nvSpPr>
           <p:cNvPr id="7" name="內容版面配置區 6">
             <a:extLst>
               <a:ext uri="{FF2B5EF4-FFF2-40B4-BE49-F238E27FC236}">
@@ -4989,6 +4994,35 @@
               <a:t>123</a:t>
             </a:r>
             <a:endParaRPr lang="zh-TW" altLang="en-US" dirty="0"/>
+          </a:p>
+        </p:txBody>
+      </p:sp>
+      <p:sp>
+        <p:nvSpPr>
+          <p:cNvPr id="3" name="投影片編號版面配置區 2">
+            <a:extLst>
+              <a:ext uri="{FF2B5EF4-FFF2-40B4-BE49-F238E27FC236}">
+                <a16:creationId xmlns:a16="http://schemas.microsoft.com/office/drawing/2014/main" id="{F6789338-4F66-4CE7-AFD6-56B6F550D2C2}"/>
+              </a:ext>
+            </a:extLst>
+          </p:cNvPr>
+          <p:cNvSpPr>
+            <a:spLocks noGrp="1"/>
+          </p:cNvSpPr>
+          <p:nvPr>
+            <p:ph type="sldNum" sz="quarter" idx="12"/>
+          </p:nvPr>
+        </p:nvSpPr>
+        <p:spPr/>
+        <p:txBody>
+          <a:bodyPr/>
+          <a:lstStyle/>
+          <a:p>
+            <a:fld id="{9094BDCA-F584-4E62-B2F1-580C4F37E8BD}" type="slidenum">
+              <a:rPr lang="zh-TW" altLang="en-US" smtClean="0"/>
+              <a:t>11</a:t>
+            </a:fld>
+            <a:endParaRPr lang="zh-TW" altLang="en-US"/>
           </a:p>
         </p:txBody>
       </p:sp>
@@ -5379,35 +5413,6 @@
       </p:sp>
       <p:sp>
         <p:nvSpPr>
-          <p:cNvPr id="2" name="投影片編號版面配置區 1">
-            <a:extLst>
-              <a:ext uri="{FF2B5EF4-FFF2-40B4-BE49-F238E27FC236}">
-                <a16:creationId xmlns:a16="http://schemas.microsoft.com/office/drawing/2014/main" id="{98B65FA9-2C67-4FDA-8DAC-794A05FB29BA}"/>
-              </a:ext>
-            </a:extLst>
-          </p:cNvPr>
-          <p:cNvSpPr>
-            <a:spLocks noGrp="1"/>
-          </p:cNvSpPr>
-          <p:nvPr>
-            <p:ph type="sldNum" sz="quarter" idx="12"/>
-          </p:nvPr>
-        </p:nvSpPr>
-        <p:spPr/>
-        <p:txBody>
-          <a:bodyPr/>
-          <a:lstStyle/>
-          <a:p>
-            <a:r>
-              <a:rPr lang="en-US" altLang="zh-TW" dirty="0"/>
-              <a:t>1</a:t>
-            </a:r>
-            <a:endParaRPr lang="zh-TW" altLang="en-US" dirty="0"/>
-          </a:p>
-        </p:txBody>
-      </p:sp>
-      <p:sp>
-        <p:nvSpPr>
           <p:cNvPr id="10" name="內容版面配置區 2">
             <a:extLst>
               <a:ext uri="{FF2B5EF4-FFF2-40B4-BE49-F238E27FC236}">
@@ -5608,6 +5613,35 @@
               </a:rPr>
               <a:t>Summary and outlook</a:t>
             </a:r>
+          </a:p>
+        </p:txBody>
+      </p:sp>
+      <p:sp>
+        <p:nvSpPr>
+          <p:cNvPr id="3" name="投影片編號版面配置區 2">
+            <a:extLst>
+              <a:ext uri="{FF2B5EF4-FFF2-40B4-BE49-F238E27FC236}">
+                <a16:creationId xmlns:a16="http://schemas.microsoft.com/office/drawing/2014/main" id="{F8CF4FCA-EFD1-480F-BEAC-69620E56EC8A}"/>
+              </a:ext>
+            </a:extLst>
+          </p:cNvPr>
+          <p:cNvSpPr>
+            <a:spLocks noGrp="1"/>
+          </p:cNvSpPr>
+          <p:nvPr>
+            <p:ph type="sldNum" sz="quarter" idx="12"/>
+          </p:nvPr>
+        </p:nvSpPr>
+        <p:spPr/>
+        <p:txBody>
+          <a:bodyPr/>
+          <a:lstStyle/>
+          <a:p>
+            <a:fld id="{9094BDCA-F584-4E62-B2F1-580C4F37E8BD}" type="slidenum">
+              <a:rPr lang="zh-TW" altLang="en-US" smtClean="0"/>
+              <a:t>2</a:t>
+            </a:fld>
+            <a:endParaRPr lang="zh-TW" altLang="en-US"/>
           </a:p>
         </p:txBody>
       </p:sp>
@@ -5641,298 +5675,6 @@
           <a:chExt cx="0" cy="0"/>
         </a:xfrm>
       </p:grpSpPr>
-      <p:sp>
-        <p:nvSpPr>
-          <p:cNvPr id="5" name="副標題 2">
-            <a:extLst>
-              <a:ext uri="{FF2B5EF4-FFF2-40B4-BE49-F238E27FC236}">
-                <a16:creationId xmlns:a16="http://schemas.microsoft.com/office/drawing/2014/main" id="{EF642DEB-617E-49E8-BC12-45D4CBA2D9E9}"/>
-              </a:ext>
-            </a:extLst>
-          </p:cNvPr>
-          <p:cNvSpPr txBox="1">
-            <a:spLocks/>
-          </p:cNvSpPr>
-          <p:nvPr/>
-        </p:nvSpPr>
-        <p:spPr>
-          <a:xfrm>
-            <a:off x="1524000" y="1417320"/>
-            <a:ext cx="9144000" cy="4270248"/>
-          </a:xfrm>
-          <a:prstGeom prst="rect">
-            <a:avLst/>
-          </a:prstGeom>
-        </p:spPr>
-        <p:txBody>
-          <a:bodyPr vert="horz" lIns="91440" tIns="45720" rIns="91440" bIns="45720" rtlCol="0">
-            <a:normAutofit/>
-          </a:bodyPr>
-          <a:lstStyle>
-            <a:lvl1pPr marL="228600" indent="-228600" algn="l" defTabSz="914400" rtl="0" eaLnBrk="1" latinLnBrk="0" hangingPunct="1">
-              <a:lnSpc>
-                <a:spcPct val="90000"/>
-              </a:lnSpc>
-              <a:spcBef>
-                <a:spcPts val="1000"/>
-              </a:spcBef>
-              <a:buFont typeface="Arial" panose="020B0604020202020204" pitchFamily="34" charset="0"/>
-              <a:buChar char="•"/>
-              <a:defRPr sz="2800" kern="1200">
-                <a:solidFill>
-                  <a:schemeClr val="tx1"/>
-                </a:solidFill>
-                <a:latin typeface="+mn-lt"/>
-                <a:ea typeface="+mn-ea"/>
-                <a:cs typeface="+mn-cs"/>
-              </a:defRPr>
-            </a:lvl1pPr>
-            <a:lvl2pPr marL="685800" indent="-228600" algn="l" defTabSz="914400" rtl="0" eaLnBrk="1" latinLnBrk="0" hangingPunct="1">
-              <a:lnSpc>
-                <a:spcPct val="90000"/>
-              </a:lnSpc>
-              <a:spcBef>
-                <a:spcPts val="500"/>
-              </a:spcBef>
-              <a:buFont typeface="Arial" panose="020B0604020202020204" pitchFamily="34" charset="0"/>
-              <a:buChar char="•"/>
-              <a:defRPr sz="2400" kern="1200">
-                <a:solidFill>
-                  <a:schemeClr val="tx1"/>
-                </a:solidFill>
-                <a:latin typeface="+mn-lt"/>
-                <a:ea typeface="+mn-ea"/>
-                <a:cs typeface="+mn-cs"/>
-              </a:defRPr>
-            </a:lvl2pPr>
-            <a:lvl3pPr marL="1143000" indent="-228600" algn="l" defTabSz="914400" rtl="0" eaLnBrk="1" latinLnBrk="0" hangingPunct="1">
-              <a:lnSpc>
-                <a:spcPct val="90000"/>
-              </a:lnSpc>
-              <a:spcBef>
-                <a:spcPts val="500"/>
-              </a:spcBef>
-              <a:buFont typeface="Arial" panose="020B0604020202020204" pitchFamily="34" charset="0"/>
-              <a:buChar char="•"/>
-              <a:defRPr sz="2000" kern="1200">
-                <a:solidFill>
-                  <a:schemeClr val="tx1"/>
-                </a:solidFill>
-                <a:latin typeface="+mn-lt"/>
-                <a:ea typeface="+mn-ea"/>
-                <a:cs typeface="+mn-cs"/>
-              </a:defRPr>
-            </a:lvl3pPr>
-            <a:lvl4pPr marL="1600200" indent="-228600" algn="l" defTabSz="914400" rtl="0" eaLnBrk="1" latinLnBrk="0" hangingPunct="1">
-              <a:lnSpc>
-                <a:spcPct val="90000"/>
-              </a:lnSpc>
-              <a:spcBef>
-                <a:spcPts val="500"/>
-              </a:spcBef>
-              <a:buFont typeface="Arial" panose="020B0604020202020204" pitchFamily="34" charset="0"/>
-              <a:buChar char="•"/>
-              <a:defRPr sz="1800" kern="1200">
-                <a:solidFill>
-                  <a:schemeClr val="tx1"/>
-                </a:solidFill>
-                <a:latin typeface="+mn-lt"/>
-                <a:ea typeface="+mn-ea"/>
-                <a:cs typeface="+mn-cs"/>
-              </a:defRPr>
-            </a:lvl4pPr>
-            <a:lvl5pPr marL="2057400" indent="-228600" algn="l" defTabSz="914400" rtl="0" eaLnBrk="1" latinLnBrk="0" hangingPunct="1">
-              <a:lnSpc>
-                <a:spcPct val="90000"/>
-              </a:lnSpc>
-              <a:spcBef>
-                <a:spcPts val="500"/>
-              </a:spcBef>
-              <a:buFont typeface="Arial" panose="020B0604020202020204" pitchFamily="34" charset="0"/>
-              <a:buChar char="•"/>
-              <a:defRPr sz="1800" kern="1200">
-                <a:solidFill>
-                  <a:schemeClr val="tx1"/>
-                </a:solidFill>
-                <a:latin typeface="+mn-lt"/>
-                <a:ea typeface="+mn-ea"/>
-                <a:cs typeface="+mn-cs"/>
-              </a:defRPr>
-            </a:lvl5pPr>
-            <a:lvl6pPr marL="2514600" indent="-228600" algn="l" defTabSz="914400" rtl="0" eaLnBrk="1" latinLnBrk="0" hangingPunct="1">
-              <a:lnSpc>
-                <a:spcPct val="90000"/>
-              </a:lnSpc>
-              <a:spcBef>
-                <a:spcPts val="500"/>
-              </a:spcBef>
-              <a:buFont typeface="Arial" panose="020B0604020202020204" pitchFamily="34" charset="0"/>
-              <a:buChar char="•"/>
-              <a:defRPr sz="1800" kern="1200">
-                <a:solidFill>
-                  <a:schemeClr val="tx1"/>
-                </a:solidFill>
-                <a:latin typeface="+mn-lt"/>
-                <a:ea typeface="+mn-ea"/>
-                <a:cs typeface="+mn-cs"/>
-              </a:defRPr>
-            </a:lvl6pPr>
-            <a:lvl7pPr marL="2971800" indent="-228600" algn="l" defTabSz="914400" rtl="0" eaLnBrk="1" latinLnBrk="0" hangingPunct="1">
-              <a:lnSpc>
-                <a:spcPct val="90000"/>
-              </a:lnSpc>
-              <a:spcBef>
-                <a:spcPts val="500"/>
-              </a:spcBef>
-              <a:buFont typeface="Arial" panose="020B0604020202020204" pitchFamily="34" charset="0"/>
-              <a:buChar char="•"/>
-              <a:defRPr sz="1800" kern="1200">
-                <a:solidFill>
-                  <a:schemeClr val="tx1"/>
-                </a:solidFill>
-                <a:latin typeface="+mn-lt"/>
-                <a:ea typeface="+mn-ea"/>
-                <a:cs typeface="+mn-cs"/>
-              </a:defRPr>
-            </a:lvl7pPr>
-            <a:lvl8pPr marL="3429000" indent="-228600" algn="l" defTabSz="914400" rtl="0" eaLnBrk="1" latinLnBrk="0" hangingPunct="1">
-              <a:lnSpc>
-                <a:spcPct val="90000"/>
-              </a:lnSpc>
-              <a:spcBef>
-                <a:spcPts val="500"/>
-              </a:spcBef>
-              <a:buFont typeface="Arial" panose="020B0604020202020204" pitchFamily="34" charset="0"/>
-              <a:buChar char="•"/>
-              <a:defRPr sz="1800" kern="1200">
-                <a:solidFill>
-                  <a:schemeClr val="tx1"/>
-                </a:solidFill>
-                <a:latin typeface="+mn-lt"/>
-                <a:ea typeface="+mn-ea"/>
-                <a:cs typeface="+mn-cs"/>
-              </a:defRPr>
-            </a:lvl8pPr>
-            <a:lvl9pPr marL="3886200" indent="-228600" algn="l" defTabSz="914400" rtl="0" eaLnBrk="1" latinLnBrk="0" hangingPunct="1">
-              <a:lnSpc>
-                <a:spcPct val="90000"/>
-              </a:lnSpc>
-              <a:spcBef>
-                <a:spcPts val="500"/>
-              </a:spcBef>
-              <a:buFont typeface="Arial" panose="020B0604020202020204" pitchFamily="34" charset="0"/>
-              <a:buChar char="•"/>
-              <a:defRPr sz="1800" kern="1200">
-                <a:solidFill>
-                  <a:schemeClr val="tx1"/>
-                </a:solidFill>
-                <a:latin typeface="+mn-lt"/>
-                <a:ea typeface="+mn-ea"/>
-                <a:cs typeface="+mn-cs"/>
-              </a:defRPr>
-            </a:lvl9pPr>
-          </a:lstStyle>
-          <a:p>
-            <a:pPr marL="228600" marR="0" lvl="0" indent="-228600" algn="ctr" defTabSz="914400" rtl="0" eaLnBrk="1" fontAlgn="auto" latinLnBrk="0" hangingPunct="1">
-              <a:lnSpc>
-                <a:spcPct val="90000"/>
-              </a:lnSpc>
-              <a:spcBef>
-                <a:spcPts val="1000"/>
-              </a:spcBef>
-              <a:spcAft>
-                <a:spcPts val="0"/>
-              </a:spcAft>
-              <a:buClrTx/>
-              <a:buSzTx/>
-              <a:buFont typeface="Arial" panose="020B0604020202020204" pitchFamily="34" charset="0"/>
-              <a:buChar char="•"/>
-              <a:tabLst/>
-              <a:defRPr/>
-            </a:pPr>
-            <a:endParaRPr kumimoji="0" lang="zh-TW" altLang="en-US" sz="2800" b="0" i="0" u="none" strike="noStrike" kern="1200" cap="none" spc="0" normalizeH="0" baseline="0" noProof="0" dirty="0">
-              <a:ln>
-                <a:noFill/>
-              </a:ln>
-              <a:solidFill>
-                <a:prstClr val="black"/>
-              </a:solidFill>
-              <a:effectLst/>
-              <a:uLnTx/>
-              <a:uFillTx/>
-              <a:latin typeface="Calibri" panose="020F0502020204030204"/>
-              <a:ea typeface="新細明體" panose="02020500000000000000" pitchFamily="18" charset="-120"/>
-              <a:cs typeface="+mn-cs"/>
-            </a:endParaRPr>
-          </a:p>
-          <a:p>
-            <a:pPr marL="228600" marR="0" lvl="0" indent="-228600" algn="ctr" defTabSz="914400" rtl="0" eaLnBrk="1" fontAlgn="auto" latinLnBrk="0" hangingPunct="1">
-              <a:lnSpc>
-                <a:spcPct val="90000"/>
-              </a:lnSpc>
-              <a:spcBef>
-                <a:spcPts val="1000"/>
-              </a:spcBef>
-              <a:spcAft>
-                <a:spcPts val="0"/>
-              </a:spcAft>
-              <a:buClrTx/>
-              <a:buSzTx/>
-              <a:buFont typeface="Arial" panose="020B0604020202020204" pitchFamily="34" charset="0"/>
-              <a:buChar char="•"/>
-              <a:tabLst/>
-              <a:defRPr/>
-            </a:pPr>
-            <a:endParaRPr kumimoji="0" lang="en-US" altLang="zh-TW" sz="2800" b="1" i="0" u="none" strike="noStrike" kern="1200" cap="none" spc="0" normalizeH="0" baseline="0" noProof="0" dirty="0">
-              <a:ln>
-                <a:noFill/>
-              </a:ln>
-              <a:solidFill>
-                <a:prstClr val="black"/>
-              </a:solidFill>
-              <a:effectLst/>
-              <a:uLnTx/>
-              <a:uFillTx/>
-              <a:latin typeface="Calibri" panose="020F0502020204030204"/>
-              <a:ea typeface="新細明體" panose="02020500000000000000" pitchFamily="18" charset="-120"/>
-              <a:cs typeface="+mn-cs"/>
-            </a:endParaRPr>
-          </a:p>
-          <a:p>
-            <a:pPr marL="228600" marR="0" lvl="0" indent="-228600" algn="ctr" defTabSz="914400" rtl="0" eaLnBrk="1" fontAlgn="auto" latinLnBrk="0" hangingPunct="1">
-              <a:lnSpc>
-                <a:spcPct val="90000"/>
-              </a:lnSpc>
-              <a:spcBef>
-                <a:spcPts val="1000"/>
-              </a:spcBef>
-              <a:spcAft>
-                <a:spcPts val="0"/>
-              </a:spcAft>
-              <a:buClrTx/>
-              <a:buSzTx/>
-              <a:buFont typeface="Arial" panose="020B0604020202020204" pitchFamily="34" charset="0"/>
-              <a:buChar char="•"/>
-              <a:tabLst/>
-              <a:defRPr/>
-            </a:pPr>
-            <a:endParaRPr kumimoji="0" lang="en-US" altLang="zh-TW" sz="2800" b="1" i="0" u="none" strike="noStrike" kern="1200" cap="none" spc="0" normalizeH="0" baseline="0" noProof="0" dirty="0">
-              <a:ln>
-                <a:noFill/>
-              </a:ln>
-              <a:solidFill>
-                <a:prstClr val="black"/>
-              </a:solidFill>
-              <a:effectLst/>
-              <a:uLnTx/>
-              <a:uFillTx/>
-              <a:latin typeface="Calibri" panose="020F0502020204030204"/>
-              <a:ea typeface="新細明體" panose="02020500000000000000" pitchFamily="18" charset="-120"/>
-              <a:cs typeface="+mn-cs"/>
-            </a:endParaRPr>
-          </a:p>
-        </p:txBody>
-      </p:sp>
       <p:sp>
         <p:nvSpPr>
           <p:cNvPr id="8" name="標題 1">
@@ -5998,30 +5740,293 @@
       </p:sp>
       <p:sp>
         <p:nvSpPr>
-          <p:cNvPr id="2" name="投影片編號版面配置區 1">
+          <p:cNvPr id="5" name="副標題 2">
             <a:extLst>
               <a:ext uri="{FF2B5EF4-FFF2-40B4-BE49-F238E27FC236}">
-                <a16:creationId xmlns:a16="http://schemas.microsoft.com/office/drawing/2014/main" id="{98B65FA9-2C67-4FDA-8DAC-794A05FB29BA}"/>
+                <a16:creationId xmlns:a16="http://schemas.microsoft.com/office/drawing/2014/main" id="{EF642DEB-617E-49E8-BC12-45D4CBA2D9E9}"/>
               </a:ext>
             </a:extLst>
           </p:cNvPr>
-          <p:cNvSpPr>
-            <a:spLocks noGrp="1"/>
+          <p:cNvSpPr txBox="1">
+            <a:spLocks/>
           </p:cNvSpPr>
-          <p:nvPr>
-            <p:ph type="sldNum" sz="quarter" idx="12"/>
-          </p:nvPr>
+          <p:nvPr/>
         </p:nvSpPr>
-        <p:spPr/>
+        <p:spPr>
+          <a:xfrm>
+            <a:off x="1524000" y="1417320"/>
+            <a:ext cx="9144000" cy="4270248"/>
+          </a:xfrm>
+          <a:prstGeom prst="rect">
+            <a:avLst/>
+          </a:prstGeom>
+        </p:spPr>
         <p:txBody>
-          <a:bodyPr/>
-          <a:lstStyle/>
-          <a:p>
-            <a:r>
-              <a:rPr lang="en-US" altLang="zh-TW" dirty="0"/>
-              <a:t>1</a:t>
-            </a:r>
-            <a:endParaRPr lang="zh-TW" altLang="en-US" dirty="0"/>
+          <a:bodyPr vert="horz" lIns="91440" tIns="45720" rIns="91440" bIns="45720" rtlCol="0">
+            <a:normAutofit/>
+          </a:bodyPr>
+          <a:lstStyle>
+            <a:lvl1pPr marL="228600" indent="-228600" algn="l" defTabSz="914400" rtl="0" eaLnBrk="1" latinLnBrk="0" hangingPunct="1">
+              <a:lnSpc>
+                <a:spcPct val="90000"/>
+              </a:lnSpc>
+              <a:spcBef>
+                <a:spcPts val="1000"/>
+              </a:spcBef>
+              <a:buFont typeface="Arial" panose="020B0604020202020204" pitchFamily="34" charset="0"/>
+              <a:buChar char="•"/>
+              <a:defRPr sz="2800" kern="1200">
+                <a:solidFill>
+                  <a:schemeClr val="tx1"/>
+                </a:solidFill>
+                <a:latin typeface="+mn-lt"/>
+                <a:ea typeface="+mn-ea"/>
+                <a:cs typeface="+mn-cs"/>
+              </a:defRPr>
+            </a:lvl1pPr>
+            <a:lvl2pPr marL="685800" indent="-228600" algn="l" defTabSz="914400" rtl="0" eaLnBrk="1" latinLnBrk="0" hangingPunct="1">
+              <a:lnSpc>
+                <a:spcPct val="90000"/>
+              </a:lnSpc>
+              <a:spcBef>
+                <a:spcPts val="500"/>
+              </a:spcBef>
+              <a:buFont typeface="Arial" panose="020B0604020202020204" pitchFamily="34" charset="0"/>
+              <a:buChar char="•"/>
+              <a:defRPr sz="2400" kern="1200">
+                <a:solidFill>
+                  <a:schemeClr val="tx1"/>
+                </a:solidFill>
+                <a:latin typeface="+mn-lt"/>
+                <a:ea typeface="+mn-ea"/>
+                <a:cs typeface="+mn-cs"/>
+              </a:defRPr>
+            </a:lvl2pPr>
+            <a:lvl3pPr marL="1143000" indent="-228600" algn="l" defTabSz="914400" rtl="0" eaLnBrk="1" latinLnBrk="0" hangingPunct="1">
+              <a:lnSpc>
+                <a:spcPct val="90000"/>
+              </a:lnSpc>
+              <a:spcBef>
+                <a:spcPts val="500"/>
+              </a:spcBef>
+              <a:buFont typeface="Arial" panose="020B0604020202020204" pitchFamily="34" charset="0"/>
+              <a:buChar char="•"/>
+              <a:defRPr sz="2000" kern="1200">
+                <a:solidFill>
+                  <a:schemeClr val="tx1"/>
+                </a:solidFill>
+                <a:latin typeface="+mn-lt"/>
+                <a:ea typeface="+mn-ea"/>
+                <a:cs typeface="+mn-cs"/>
+              </a:defRPr>
+            </a:lvl3pPr>
+            <a:lvl4pPr marL="1600200" indent="-228600" algn="l" defTabSz="914400" rtl="0" eaLnBrk="1" latinLnBrk="0" hangingPunct="1">
+              <a:lnSpc>
+                <a:spcPct val="90000"/>
+              </a:lnSpc>
+              <a:spcBef>
+                <a:spcPts val="500"/>
+              </a:spcBef>
+              <a:buFont typeface="Arial" panose="020B0604020202020204" pitchFamily="34" charset="0"/>
+              <a:buChar char="•"/>
+              <a:defRPr sz="1800" kern="1200">
+                <a:solidFill>
+                  <a:schemeClr val="tx1"/>
+                </a:solidFill>
+                <a:latin typeface="+mn-lt"/>
+                <a:ea typeface="+mn-ea"/>
+                <a:cs typeface="+mn-cs"/>
+              </a:defRPr>
+            </a:lvl4pPr>
+            <a:lvl5pPr marL="2057400" indent="-228600" algn="l" defTabSz="914400" rtl="0" eaLnBrk="1" latinLnBrk="0" hangingPunct="1">
+              <a:lnSpc>
+                <a:spcPct val="90000"/>
+              </a:lnSpc>
+              <a:spcBef>
+                <a:spcPts val="500"/>
+              </a:spcBef>
+              <a:buFont typeface="Arial" panose="020B0604020202020204" pitchFamily="34" charset="0"/>
+              <a:buChar char="•"/>
+              <a:defRPr sz="1800" kern="1200">
+                <a:solidFill>
+                  <a:schemeClr val="tx1"/>
+                </a:solidFill>
+                <a:latin typeface="+mn-lt"/>
+                <a:ea typeface="+mn-ea"/>
+                <a:cs typeface="+mn-cs"/>
+              </a:defRPr>
+            </a:lvl5pPr>
+            <a:lvl6pPr marL="2514600" indent="-228600" algn="l" defTabSz="914400" rtl="0" eaLnBrk="1" latinLnBrk="0" hangingPunct="1">
+              <a:lnSpc>
+                <a:spcPct val="90000"/>
+              </a:lnSpc>
+              <a:spcBef>
+                <a:spcPts val="500"/>
+              </a:spcBef>
+              <a:buFont typeface="Arial" panose="020B0604020202020204" pitchFamily="34" charset="0"/>
+              <a:buChar char="•"/>
+              <a:defRPr sz="1800" kern="1200">
+                <a:solidFill>
+                  <a:schemeClr val="tx1"/>
+                </a:solidFill>
+                <a:latin typeface="+mn-lt"/>
+                <a:ea typeface="+mn-ea"/>
+                <a:cs typeface="+mn-cs"/>
+              </a:defRPr>
+            </a:lvl6pPr>
+            <a:lvl7pPr marL="2971800" indent="-228600" algn="l" defTabSz="914400" rtl="0" eaLnBrk="1" latinLnBrk="0" hangingPunct="1">
+              <a:lnSpc>
+                <a:spcPct val="90000"/>
+              </a:lnSpc>
+              <a:spcBef>
+                <a:spcPts val="500"/>
+              </a:spcBef>
+              <a:buFont typeface="Arial" panose="020B0604020202020204" pitchFamily="34" charset="0"/>
+              <a:buChar char="•"/>
+              <a:defRPr sz="1800" kern="1200">
+                <a:solidFill>
+                  <a:schemeClr val="tx1"/>
+                </a:solidFill>
+                <a:latin typeface="+mn-lt"/>
+                <a:ea typeface="+mn-ea"/>
+                <a:cs typeface="+mn-cs"/>
+              </a:defRPr>
+            </a:lvl7pPr>
+            <a:lvl8pPr marL="3429000" indent="-228600" algn="l" defTabSz="914400" rtl="0" eaLnBrk="1" latinLnBrk="0" hangingPunct="1">
+              <a:lnSpc>
+                <a:spcPct val="90000"/>
+              </a:lnSpc>
+              <a:spcBef>
+                <a:spcPts val="500"/>
+              </a:spcBef>
+              <a:buFont typeface="Arial" panose="020B0604020202020204" pitchFamily="34" charset="0"/>
+              <a:buChar char="•"/>
+              <a:defRPr sz="1800" kern="1200">
+                <a:solidFill>
+                  <a:schemeClr val="tx1"/>
+                </a:solidFill>
+                <a:latin typeface="+mn-lt"/>
+                <a:ea typeface="+mn-ea"/>
+                <a:cs typeface="+mn-cs"/>
+              </a:defRPr>
+            </a:lvl8pPr>
+            <a:lvl9pPr marL="3886200" indent="-228600" algn="l" defTabSz="914400" rtl="0" eaLnBrk="1" latinLnBrk="0" hangingPunct="1">
+              <a:lnSpc>
+                <a:spcPct val="90000"/>
+              </a:lnSpc>
+              <a:spcBef>
+                <a:spcPts val="500"/>
+              </a:spcBef>
+              <a:buFont typeface="Arial" panose="020B0604020202020204" pitchFamily="34" charset="0"/>
+              <a:buChar char="•"/>
+              <a:defRPr sz="1800" kern="1200">
+                <a:solidFill>
+                  <a:schemeClr val="tx1"/>
+                </a:solidFill>
+                <a:latin typeface="+mn-lt"/>
+                <a:ea typeface="+mn-ea"/>
+                <a:cs typeface="+mn-cs"/>
+              </a:defRPr>
+            </a:lvl9pPr>
+          </a:lstStyle>
+          <a:p>
+            <a:pPr marL="228600" marR="0" lvl="0" indent="-228600" algn="ctr" defTabSz="914400" rtl="0" eaLnBrk="1" fontAlgn="auto" latinLnBrk="0" hangingPunct="1">
+              <a:lnSpc>
+                <a:spcPct val="90000"/>
+              </a:lnSpc>
+              <a:spcBef>
+                <a:spcPts val="1000"/>
+              </a:spcBef>
+              <a:spcAft>
+                <a:spcPts val="0"/>
+              </a:spcAft>
+              <a:buClrTx/>
+              <a:buSzTx/>
+              <a:buFont typeface="Arial" panose="020B0604020202020204" pitchFamily="34" charset="0"/>
+              <a:buChar char="•"/>
+              <a:tabLst/>
+              <a:defRPr/>
+            </a:pPr>
+            <a:endParaRPr kumimoji="0" lang="zh-TW" altLang="en-US" sz="2800" b="0" i="0" u="none" strike="noStrike" kern="1200" cap="none" spc="0" normalizeH="0" baseline="0" noProof="0" dirty="0">
+              <a:ln>
+                <a:noFill/>
+              </a:ln>
+              <a:solidFill>
+                <a:prstClr val="black"/>
+              </a:solidFill>
+              <a:effectLst/>
+              <a:uLnTx/>
+              <a:uFillTx/>
+              <a:latin typeface="Calibri" panose="020F0502020204030204"/>
+              <a:ea typeface="新細明體" panose="02020500000000000000" pitchFamily="18" charset="-120"/>
+              <a:cs typeface="+mn-cs"/>
+            </a:endParaRPr>
+          </a:p>
+          <a:p>
+            <a:pPr marL="228600" marR="0" lvl="0" indent="-228600" algn="ctr" defTabSz="914400" rtl="0" eaLnBrk="1" fontAlgn="auto" latinLnBrk="0" hangingPunct="1">
+              <a:lnSpc>
+                <a:spcPct val="90000"/>
+              </a:lnSpc>
+              <a:spcBef>
+                <a:spcPts val="1000"/>
+              </a:spcBef>
+              <a:spcAft>
+                <a:spcPts val="0"/>
+              </a:spcAft>
+              <a:buClrTx/>
+              <a:buSzTx/>
+              <a:buFont typeface="Arial" panose="020B0604020202020204" pitchFamily="34" charset="0"/>
+              <a:buChar char="•"/>
+              <a:tabLst/>
+              <a:defRPr/>
+            </a:pPr>
+            <a:endParaRPr kumimoji="0" lang="en-US" altLang="zh-TW" sz="2800" b="1" i="0" u="none" strike="noStrike" kern="1200" cap="none" spc="0" normalizeH="0" baseline="0" noProof="0" dirty="0">
+              <a:ln>
+                <a:noFill/>
+              </a:ln>
+              <a:solidFill>
+                <a:prstClr val="black"/>
+              </a:solidFill>
+              <a:effectLst/>
+              <a:uLnTx/>
+              <a:uFillTx/>
+              <a:latin typeface="Calibri" panose="020F0502020204030204"/>
+              <a:ea typeface="新細明體" panose="02020500000000000000" pitchFamily="18" charset="-120"/>
+              <a:cs typeface="+mn-cs"/>
+            </a:endParaRPr>
+          </a:p>
+          <a:p>
+            <a:pPr marL="228600" marR="0" lvl="0" indent="-228600" algn="ctr" defTabSz="914400" rtl="0" eaLnBrk="1" fontAlgn="auto" latinLnBrk="0" hangingPunct="1">
+              <a:lnSpc>
+                <a:spcPct val="90000"/>
+              </a:lnSpc>
+              <a:spcBef>
+                <a:spcPts val="1000"/>
+              </a:spcBef>
+              <a:spcAft>
+                <a:spcPts val="0"/>
+              </a:spcAft>
+              <a:buClrTx/>
+              <a:buSzTx/>
+              <a:buFont typeface="Arial" panose="020B0604020202020204" pitchFamily="34" charset="0"/>
+              <a:buChar char="•"/>
+              <a:tabLst/>
+              <a:defRPr/>
+            </a:pPr>
+            <a:endParaRPr kumimoji="0" lang="en-US" altLang="zh-TW" sz="2800" b="1" i="0" u="none" strike="noStrike" kern="1200" cap="none" spc="0" normalizeH="0" baseline="0" noProof="0" dirty="0">
+              <a:ln>
+                <a:noFill/>
+              </a:ln>
+              <a:solidFill>
+                <a:prstClr val="black"/>
+              </a:solidFill>
+              <a:effectLst/>
+              <a:uLnTx/>
+              <a:uFillTx/>
+              <a:latin typeface="Calibri" panose="020F0502020204030204"/>
+              <a:ea typeface="新細明體" panose="02020500000000000000" pitchFamily="18" charset="-120"/>
+              <a:cs typeface="+mn-cs"/>
+            </a:endParaRPr>
           </a:p>
         </p:txBody>
       </p:sp>
@@ -6195,6 +6200,35 @@
               </a:rPr>
               <a:t>Summary and outlook</a:t>
             </a:r>
+          </a:p>
+        </p:txBody>
+      </p:sp>
+      <p:sp>
+        <p:nvSpPr>
+          <p:cNvPr id="3" name="投影片編號版面配置區 2">
+            <a:extLst>
+              <a:ext uri="{FF2B5EF4-FFF2-40B4-BE49-F238E27FC236}">
+                <a16:creationId xmlns:a16="http://schemas.microsoft.com/office/drawing/2014/main" id="{A9DCFE80-ACAC-4FCC-807E-86EC53B8FDCC}"/>
+              </a:ext>
+            </a:extLst>
+          </p:cNvPr>
+          <p:cNvSpPr>
+            <a:spLocks noGrp="1"/>
+          </p:cNvSpPr>
+          <p:nvPr>
+            <p:ph type="sldNum" sz="quarter" idx="12"/>
+          </p:nvPr>
+        </p:nvSpPr>
+        <p:spPr/>
+        <p:txBody>
+          <a:bodyPr/>
+          <a:lstStyle/>
+          <a:p>
+            <a:fld id="{9094BDCA-F584-4E62-B2F1-580C4F37E8BD}" type="slidenum">
+              <a:rPr lang="zh-TW" altLang="en-US" smtClean="0"/>
+              <a:t>3</a:t>
+            </a:fld>
+            <a:endParaRPr lang="zh-TW" altLang="en-US"/>
           </a:p>
         </p:txBody>
       </p:sp>
@@ -6585,35 +6619,6 @@
       </p:sp>
       <p:sp>
         <p:nvSpPr>
-          <p:cNvPr id="2" name="投影片編號版面配置區 1">
-            <a:extLst>
-              <a:ext uri="{FF2B5EF4-FFF2-40B4-BE49-F238E27FC236}">
-                <a16:creationId xmlns:a16="http://schemas.microsoft.com/office/drawing/2014/main" id="{98B65FA9-2C67-4FDA-8DAC-794A05FB29BA}"/>
-              </a:ext>
-            </a:extLst>
-          </p:cNvPr>
-          <p:cNvSpPr>
-            <a:spLocks noGrp="1"/>
-          </p:cNvSpPr>
-          <p:nvPr>
-            <p:ph type="sldNum" sz="quarter" idx="12"/>
-          </p:nvPr>
-        </p:nvSpPr>
-        <p:spPr/>
-        <p:txBody>
-          <a:bodyPr/>
-          <a:lstStyle/>
-          <a:p>
-            <a:r>
-              <a:rPr lang="en-US" altLang="zh-TW" dirty="0"/>
-              <a:t>1</a:t>
-            </a:r>
-            <a:endParaRPr lang="zh-TW" altLang="en-US" dirty="0"/>
-          </a:p>
-        </p:txBody>
-      </p:sp>
-      <p:sp>
-        <p:nvSpPr>
           <p:cNvPr id="6" name="內容版面配置區 5">
             <a:extLst>
               <a:ext uri="{FF2B5EF4-FFF2-40B4-BE49-F238E27FC236}">
@@ -6633,6 +6638,35 @@
           <a:bodyPr/>
           <a:lstStyle/>
           <a:p>
+            <a:endParaRPr lang="zh-TW" altLang="en-US"/>
+          </a:p>
+        </p:txBody>
+      </p:sp>
+      <p:sp>
+        <p:nvSpPr>
+          <p:cNvPr id="3" name="投影片編號版面配置區 2">
+            <a:extLst>
+              <a:ext uri="{FF2B5EF4-FFF2-40B4-BE49-F238E27FC236}">
+                <a16:creationId xmlns:a16="http://schemas.microsoft.com/office/drawing/2014/main" id="{8B99EEC2-809E-4AF1-B22E-26AA648FF496}"/>
+              </a:ext>
+            </a:extLst>
+          </p:cNvPr>
+          <p:cNvSpPr>
+            <a:spLocks noGrp="1"/>
+          </p:cNvSpPr>
+          <p:nvPr>
+            <p:ph type="sldNum" sz="quarter" idx="12"/>
+          </p:nvPr>
+        </p:nvSpPr>
+        <p:spPr/>
+        <p:txBody>
+          <a:bodyPr/>
+          <a:lstStyle/>
+          <a:p>
+            <a:fld id="{9094BDCA-F584-4E62-B2F1-580C4F37E8BD}" type="slidenum">
+              <a:rPr lang="zh-TW" altLang="en-US" smtClean="0"/>
+              <a:t>4</a:t>
+            </a:fld>
             <a:endParaRPr lang="zh-TW" altLang="en-US"/>
           </a:p>
         </p:txBody>
@@ -7024,35 +7058,6 @@
       </p:sp>
       <p:sp>
         <p:nvSpPr>
-          <p:cNvPr id="2" name="投影片編號版面配置區 1">
-            <a:extLst>
-              <a:ext uri="{FF2B5EF4-FFF2-40B4-BE49-F238E27FC236}">
-                <a16:creationId xmlns:a16="http://schemas.microsoft.com/office/drawing/2014/main" id="{98B65FA9-2C67-4FDA-8DAC-794A05FB29BA}"/>
-              </a:ext>
-            </a:extLst>
-          </p:cNvPr>
-          <p:cNvSpPr>
-            <a:spLocks noGrp="1"/>
-          </p:cNvSpPr>
-          <p:nvPr>
-            <p:ph type="sldNum" sz="quarter" idx="12"/>
-          </p:nvPr>
-        </p:nvSpPr>
-        <p:spPr/>
-        <p:txBody>
-          <a:bodyPr/>
-          <a:lstStyle/>
-          <a:p>
-            <a:r>
-              <a:rPr lang="en-US" altLang="zh-TW" dirty="0"/>
-              <a:t>1</a:t>
-            </a:r>
-            <a:endParaRPr lang="zh-TW" altLang="en-US" dirty="0"/>
-          </a:p>
-        </p:txBody>
-      </p:sp>
-      <p:sp>
-        <p:nvSpPr>
           <p:cNvPr id="9" name="內容版面配置區 2">
             <a:extLst>
               <a:ext uri="{FF2B5EF4-FFF2-40B4-BE49-F238E27FC236}">
@@ -7425,6 +7430,35 @@
               </a:rPr>
               <a:t>Summary and outlook</a:t>
             </a:r>
+          </a:p>
+        </p:txBody>
+      </p:sp>
+      <p:sp>
+        <p:nvSpPr>
+          <p:cNvPr id="3" name="投影片編號版面配置區 2">
+            <a:extLst>
+              <a:ext uri="{FF2B5EF4-FFF2-40B4-BE49-F238E27FC236}">
+                <a16:creationId xmlns:a16="http://schemas.microsoft.com/office/drawing/2014/main" id="{74AA9810-D2AB-4EA5-AA16-19E6AFE40B68}"/>
+              </a:ext>
+            </a:extLst>
+          </p:cNvPr>
+          <p:cNvSpPr>
+            <a:spLocks noGrp="1"/>
+          </p:cNvSpPr>
+          <p:nvPr>
+            <p:ph type="sldNum" sz="quarter" idx="12"/>
+          </p:nvPr>
+        </p:nvSpPr>
+        <p:spPr/>
+        <p:txBody>
+          <a:bodyPr/>
+          <a:lstStyle/>
+          <a:p>
+            <a:fld id="{9094BDCA-F584-4E62-B2F1-580C4F37E8BD}" type="slidenum">
+              <a:rPr lang="zh-TW" altLang="en-US" smtClean="0"/>
+              <a:t>5</a:t>
+            </a:fld>
+            <a:endParaRPr lang="zh-TW" altLang="en-US"/>
           </a:p>
         </p:txBody>
       </p:sp>
@@ -7458,6 +7492,290 @@
           <a:chExt cx="0" cy="0"/>
         </a:xfrm>
       </p:grpSpPr>
+      <p:grpSp>
+        <p:nvGrpSpPr>
+          <p:cNvPr id="35" name="群組 34">
+            <a:extLst>
+              <a:ext uri="{FF2B5EF4-FFF2-40B4-BE49-F238E27FC236}">
+                <a16:creationId xmlns:a16="http://schemas.microsoft.com/office/drawing/2014/main" id="{620C9717-50DD-409A-90BE-82D08BA5518C}"/>
+              </a:ext>
+            </a:extLst>
+          </p:cNvPr>
+          <p:cNvGrpSpPr/>
+          <p:nvPr/>
+        </p:nvGrpSpPr>
+        <p:grpSpPr>
+          <a:xfrm>
+            <a:off x="1022158" y="1243264"/>
+            <a:ext cx="4734406" cy="5380649"/>
+            <a:chOff x="1022158" y="1243264"/>
+            <a:chExt cx="4734406" cy="5380649"/>
+          </a:xfrm>
+        </p:grpSpPr>
+        <p:sp>
+          <p:nvSpPr>
+            <p:cNvPr id="25" name="矩形 24">
+              <a:extLst>
+                <a:ext uri="{FF2B5EF4-FFF2-40B4-BE49-F238E27FC236}">
+                  <a16:creationId xmlns:a16="http://schemas.microsoft.com/office/drawing/2014/main" id="{748DFC57-A9A0-4E76-9A1C-37A7891E3076}"/>
+                </a:ext>
+              </a:extLst>
+            </p:cNvPr>
+            <p:cNvSpPr/>
+            <p:nvPr/>
+          </p:nvSpPr>
+          <p:spPr>
+            <a:xfrm>
+              <a:off x="1022158" y="4044758"/>
+              <a:ext cx="2836334" cy="1579732"/>
+            </a:xfrm>
+            <a:prstGeom prst="rect">
+              <a:avLst/>
+            </a:prstGeom>
+            <a:solidFill>
+              <a:schemeClr val="accent4">
+                <a:lumMod val="20000"/>
+                <a:lumOff val="80000"/>
+              </a:schemeClr>
+            </a:solidFill>
+            <a:ln>
+              <a:solidFill>
+                <a:srgbClr val="FF0000"/>
+              </a:solidFill>
+            </a:ln>
+          </p:spPr>
+          <p:style>
+            <a:lnRef idx="2">
+              <a:schemeClr val="accent1">
+                <a:shade val="50000"/>
+              </a:schemeClr>
+            </a:lnRef>
+            <a:fillRef idx="1">
+              <a:schemeClr val="accent1"/>
+            </a:fillRef>
+            <a:effectRef idx="0">
+              <a:schemeClr val="accent1"/>
+            </a:effectRef>
+            <a:fontRef idx="minor">
+              <a:schemeClr val="lt1"/>
+            </a:fontRef>
+          </p:style>
+          <p:txBody>
+            <a:bodyPr rtlCol="0" anchor="ctr"/>
+            <a:lstStyle/>
+            <a:p>
+              <a:pPr algn="ctr"/>
+              <a:endParaRPr lang="zh-TW" altLang="en-US"/>
+            </a:p>
+          </p:txBody>
+        </p:sp>
+        <p:sp>
+          <p:nvSpPr>
+            <p:cNvPr id="29" name="梯形 28">
+              <a:extLst>
+                <a:ext uri="{FF2B5EF4-FFF2-40B4-BE49-F238E27FC236}">
+                  <a16:creationId xmlns:a16="http://schemas.microsoft.com/office/drawing/2014/main" id="{789E37BD-26F9-410D-90A9-245E94B638E1}"/>
+                </a:ext>
+              </a:extLst>
+            </p:cNvPr>
+            <p:cNvSpPr/>
+            <p:nvPr/>
+          </p:nvSpPr>
+          <p:spPr>
+            <a:xfrm rot="16200000">
+              <a:off x="2110853" y="2978203"/>
+              <a:ext cx="5380649" cy="1910772"/>
+            </a:xfrm>
+            <a:custGeom>
+              <a:avLst/>
+              <a:gdLst>
+                <a:gd name="connsiteX0" fmla="*/ 0 w 5380649"/>
+                <a:gd name="connsiteY0" fmla="*/ 1587501 h 1587501"/>
+                <a:gd name="connsiteX1" fmla="*/ 1001221 w 5380649"/>
+                <a:gd name="connsiteY1" fmla="*/ 0 h 1587501"/>
+                <a:gd name="connsiteX2" fmla="*/ 4379428 w 5380649"/>
+                <a:gd name="connsiteY2" fmla="*/ 0 h 1587501"/>
+                <a:gd name="connsiteX3" fmla="*/ 5380649 w 5380649"/>
+                <a:gd name="connsiteY3" fmla="*/ 1587501 h 1587501"/>
+                <a:gd name="connsiteX4" fmla="*/ 0 w 5380649"/>
+                <a:gd name="connsiteY4" fmla="*/ 1587501 h 1587501"/>
+                <a:gd name="connsiteX0" fmla="*/ 0 w 5380649"/>
+                <a:gd name="connsiteY0" fmla="*/ 1597026 h 1597026"/>
+                <a:gd name="connsiteX1" fmla="*/ 1001221 w 5380649"/>
+                <a:gd name="connsiteY1" fmla="*/ 9525 h 1597026"/>
+                <a:gd name="connsiteX2" fmla="*/ 2560153 w 5380649"/>
+                <a:gd name="connsiteY2" fmla="*/ 0 h 1597026"/>
+                <a:gd name="connsiteX3" fmla="*/ 5380649 w 5380649"/>
+                <a:gd name="connsiteY3" fmla="*/ 1597026 h 1597026"/>
+                <a:gd name="connsiteX4" fmla="*/ 0 w 5380649"/>
+                <a:gd name="connsiteY4" fmla="*/ 1597026 h 1597026"/>
+                <a:gd name="connsiteX0" fmla="*/ 0 w 5380649"/>
+                <a:gd name="connsiteY0" fmla="*/ 1592264 h 1592264"/>
+                <a:gd name="connsiteX1" fmla="*/ 1001221 w 5380649"/>
+                <a:gd name="connsiteY1" fmla="*/ 4763 h 1592264"/>
+                <a:gd name="connsiteX2" fmla="*/ 2579203 w 5380649"/>
+                <a:gd name="connsiteY2" fmla="*/ 0 h 1592264"/>
+                <a:gd name="connsiteX3" fmla="*/ 5380649 w 5380649"/>
+                <a:gd name="connsiteY3" fmla="*/ 1592264 h 1592264"/>
+                <a:gd name="connsiteX4" fmla="*/ 0 w 5380649"/>
+                <a:gd name="connsiteY4" fmla="*/ 1592264 h 1592264"/>
+              </a:gdLst>
+              <a:ahLst/>
+              <a:cxnLst>
+                <a:cxn ang="0">
+                  <a:pos x="connsiteX0" y="connsiteY0"/>
+                </a:cxn>
+                <a:cxn ang="0">
+                  <a:pos x="connsiteX1" y="connsiteY1"/>
+                </a:cxn>
+                <a:cxn ang="0">
+                  <a:pos x="connsiteX2" y="connsiteY2"/>
+                </a:cxn>
+                <a:cxn ang="0">
+                  <a:pos x="connsiteX3" y="connsiteY3"/>
+                </a:cxn>
+                <a:cxn ang="0">
+                  <a:pos x="connsiteX4" y="connsiteY4"/>
+                </a:cxn>
+              </a:cxnLst>
+              <a:rect l="l" t="t" r="r" b="b"/>
+              <a:pathLst>
+                <a:path w="5380649" h="1592264">
+                  <a:moveTo>
+                    <a:pt x="0" y="1592264"/>
+                  </a:moveTo>
+                  <a:lnTo>
+                    <a:pt x="1001221" y="4763"/>
+                  </a:lnTo>
+                  <a:lnTo>
+                    <a:pt x="2579203" y="0"/>
+                  </a:lnTo>
+                  <a:lnTo>
+                    <a:pt x="5380649" y="1592264"/>
+                  </a:lnTo>
+                  <a:lnTo>
+                    <a:pt x="0" y="1592264"/>
+                  </a:lnTo>
+                  <a:close/>
+                </a:path>
+              </a:pathLst>
+            </a:custGeom>
+            <a:gradFill flip="none" rotWithShape="1">
+              <a:gsLst>
+                <a:gs pos="0">
+                  <a:schemeClr val="accent4">
+                    <a:lumMod val="20000"/>
+                    <a:lumOff val="80000"/>
+                  </a:schemeClr>
+                </a:gs>
+                <a:gs pos="27000">
+                  <a:srgbClr val="FFF3D0"/>
+                </a:gs>
+                <a:gs pos="100000">
+                  <a:schemeClr val="bg1"/>
+                </a:gs>
+              </a:gsLst>
+              <a:lin ang="5400000" scaled="0"/>
+              <a:tileRect/>
+            </a:gradFill>
+            <a:ln>
+              <a:gradFill>
+                <a:gsLst>
+                  <a:gs pos="0">
+                    <a:srgbClr val="FF0000"/>
+                  </a:gs>
+                  <a:gs pos="26000">
+                    <a:srgbClr val="FF0000"/>
+                  </a:gs>
+                  <a:gs pos="100000">
+                    <a:schemeClr val="bg1"/>
+                  </a:gs>
+                </a:gsLst>
+                <a:lin ang="5400000" scaled="1"/>
+              </a:gradFill>
+            </a:ln>
+          </p:spPr>
+          <p:style>
+            <a:lnRef idx="2">
+              <a:schemeClr val="accent1">
+                <a:shade val="50000"/>
+              </a:schemeClr>
+            </a:lnRef>
+            <a:fillRef idx="1">
+              <a:schemeClr val="accent1"/>
+            </a:fillRef>
+            <a:effectRef idx="0">
+              <a:schemeClr val="accent1"/>
+            </a:effectRef>
+            <a:fontRef idx="minor">
+              <a:schemeClr val="lt1"/>
+            </a:fontRef>
+          </p:style>
+          <p:txBody>
+            <a:bodyPr rtlCol="0" anchor="ctr"/>
+            <a:lstStyle/>
+            <a:p>
+              <a:pPr algn="ctr"/>
+              <a:endParaRPr lang="zh-TW" altLang="en-US" dirty="0"/>
+            </a:p>
+          </p:txBody>
+        </p:sp>
+        <p:sp>
+          <p:nvSpPr>
+            <p:cNvPr id="34" name="矩形 33">
+              <a:extLst>
+                <a:ext uri="{FF2B5EF4-FFF2-40B4-BE49-F238E27FC236}">
+                  <a16:creationId xmlns:a16="http://schemas.microsoft.com/office/drawing/2014/main" id="{F9439562-A568-4D18-9867-4902DB99DDA2}"/>
+                </a:ext>
+              </a:extLst>
+            </p:cNvPr>
+            <p:cNvSpPr/>
+            <p:nvPr/>
+          </p:nvSpPr>
+          <p:spPr>
+            <a:xfrm>
+              <a:off x="3803649" y="4065815"/>
+              <a:ext cx="203009" cy="1563688"/>
+            </a:xfrm>
+            <a:prstGeom prst="rect">
+              <a:avLst/>
+            </a:prstGeom>
+            <a:solidFill>
+              <a:schemeClr val="accent4">
+                <a:lumMod val="20000"/>
+                <a:lumOff val="80000"/>
+              </a:schemeClr>
+            </a:solidFill>
+            <a:ln>
+              <a:noFill/>
+            </a:ln>
+          </p:spPr>
+          <p:style>
+            <a:lnRef idx="2">
+              <a:schemeClr val="accent1">
+                <a:shade val="50000"/>
+              </a:schemeClr>
+            </a:lnRef>
+            <a:fillRef idx="1">
+              <a:schemeClr val="accent1"/>
+            </a:fillRef>
+            <a:effectRef idx="0">
+              <a:schemeClr val="accent1"/>
+            </a:effectRef>
+            <a:fontRef idx="minor">
+              <a:schemeClr val="lt1"/>
+            </a:fontRef>
+          </p:style>
+          <p:txBody>
+            <a:bodyPr rtlCol="0" anchor="ctr"/>
+            <a:lstStyle/>
+            <a:p>
+              <a:pPr algn="ctr"/>
+              <a:endParaRPr lang="zh-TW" altLang="en-US" dirty="0"/>
+            </a:p>
+          </p:txBody>
+        </p:sp>
+      </p:grpSp>
       <p:sp>
         <p:nvSpPr>
           <p:cNvPr id="8" name="標題 1">
@@ -7523,10 +7841,3629 @@
       </p:sp>
       <p:sp>
         <p:nvSpPr>
-          <p:cNvPr id="2" name="投影片編號版面配置區 1">
+          <p:cNvPr id="4" name="內容版面配置區 2">
             <a:extLst>
               <a:ext uri="{FF2B5EF4-FFF2-40B4-BE49-F238E27FC236}">
-                <a16:creationId xmlns:a16="http://schemas.microsoft.com/office/drawing/2014/main" id="{98B65FA9-2C67-4FDA-8DAC-794A05FB29BA}"/>
+                <a16:creationId xmlns:a16="http://schemas.microsoft.com/office/drawing/2014/main" id="{5DA96697-0ABD-42F4-AB54-BFED11402B42}"/>
+              </a:ext>
+            </a:extLst>
+          </p:cNvPr>
+          <p:cNvSpPr txBox="1">
+            <a:spLocks/>
+          </p:cNvSpPr>
+          <p:nvPr/>
+        </p:nvSpPr>
+        <p:spPr>
+          <a:xfrm>
+            <a:off x="75705" y="705950"/>
+            <a:ext cx="10515600" cy="538898"/>
+          </a:xfrm>
+          <a:prstGeom prst="rect">
+            <a:avLst/>
+          </a:prstGeom>
+        </p:spPr>
+        <p:txBody>
+          <a:bodyPr vert="horz" lIns="91440" tIns="45720" rIns="91440" bIns="45720" rtlCol="0">
+            <a:noAutofit/>
+          </a:bodyPr>
+          <a:lstStyle>
+            <a:lvl1pPr marL="228600" indent="-228600" algn="l" defTabSz="914400" rtl="0" eaLnBrk="1" latinLnBrk="0" hangingPunct="1">
+              <a:lnSpc>
+                <a:spcPct val="90000"/>
+              </a:lnSpc>
+              <a:spcBef>
+                <a:spcPts val="1000"/>
+              </a:spcBef>
+              <a:buFont typeface="Arial" panose="020B0604020202020204" pitchFamily="34" charset="0"/>
+              <a:buChar char="•"/>
+              <a:defRPr sz="2800" kern="1200">
+                <a:solidFill>
+                  <a:schemeClr val="tx1"/>
+                </a:solidFill>
+                <a:latin typeface="+mn-lt"/>
+                <a:ea typeface="+mn-ea"/>
+                <a:cs typeface="+mn-cs"/>
+              </a:defRPr>
+            </a:lvl1pPr>
+            <a:lvl2pPr marL="685800" indent="-228600" algn="l" defTabSz="914400" rtl="0" eaLnBrk="1" latinLnBrk="0" hangingPunct="1">
+              <a:lnSpc>
+                <a:spcPct val="90000"/>
+              </a:lnSpc>
+              <a:spcBef>
+                <a:spcPts val="500"/>
+              </a:spcBef>
+              <a:buFont typeface="Arial" panose="020B0604020202020204" pitchFamily="34" charset="0"/>
+              <a:buChar char="•"/>
+              <a:defRPr sz="2400" kern="1200">
+                <a:solidFill>
+                  <a:schemeClr val="tx1"/>
+                </a:solidFill>
+                <a:latin typeface="+mn-lt"/>
+                <a:ea typeface="+mn-ea"/>
+                <a:cs typeface="+mn-cs"/>
+              </a:defRPr>
+            </a:lvl2pPr>
+            <a:lvl3pPr marL="1143000" indent="-228600" algn="l" defTabSz="914400" rtl="0" eaLnBrk="1" latinLnBrk="0" hangingPunct="1">
+              <a:lnSpc>
+                <a:spcPct val="90000"/>
+              </a:lnSpc>
+              <a:spcBef>
+                <a:spcPts val="500"/>
+              </a:spcBef>
+              <a:buFont typeface="Arial" panose="020B0604020202020204" pitchFamily="34" charset="0"/>
+              <a:buChar char="•"/>
+              <a:defRPr sz="2000" kern="1200">
+                <a:solidFill>
+                  <a:schemeClr val="tx1"/>
+                </a:solidFill>
+                <a:latin typeface="+mn-lt"/>
+                <a:ea typeface="+mn-ea"/>
+                <a:cs typeface="+mn-cs"/>
+              </a:defRPr>
+            </a:lvl3pPr>
+            <a:lvl4pPr marL="1600200" indent="-228600" algn="l" defTabSz="914400" rtl="0" eaLnBrk="1" latinLnBrk="0" hangingPunct="1">
+              <a:lnSpc>
+                <a:spcPct val="90000"/>
+              </a:lnSpc>
+              <a:spcBef>
+                <a:spcPts val="500"/>
+              </a:spcBef>
+              <a:buFont typeface="Arial" panose="020B0604020202020204" pitchFamily="34" charset="0"/>
+              <a:buChar char="•"/>
+              <a:defRPr sz="1800" kern="1200">
+                <a:solidFill>
+                  <a:schemeClr val="tx1"/>
+                </a:solidFill>
+                <a:latin typeface="+mn-lt"/>
+                <a:ea typeface="+mn-ea"/>
+                <a:cs typeface="+mn-cs"/>
+              </a:defRPr>
+            </a:lvl4pPr>
+            <a:lvl5pPr marL="2057400" indent="-228600" algn="l" defTabSz="914400" rtl="0" eaLnBrk="1" latinLnBrk="0" hangingPunct="1">
+              <a:lnSpc>
+                <a:spcPct val="90000"/>
+              </a:lnSpc>
+              <a:spcBef>
+                <a:spcPts val="500"/>
+              </a:spcBef>
+              <a:buFont typeface="Arial" panose="020B0604020202020204" pitchFamily="34" charset="0"/>
+              <a:buChar char="•"/>
+              <a:defRPr sz="1800" kern="1200">
+                <a:solidFill>
+                  <a:schemeClr val="tx1"/>
+                </a:solidFill>
+                <a:latin typeface="+mn-lt"/>
+                <a:ea typeface="+mn-ea"/>
+                <a:cs typeface="+mn-cs"/>
+              </a:defRPr>
+            </a:lvl5pPr>
+            <a:lvl6pPr marL="2514600" indent="-228600" algn="l" defTabSz="914400" rtl="0" eaLnBrk="1" latinLnBrk="0" hangingPunct="1">
+              <a:lnSpc>
+                <a:spcPct val="90000"/>
+              </a:lnSpc>
+              <a:spcBef>
+                <a:spcPts val="500"/>
+              </a:spcBef>
+              <a:buFont typeface="Arial" panose="020B0604020202020204" pitchFamily="34" charset="0"/>
+              <a:buChar char="•"/>
+              <a:defRPr sz="1800" kern="1200">
+                <a:solidFill>
+                  <a:schemeClr val="tx1"/>
+                </a:solidFill>
+                <a:latin typeface="+mn-lt"/>
+                <a:ea typeface="+mn-ea"/>
+                <a:cs typeface="+mn-cs"/>
+              </a:defRPr>
+            </a:lvl6pPr>
+            <a:lvl7pPr marL="2971800" indent="-228600" algn="l" defTabSz="914400" rtl="0" eaLnBrk="1" latinLnBrk="0" hangingPunct="1">
+              <a:lnSpc>
+                <a:spcPct val="90000"/>
+              </a:lnSpc>
+              <a:spcBef>
+                <a:spcPts val="500"/>
+              </a:spcBef>
+              <a:buFont typeface="Arial" panose="020B0604020202020204" pitchFamily="34" charset="0"/>
+              <a:buChar char="•"/>
+              <a:defRPr sz="1800" kern="1200">
+                <a:solidFill>
+                  <a:schemeClr val="tx1"/>
+                </a:solidFill>
+                <a:latin typeface="+mn-lt"/>
+                <a:ea typeface="+mn-ea"/>
+                <a:cs typeface="+mn-cs"/>
+              </a:defRPr>
+            </a:lvl7pPr>
+            <a:lvl8pPr marL="3429000" indent="-228600" algn="l" defTabSz="914400" rtl="0" eaLnBrk="1" latinLnBrk="0" hangingPunct="1">
+              <a:lnSpc>
+                <a:spcPct val="90000"/>
+              </a:lnSpc>
+              <a:spcBef>
+                <a:spcPts val="500"/>
+              </a:spcBef>
+              <a:buFont typeface="Arial" panose="020B0604020202020204" pitchFamily="34" charset="0"/>
+              <a:buChar char="•"/>
+              <a:defRPr sz="1800" kern="1200">
+                <a:solidFill>
+                  <a:schemeClr val="tx1"/>
+                </a:solidFill>
+                <a:latin typeface="+mn-lt"/>
+                <a:ea typeface="+mn-ea"/>
+                <a:cs typeface="+mn-cs"/>
+              </a:defRPr>
+            </a:lvl8pPr>
+            <a:lvl9pPr marL="3886200" indent="-228600" algn="l" defTabSz="914400" rtl="0" eaLnBrk="1" latinLnBrk="0" hangingPunct="1">
+              <a:lnSpc>
+                <a:spcPct val="90000"/>
+              </a:lnSpc>
+              <a:spcBef>
+                <a:spcPts val="500"/>
+              </a:spcBef>
+              <a:buFont typeface="Arial" panose="020B0604020202020204" pitchFamily="34" charset="0"/>
+              <a:buChar char="•"/>
+              <a:defRPr sz="1800" kern="1200">
+                <a:solidFill>
+                  <a:schemeClr val="tx1"/>
+                </a:solidFill>
+                <a:latin typeface="+mn-lt"/>
+                <a:ea typeface="+mn-ea"/>
+                <a:cs typeface="+mn-cs"/>
+              </a:defRPr>
+            </a:lvl9pPr>
+          </a:lstStyle>
+          <a:p>
+            <a:pPr marL="0" indent="0">
+              <a:lnSpc>
+                <a:spcPct val="150000"/>
+              </a:lnSpc>
+              <a:buClr>
+                <a:schemeClr val="accent1">
+                  <a:lumMod val="75000"/>
+                </a:schemeClr>
+              </a:buClr>
+              <a:buNone/>
+            </a:pPr>
+            <a:r>
+              <a:rPr lang="en-US" altLang="zh-TW" sz="1800" dirty="0">
+                <a:latin typeface="Times New Roman" panose="02020603050405020304" pitchFamily="18" charset="0"/>
+                <a:cs typeface="Times New Roman" panose="02020603050405020304" pitchFamily="18" charset="0"/>
+              </a:rPr>
+              <a:t>Laguerre-Gaussian beam is solved from </a:t>
+            </a:r>
+            <a:r>
+              <a:rPr lang="en-US" altLang="zh-TW" sz="1800" b="1" dirty="0">
+                <a:latin typeface="Times New Roman" panose="02020603050405020304" pitchFamily="18" charset="0"/>
+                <a:cs typeface="Times New Roman" panose="02020603050405020304" pitchFamily="18" charset="0"/>
+              </a:rPr>
+              <a:t>paraxial</a:t>
+            </a:r>
+            <a:r>
+              <a:rPr lang="en-US" altLang="zh-TW" sz="1800" dirty="0">
+                <a:latin typeface="Times New Roman" panose="02020603050405020304" pitchFamily="18" charset="0"/>
+                <a:cs typeface="Times New Roman" panose="02020603050405020304" pitchFamily="18" charset="0"/>
+              </a:rPr>
+              <a:t> </a:t>
+            </a:r>
+            <a:r>
+              <a:rPr lang="en-US" altLang="zh-TW" sz="1800" b="1" dirty="0">
+                <a:latin typeface="Times New Roman" panose="02020603050405020304" pitchFamily="18" charset="0"/>
+                <a:cs typeface="Times New Roman" panose="02020603050405020304" pitchFamily="18" charset="0"/>
+              </a:rPr>
+              <a:t>Helmholtz</a:t>
+            </a:r>
+            <a:r>
+              <a:rPr lang="zh-TW" altLang="en-US" sz="1800" b="1" dirty="0">
+                <a:latin typeface="Times New Roman" panose="02020603050405020304" pitchFamily="18" charset="0"/>
+                <a:cs typeface="Times New Roman" panose="02020603050405020304" pitchFamily="18" charset="0"/>
+              </a:rPr>
+              <a:t> </a:t>
+            </a:r>
+            <a:r>
+              <a:rPr lang="en-US" altLang="zh-TW" sz="1800" b="1" dirty="0">
+                <a:latin typeface="Times New Roman" panose="02020603050405020304" pitchFamily="18" charset="0"/>
+                <a:cs typeface="Times New Roman" panose="02020603050405020304" pitchFamily="18" charset="0"/>
+              </a:rPr>
+              <a:t>equation </a:t>
+            </a:r>
+            <a:r>
+              <a:rPr lang="en-US" altLang="zh-TW" sz="1800" dirty="0">
+                <a:latin typeface="Times New Roman" panose="02020603050405020304" pitchFamily="18" charset="0"/>
+                <a:cs typeface="Times New Roman" panose="02020603050405020304" pitchFamily="18" charset="0"/>
+              </a:rPr>
+              <a:t>within </a:t>
+            </a:r>
+            <a:r>
+              <a:rPr lang="en-US" altLang="zh-TW" sz="1800" b="1" dirty="0">
+                <a:latin typeface="Times New Roman" panose="02020603050405020304" pitchFamily="18" charset="0"/>
+                <a:cs typeface="Times New Roman" panose="02020603050405020304" pitchFamily="18" charset="0"/>
+              </a:rPr>
+              <a:t>Lorentz gauge</a:t>
+            </a:r>
+            <a:r>
+              <a:rPr lang="en-US" altLang="zh-TW" sz="1800" dirty="0">
+                <a:latin typeface="Times New Roman" panose="02020603050405020304" pitchFamily="18" charset="0"/>
+                <a:cs typeface="Times New Roman" panose="02020603050405020304" pitchFamily="18" charset="0"/>
+              </a:rPr>
+              <a:t>.</a:t>
+            </a:r>
+            <a:r>
+              <a:rPr lang="zh-TW" altLang="en-US" sz="1800" b="1" dirty="0">
+                <a:latin typeface="Times New Roman" panose="02020603050405020304" pitchFamily="18" charset="0"/>
+                <a:cs typeface="Times New Roman" panose="02020603050405020304" pitchFamily="18" charset="0"/>
+              </a:rPr>
+              <a:t>  </a:t>
+            </a:r>
+            <a:r>
+              <a:rPr lang="en-US" altLang="zh-TW" sz="1800" dirty="0">
+                <a:latin typeface="Times New Roman" panose="02020603050405020304" pitchFamily="18" charset="0"/>
+                <a:cs typeface="Times New Roman" panose="02020603050405020304" pitchFamily="18" charset="0"/>
+              </a:rPr>
+              <a:t>Why?</a:t>
+            </a:r>
+            <a:r>
+              <a:rPr lang="en-US" altLang="zh-TW" sz="1800" b="1" dirty="0">
+                <a:latin typeface="Times New Roman" panose="02020603050405020304" pitchFamily="18" charset="0"/>
+                <a:cs typeface="Times New Roman" panose="02020603050405020304" pitchFamily="18" charset="0"/>
+              </a:rPr>
+              <a:t> </a:t>
+            </a:r>
+          </a:p>
+        </p:txBody>
+      </p:sp>
+      <p:pic>
+        <p:nvPicPr>
+          <p:cNvPr id="3" name="圖片 2">
+            <a:extLst>
+              <a:ext uri="{FF2B5EF4-FFF2-40B4-BE49-F238E27FC236}">
+                <a16:creationId xmlns:a16="http://schemas.microsoft.com/office/drawing/2014/main" id="{B534072E-3FF6-450B-B43C-F626C529AF16}"/>
+              </a:ext>
+            </a:extLst>
+          </p:cNvPr>
+          <p:cNvPicPr>
+            <a:picLocks noChangeAspect="1"/>
+          </p:cNvPicPr>
+          <p:nvPr/>
+        </p:nvPicPr>
+        <p:blipFill>
+          <a:blip r:embed="rId2">
+            <a:clrChange>
+              <a:clrFrom>
+                <a:srgbClr val="FFFFFF"/>
+              </a:clrFrom>
+              <a:clrTo>
+                <a:srgbClr val="FFFFFF">
+                  <a:alpha val="0"/>
+                </a:srgbClr>
+              </a:clrTo>
+            </a:clrChange>
+          </a:blip>
+          <a:stretch>
+            <a:fillRect/>
+          </a:stretch>
+        </p:blipFill>
+        <p:spPr>
+          <a:xfrm>
+            <a:off x="10398666" y="3484647"/>
+            <a:ext cx="2058960" cy="1873468"/>
+          </a:xfrm>
+          <a:prstGeom prst="rect">
+            <a:avLst/>
+          </a:prstGeom>
+        </p:spPr>
+      </p:pic>
+      <mc:AlternateContent xmlns:mc="http://schemas.openxmlformats.org/markup-compatibility/2006">
+        <mc:Choice xmlns:a14="http://schemas.microsoft.com/office/drawing/2010/main" Requires="a14">
+          <p:sp>
+            <p:nvSpPr>
+              <p:cNvPr id="6" name="矩形 5">
+                <a:extLst>
+                  <a:ext uri="{FF2B5EF4-FFF2-40B4-BE49-F238E27FC236}">
+                    <a16:creationId xmlns:a16="http://schemas.microsoft.com/office/drawing/2014/main" id="{4F726B3D-C5EA-4F60-9C4D-212526F0C13E}"/>
+                  </a:ext>
+                </a:extLst>
+              </p:cNvPr>
+              <p:cNvSpPr/>
+              <p:nvPr/>
+            </p:nvSpPr>
+            <p:spPr>
+              <a:xfrm>
+                <a:off x="1078463" y="5938516"/>
+                <a:ext cx="2619161" cy="720325"/>
+              </a:xfrm>
+              <a:prstGeom prst="rect">
+                <a:avLst/>
+              </a:prstGeom>
+            </p:spPr>
+            <p:txBody>
+              <a:bodyPr wrap="square">
+                <a:spAutoFit/>
+              </a:bodyPr>
+              <a:lstStyle/>
+              <a:p>
+                <a:pPr/>
+                <a14:m>
+                  <m:oMathPara xmlns:m="http://schemas.openxmlformats.org/officeDocument/2006/math">
+                    <m:oMathParaPr>
+                      <m:jc m:val="left"/>
+                    </m:oMathParaPr>
+                    <m:oMath xmlns:m="http://schemas.openxmlformats.org/officeDocument/2006/math">
+                      <m:d>
+                        <m:dPr>
+                          <m:ctrlPr>
+                            <a:rPr lang="en-US" altLang="zh-TW" b="0" i="1" smtClean="0">
+                              <a:latin typeface="Cambria Math" panose="02040503050406030204" pitchFamily="18" charset="0"/>
+                            </a:rPr>
+                          </m:ctrlPr>
+                        </m:dPr>
+                        <m:e>
+                          <m:sSubSup>
+                            <m:sSubSupPr>
+                              <m:ctrlPr>
+                                <a:rPr lang="en-US" altLang="zh-TW" i="1">
+                                  <a:latin typeface="Cambria Math" panose="02040503050406030204" pitchFamily="18" charset="0"/>
+                                </a:rPr>
+                              </m:ctrlPr>
+                            </m:sSubSupPr>
+                            <m:e>
+                              <m:r>
+                                <m:rPr>
+                                  <m:sty m:val="p"/>
+                                </m:rPr>
+                                <a:rPr lang="en-US" altLang="zh-TW">
+                                  <a:latin typeface="Cambria Math" panose="02040503050406030204" pitchFamily="18" charset="0"/>
+                                </a:rPr>
+                                <m:t>∇</m:t>
+                              </m:r>
+                            </m:e>
+                            <m:sub>
+                              <m:r>
+                                <a:rPr lang="en-US" altLang="zh-TW" i="1">
+                                  <a:latin typeface="Cambria Math" panose="02040503050406030204" pitchFamily="18" charset="0"/>
+                                </a:rPr>
+                                <m:t>∥</m:t>
+                              </m:r>
+                            </m:sub>
+                            <m:sup>
+                              <m:r>
+                                <a:rPr lang="en-US" altLang="zh-TW" i="1">
+                                  <a:latin typeface="Cambria Math" panose="02040503050406030204" pitchFamily="18" charset="0"/>
+                                </a:rPr>
+                                <m:t>2</m:t>
+                              </m:r>
+                            </m:sup>
+                          </m:sSubSup>
+                          <m:r>
+                            <a:rPr lang="en-US" altLang="zh-TW" i="1">
+                              <a:latin typeface="Cambria Math" panose="02040503050406030204" pitchFamily="18" charset="0"/>
+                            </a:rPr>
+                            <m:t>+</m:t>
+                          </m:r>
+                          <m:sSubSup>
+                            <m:sSubSupPr>
+                              <m:ctrlPr>
+                                <a:rPr lang="en-US" altLang="zh-TW" i="1">
+                                  <a:latin typeface="Cambria Math" panose="02040503050406030204" pitchFamily="18" charset="0"/>
+                                </a:rPr>
+                              </m:ctrlPr>
+                            </m:sSubSupPr>
+                            <m:e>
+                              <m:r>
+                                <a:rPr lang="en-US" altLang="zh-TW" i="1">
+                                  <a:latin typeface="Cambria Math" panose="02040503050406030204" pitchFamily="18" charset="0"/>
+                                </a:rPr>
+                                <m:t>𝑞</m:t>
+                              </m:r>
+                            </m:e>
+                            <m:sub>
+                              <m:r>
+                                <a:rPr lang="en-US" altLang="zh-TW" i="1">
+                                  <a:latin typeface="Cambria Math" panose="02040503050406030204" pitchFamily="18" charset="0"/>
+                                </a:rPr>
+                                <m:t>0</m:t>
+                              </m:r>
+                            </m:sub>
+                            <m:sup>
+                              <m:r>
+                                <a:rPr lang="en-US" altLang="zh-TW" b="0" i="1" smtClean="0">
+                                  <a:latin typeface="Cambria Math" panose="02040503050406030204" pitchFamily="18" charset="0"/>
+                                </a:rPr>
+                                <m:t> </m:t>
+                              </m:r>
+                            </m:sup>
+                          </m:sSubSup>
+                          <m:f>
+                            <m:fPr>
+                              <m:ctrlPr>
+                                <a:rPr lang="en-US" altLang="zh-TW" i="1">
+                                  <a:latin typeface="Cambria Math" panose="02040503050406030204" pitchFamily="18" charset="0"/>
+                                </a:rPr>
+                              </m:ctrlPr>
+                            </m:fPr>
+                            <m:num>
+                              <m:r>
+                                <a:rPr lang="en-US" altLang="zh-TW" i="1">
+                                  <a:latin typeface="Cambria Math" panose="02040503050406030204" pitchFamily="18" charset="0"/>
+                                </a:rPr>
+                                <m:t>𝜕</m:t>
+                              </m:r>
+                            </m:num>
+                            <m:den>
+                              <m:r>
+                                <a:rPr lang="en-US" altLang="zh-TW" i="1">
+                                  <a:latin typeface="Cambria Math" panose="02040503050406030204" pitchFamily="18" charset="0"/>
+                                </a:rPr>
+                                <m:t>𝜕</m:t>
+                              </m:r>
+                              <m:r>
+                                <a:rPr lang="en-US" altLang="zh-TW" i="1">
+                                  <a:latin typeface="Cambria Math" panose="02040503050406030204" pitchFamily="18" charset="0"/>
+                                </a:rPr>
+                                <m:t> </m:t>
+                              </m:r>
+                              <m:r>
+                                <a:rPr lang="en-US" altLang="zh-TW" i="1">
+                                  <a:latin typeface="Cambria Math" panose="02040503050406030204" pitchFamily="18" charset="0"/>
+                                </a:rPr>
+                                <m:t>𝑧</m:t>
+                              </m:r>
+                            </m:den>
+                          </m:f>
+                        </m:e>
+                      </m:d>
+                      <m:r>
+                        <a:rPr lang="en-US" altLang="zh-TW" i="1">
+                          <a:latin typeface="Cambria Math" panose="02040503050406030204" pitchFamily="18" charset="0"/>
+                        </a:rPr>
+                        <m:t>𝑈</m:t>
+                      </m:r>
+                      <m:d>
+                        <m:dPr>
+                          <m:ctrlPr>
+                            <a:rPr lang="en-US" altLang="zh-TW" i="1">
+                              <a:latin typeface="Cambria Math" panose="02040503050406030204" pitchFamily="18" charset="0"/>
+                            </a:rPr>
+                          </m:ctrlPr>
+                        </m:dPr>
+                        <m:e>
+                          <m:r>
+                            <a:rPr lang="en-US" altLang="zh-TW" b="1" i="1">
+                              <a:latin typeface="Cambria Math" panose="02040503050406030204" pitchFamily="18" charset="0"/>
+                            </a:rPr>
+                            <m:t>𝒓</m:t>
+                          </m:r>
+                        </m:e>
+                      </m:d>
+                      <m:r>
+                        <a:rPr lang="en-US" altLang="zh-TW" b="0" i="1" smtClean="0">
+                          <a:latin typeface="Cambria Math" panose="02040503050406030204" pitchFamily="18" charset="0"/>
+                        </a:rPr>
+                        <m:t>≈</m:t>
+                      </m:r>
+                      <m:r>
+                        <a:rPr lang="en-US" altLang="zh-TW" i="1" smtClean="0">
+                          <a:latin typeface="Cambria Math" panose="02040503050406030204" pitchFamily="18" charset="0"/>
+                        </a:rPr>
+                        <m:t> 0</m:t>
+                      </m:r>
+                    </m:oMath>
+                  </m:oMathPara>
+                </a14:m>
+                <a:endParaRPr lang="zh-TW" altLang="en-US" dirty="0">
+                  <a:latin typeface="Times New Roman" panose="02020603050405020304" pitchFamily="18" charset="0"/>
+                  <a:cs typeface="Times New Roman" panose="02020603050405020304" pitchFamily="18" charset="0"/>
+                </a:endParaRPr>
+              </a:p>
+            </p:txBody>
+          </p:sp>
+        </mc:Choice>
+        <mc:Fallback>
+          <p:sp>
+            <p:nvSpPr>
+              <p:cNvPr id="6" name="矩形 5">
+                <a:extLst>
+                  <a:ext uri="{FF2B5EF4-FFF2-40B4-BE49-F238E27FC236}">
+                    <a16:creationId xmlns:a16="http://schemas.microsoft.com/office/drawing/2014/main" id="{4F726B3D-C5EA-4F60-9C4D-212526F0C13E}"/>
+                  </a:ext>
+                </a:extLst>
+              </p:cNvPr>
+              <p:cNvSpPr>
+                <a:spLocks noRot="1" noChangeAspect="1" noMove="1" noResize="1" noEditPoints="1" noAdjustHandles="1" noChangeArrowheads="1" noChangeShapeType="1" noTextEdit="1"/>
+              </p:cNvSpPr>
+              <p:nvPr/>
+            </p:nvSpPr>
+            <p:spPr>
+              <a:xfrm>
+                <a:off x="1078463" y="5938516"/>
+                <a:ext cx="2619161" cy="720325"/>
+              </a:xfrm>
+              <a:prstGeom prst="rect">
+                <a:avLst/>
+              </a:prstGeom>
+              <a:blipFill>
+                <a:blip r:embed="rId3"/>
+                <a:stretch>
+                  <a:fillRect/>
+                </a:stretch>
+              </a:blipFill>
+            </p:spPr>
+            <p:txBody>
+              <a:bodyPr/>
+              <a:lstStyle/>
+              <a:p>
+                <a:r>
+                  <a:rPr lang="zh-TW" altLang="en-US">
+                    <a:noFill/>
+                  </a:rPr>
+                  <a:t> </a:t>
+                </a:r>
+              </a:p>
+            </p:txBody>
+          </p:sp>
+        </mc:Fallback>
+      </mc:AlternateContent>
+      <mc:AlternateContent xmlns:mc="http://schemas.openxmlformats.org/markup-compatibility/2006">
+        <mc:Choice xmlns:a14="http://schemas.microsoft.com/office/drawing/2010/main" Requires="a14">
+          <p:sp>
+            <p:nvSpPr>
+              <p:cNvPr id="9" name="矩形 8">
+                <a:extLst>
+                  <a:ext uri="{FF2B5EF4-FFF2-40B4-BE49-F238E27FC236}">
+                    <a16:creationId xmlns:a16="http://schemas.microsoft.com/office/drawing/2014/main" id="{558D9020-2C4A-4842-9EF2-46682DD67D3B}"/>
+                  </a:ext>
+                </a:extLst>
+              </p:cNvPr>
+              <p:cNvSpPr/>
+              <p:nvPr/>
+            </p:nvSpPr>
+            <p:spPr>
+              <a:xfrm>
+                <a:off x="1078463" y="2008933"/>
+                <a:ext cx="2399393" cy="374783"/>
+              </a:xfrm>
+              <a:prstGeom prst="rect">
+                <a:avLst/>
+              </a:prstGeom>
+            </p:spPr>
+            <p:txBody>
+              <a:bodyPr wrap="square">
+                <a:spAutoFit/>
+              </a:bodyPr>
+              <a:lstStyle/>
+              <a:p>
+                <a:pPr/>
+                <a14:m>
+                  <m:oMathPara xmlns:m="http://schemas.openxmlformats.org/officeDocument/2006/math">
+                    <m:oMathParaPr>
+                      <m:jc m:val="left"/>
+                    </m:oMathParaPr>
+                    <m:oMath xmlns:m="http://schemas.openxmlformats.org/officeDocument/2006/math">
+                      <m:d>
+                        <m:dPr>
+                          <m:ctrlPr>
+                            <a:rPr lang="en-US" altLang="zh-TW" b="0" i="1" smtClean="0">
+                              <a:latin typeface="Cambria Math" panose="02040503050406030204" pitchFamily="18" charset="0"/>
+                            </a:rPr>
+                          </m:ctrlPr>
+                        </m:dPr>
+                        <m:e>
+                          <m:sSubSup>
+                            <m:sSubSupPr>
+                              <m:ctrlPr>
+                                <a:rPr lang="en-US" altLang="zh-TW" i="1">
+                                  <a:latin typeface="Cambria Math" panose="02040503050406030204" pitchFamily="18" charset="0"/>
+                                </a:rPr>
+                              </m:ctrlPr>
+                            </m:sSubSupPr>
+                            <m:e>
+                              <m:r>
+                                <m:rPr>
+                                  <m:sty m:val="p"/>
+                                </m:rPr>
+                                <a:rPr lang="en-US" altLang="zh-TW">
+                                  <a:latin typeface="Cambria Math" panose="02040503050406030204" pitchFamily="18" charset="0"/>
+                                </a:rPr>
+                                <m:t>∇</m:t>
+                              </m:r>
+                            </m:e>
+                            <m:sub>
+                              <m:r>
+                                <a:rPr lang="zh-TW" altLang="en-US" i="1" smtClean="0">
+                                  <a:latin typeface="Cambria Math" panose="02040503050406030204" pitchFamily="18" charset="0"/>
+                                </a:rPr>
+                                <m:t> </m:t>
+                              </m:r>
+                            </m:sub>
+                            <m:sup>
+                              <m:r>
+                                <a:rPr lang="en-US" altLang="zh-TW" i="1">
+                                  <a:latin typeface="Cambria Math" panose="02040503050406030204" pitchFamily="18" charset="0"/>
+                                </a:rPr>
+                                <m:t>2</m:t>
+                              </m:r>
+                            </m:sup>
+                          </m:sSubSup>
+                          <m:r>
+                            <a:rPr lang="en-US" altLang="zh-TW" i="1">
+                              <a:latin typeface="Cambria Math" panose="02040503050406030204" pitchFamily="18" charset="0"/>
+                            </a:rPr>
+                            <m:t>+</m:t>
+                          </m:r>
+                          <m:sSubSup>
+                            <m:sSubSupPr>
+                              <m:ctrlPr>
+                                <a:rPr lang="en-US" altLang="zh-TW" b="0" i="1" smtClean="0">
+                                  <a:latin typeface="Cambria Math" panose="02040503050406030204" pitchFamily="18" charset="0"/>
+                                </a:rPr>
+                              </m:ctrlPr>
+                            </m:sSubSupPr>
+                            <m:e>
+                              <m:r>
+                                <a:rPr lang="en-US" altLang="zh-TW" b="0" i="1" smtClean="0">
+                                  <a:latin typeface="Cambria Math" panose="02040503050406030204" pitchFamily="18" charset="0"/>
+                                </a:rPr>
+                                <m:t>𝑞</m:t>
+                              </m:r>
+                            </m:e>
+                            <m:sub>
+                              <m:r>
+                                <a:rPr lang="en-US" altLang="zh-TW" b="0" i="1" smtClean="0">
+                                  <a:latin typeface="Cambria Math" panose="02040503050406030204" pitchFamily="18" charset="0"/>
+                                </a:rPr>
+                                <m:t>0</m:t>
+                              </m:r>
+                            </m:sub>
+                            <m:sup>
+                              <m:r>
+                                <a:rPr lang="en-US" altLang="zh-TW" b="0" i="1" smtClean="0">
+                                  <a:latin typeface="Cambria Math" panose="02040503050406030204" pitchFamily="18" charset="0"/>
+                                </a:rPr>
+                                <m:t>2</m:t>
+                              </m:r>
+                            </m:sup>
+                          </m:sSubSup>
+                        </m:e>
+                      </m:d>
+                      <m:sSup>
+                        <m:sSupPr>
+                          <m:ctrlPr>
+                            <a:rPr lang="en-US" altLang="zh-TW" b="0" i="1" smtClean="0">
+                              <a:latin typeface="Cambria Math" panose="02040503050406030204" pitchFamily="18" charset="0"/>
+                            </a:rPr>
+                          </m:ctrlPr>
+                        </m:sSupPr>
+                        <m:e>
+                          <m:r>
+                            <a:rPr lang="en-US" altLang="zh-TW" b="0" i="1" smtClean="0">
+                              <a:latin typeface="Cambria Math" panose="02040503050406030204" pitchFamily="18" charset="0"/>
+                            </a:rPr>
+                            <m:t>𝐴</m:t>
+                          </m:r>
+                        </m:e>
+                        <m:sup>
+                          <m:r>
+                            <a:rPr lang="en-US" altLang="zh-TW" b="0" i="1" smtClean="0">
+                              <a:latin typeface="Cambria Math" panose="02040503050406030204" pitchFamily="18" charset="0"/>
+                            </a:rPr>
+                            <m:t>𝐿</m:t>
+                          </m:r>
+                        </m:sup>
+                      </m:sSup>
+                      <m:d>
+                        <m:dPr>
+                          <m:ctrlPr>
+                            <a:rPr lang="en-US" altLang="zh-TW" i="1">
+                              <a:latin typeface="Cambria Math" panose="02040503050406030204" pitchFamily="18" charset="0"/>
+                            </a:rPr>
+                          </m:ctrlPr>
+                        </m:dPr>
+                        <m:e>
+                          <m:r>
+                            <a:rPr lang="en-US" altLang="zh-TW" b="1" i="1">
+                              <a:latin typeface="Cambria Math" panose="02040503050406030204" pitchFamily="18" charset="0"/>
+                            </a:rPr>
+                            <m:t>𝒓</m:t>
+                          </m:r>
+                        </m:e>
+                      </m:d>
+                      <m:r>
+                        <a:rPr lang="en-US" altLang="zh-TW" i="1" smtClean="0">
+                          <a:latin typeface="Cambria Math" panose="02040503050406030204" pitchFamily="18" charset="0"/>
+                        </a:rPr>
+                        <m:t>= 0</m:t>
+                      </m:r>
+                    </m:oMath>
+                  </m:oMathPara>
+                </a14:m>
+                <a:endParaRPr lang="zh-TW" altLang="en-US" dirty="0">
+                  <a:latin typeface="Times New Roman" panose="02020603050405020304" pitchFamily="18" charset="0"/>
+                  <a:cs typeface="Times New Roman" panose="02020603050405020304" pitchFamily="18" charset="0"/>
+                </a:endParaRPr>
+              </a:p>
+            </p:txBody>
+          </p:sp>
+        </mc:Choice>
+        <mc:Fallback>
+          <p:sp>
+            <p:nvSpPr>
+              <p:cNvPr id="9" name="矩形 8">
+                <a:extLst>
+                  <a:ext uri="{FF2B5EF4-FFF2-40B4-BE49-F238E27FC236}">
+                    <a16:creationId xmlns:a16="http://schemas.microsoft.com/office/drawing/2014/main" id="{558D9020-2C4A-4842-9EF2-46682DD67D3B}"/>
+                  </a:ext>
+                </a:extLst>
+              </p:cNvPr>
+              <p:cNvSpPr>
+                <a:spLocks noRot="1" noChangeAspect="1" noMove="1" noResize="1" noEditPoints="1" noAdjustHandles="1" noChangeArrowheads="1" noChangeShapeType="1" noTextEdit="1"/>
+              </p:cNvSpPr>
+              <p:nvPr/>
+            </p:nvSpPr>
+            <p:spPr>
+              <a:xfrm>
+                <a:off x="1078463" y="2008933"/>
+                <a:ext cx="2399393" cy="374783"/>
+              </a:xfrm>
+              <a:prstGeom prst="rect">
+                <a:avLst/>
+              </a:prstGeom>
+              <a:blipFill>
+                <a:blip r:embed="rId4"/>
+                <a:stretch>
+                  <a:fillRect b="-8197"/>
+                </a:stretch>
+              </a:blipFill>
+            </p:spPr>
+            <p:txBody>
+              <a:bodyPr/>
+              <a:lstStyle/>
+              <a:p>
+                <a:r>
+                  <a:rPr lang="zh-TW" altLang="en-US">
+                    <a:noFill/>
+                  </a:rPr>
+                  <a:t> </a:t>
+                </a:r>
+              </a:p>
+            </p:txBody>
+          </p:sp>
+        </mc:Fallback>
+      </mc:AlternateContent>
+      <mc:AlternateContent xmlns:mc="http://schemas.openxmlformats.org/markup-compatibility/2006">
+        <mc:Choice xmlns:a14="http://schemas.microsoft.com/office/drawing/2010/main" Requires="a14">
+          <p:sp>
+            <p:nvSpPr>
+              <p:cNvPr id="10" name="矩形 9">
+                <a:extLst>
+                  <a:ext uri="{FF2B5EF4-FFF2-40B4-BE49-F238E27FC236}">
+                    <a16:creationId xmlns:a16="http://schemas.microsoft.com/office/drawing/2014/main" id="{CB486E36-28C5-4F23-AFE2-1F534A15C9DD}"/>
+                  </a:ext>
+                </a:extLst>
+              </p:cNvPr>
+              <p:cNvSpPr/>
+              <p:nvPr/>
+            </p:nvSpPr>
+            <p:spPr>
+              <a:xfrm>
+                <a:off x="1078463" y="4104569"/>
+                <a:ext cx="2946399" cy="717248"/>
+              </a:xfrm>
+              <a:prstGeom prst="rect">
+                <a:avLst/>
+              </a:prstGeom>
+            </p:spPr>
+            <p:txBody>
+              <a:bodyPr wrap="square">
+                <a:spAutoFit/>
+              </a:bodyPr>
+              <a:lstStyle/>
+              <a:p>
+                <a:pPr/>
+                <a14:m>
+                  <m:oMathPara xmlns:m="http://schemas.openxmlformats.org/officeDocument/2006/math">
+                    <m:oMathParaPr>
+                      <m:jc m:val="left"/>
+                    </m:oMathParaPr>
+                    <m:oMath xmlns:m="http://schemas.openxmlformats.org/officeDocument/2006/math">
+                      <m:d>
+                        <m:dPr>
+                          <m:begChr m:val="|"/>
+                          <m:endChr m:val="|"/>
+                          <m:ctrlPr>
+                            <a:rPr lang="en-US" altLang="zh-TW" b="0" i="1" smtClean="0">
+                              <a:latin typeface="Cambria Math" panose="02040503050406030204" pitchFamily="18" charset="0"/>
+                            </a:rPr>
+                          </m:ctrlPr>
+                        </m:dPr>
+                        <m:e>
+                          <m:f>
+                            <m:fPr>
+                              <m:ctrlPr>
+                                <a:rPr lang="en-US" altLang="zh-TW" i="1">
+                                  <a:latin typeface="Cambria Math" panose="02040503050406030204" pitchFamily="18" charset="0"/>
+                                </a:rPr>
+                              </m:ctrlPr>
+                            </m:fPr>
+                            <m:num>
+                              <m:sSup>
+                                <m:sSupPr>
+                                  <m:ctrlPr>
+                                    <a:rPr lang="en-US" altLang="zh-TW" i="1">
+                                      <a:latin typeface="Cambria Math" panose="02040503050406030204" pitchFamily="18" charset="0"/>
+                                    </a:rPr>
+                                  </m:ctrlPr>
+                                </m:sSupPr>
+                                <m:e>
+                                  <m:r>
+                                    <a:rPr lang="en-US" altLang="zh-TW" i="1">
+                                      <a:latin typeface="Cambria Math" panose="02040503050406030204" pitchFamily="18" charset="0"/>
+                                    </a:rPr>
+                                    <m:t>𝜕</m:t>
+                                  </m:r>
+                                </m:e>
+                                <m:sup>
+                                  <m:r>
+                                    <a:rPr lang="en-US" altLang="zh-TW" i="1">
+                                      <a:latin typeface="Cambria Math" panose="02040503050406030204" pitchFamily="18" charset="0"/>
+                                    </a:rPr>
+                                    <m:t>2</m:t>
+                                  </m:r>
+                                </m:sup>
+                              </m:sSup>
+                            </m:num>
+                            <m:den>
+                              <m:r>
+                                <a:rPr lang="en-US" altLang="zh-TW" i="1">
+                                  <a:latin typeface="Cambria Math" panose="02040503050406030204" pitchFamily="18" charset="0"/>
+                                </a:rPr>
+                                <m:t>𝜕</m:t>
+                              </m:r>
+                              <m:r>
+                                <a:rPr lang="en-US" altLang="zh-TW" i="1">
+                                  <a:latin typeface="Cambria Math" panose="02040503050406030204" pitchFamily="18" charset="0"/>
+                                </a:rPr>
+                                <m:t> </m:t>
+                              </m:r>
+                              <m:sSup>
+                                <m:sSupPr>
+                                  <m:ctrlPr>
+                                    <a:rPr lang="en-US" altLang="zh-TW" i="1">
+                                      <a:latin typeface="Cambria Math" panose="02040503050406030204" pitchFamily="18" charset="0"/>
+                                    </a:rPr>
+                                  </m:ctrlPr>
+                                </m:sSupPr>
+                                <m:e>
+                                  <m:r>
+                                    <a:rPr lang="en-US" altLang="zh-TW" i="1">
+                                      <a:latin typeface="Cambria Math" panose="02040503050406030204" pitchFamily="18" charset="0"/>
+                                    </a:rPr>
+                                    <m:t>𝑧</m:t>
+                                  </m:r>
+                                </m:e>
+                                <m:sup>
+                                  <m:r>
+                                    <a:rPr lang="en-US" altLang="zh-TW" i="1">
+                                      <a:latin typeface="Cambria Math" panose="02040503050406030204" pitchFamily="18" charset="0"/>
+                                    </a:rPr>
+                                    <m:t>2</m:t>
+                                  </m:r>
+                                </m:sup>
+                              </m:sSup>
+                            </m:den>
+                          </m:f>
+                          <m:r>
+                            <a:rPr lang="en-US" altLang="zh-TW" i="1">
+                              <a:latin typeface="Cambria Math" panose="02040503050406030204" pitchFamily="18" charset="0"/>
+                            </a:rPr>
+                            <m:t>𝑈</m:t>
+                          </m:r>
+                          <m:d>
+                            <m:dPr>
+                              <m:ctrlPr>
+                                <a:rPr lang="en-US" altLang="zh-TW" i="1">
+                                  <a:latin typeface="Cambria Math" panose="02040503050406030204" pitchFamily="18" charset="0"/>
+                                </a:rPr>
+                              </m:ctrlPr>
+                            </m:dPr>
+                            <m:e>
+                              <m:r>
+                                <a:rPr lang="en-US" altLang="zh-TW" b="1" i="1">
+                                  <a:latin typeface="Cambria Math" panose="02040503050406030204" pitchFamily="18" charset="0"/>
+                                </a:rPr>
+                                <m:t>𝒓</m:t>
+                              </m:r>
+                            </m:e>
+                          </m:d>
+                        </m:e>
+                      </m:d>
+                      <m:r>
+                        <a:rPr lang="en-US" altLang="zh-TW" b="0" i="1" smtClean="0">
+                          <a:latin typeface="Cambria Math" panose="02040503050406030204" pitchFamily="18" charset="0"/>
+                        </a:rPr>
+                        <m:t>≪</m:t>
+                      </m:r>
+                      <m:d>
+                        <m:dPr>
+                          <m:begChr m:val="|"/>
+                          <m:endChr m:val="|"/>
+                          <m:ctrlPr>
+                            <a:rPr lang="en-US" altLang="zh-TW" b="0" i="1" smtClean="0">
+                              <a:latin typeface="Cambria Math" panose="02040503050406030204" pitchFamily="18" charset="0"/>
+                            </a:rPr>
+                          </m:ctrlPr>
+                        </m:dPr>
+                        <m:e>
+                          <m:sSubSup>
+                            <m:sSubSupPr>
+                              <m:ctrlPr>
+                                <a:rPr lang="en-US" altLang="zh-TW" i="1">
+                                  <a:latin typeface="Cambria Math" panose="02040503050406030204" pitchFamily="18" charset="0"/>
+                                </a:rPr>
+                              </m:ctrlPr>
+                            </m:sSubSupPr>
+                            <m:e>
+                              <m:r>
+                                <m:rPr>
+                                  <m:sty m:val="p"/>
+                                </m:rPr>
+                                <a:rPr lang="en-US" altLang="zh-TW">
+                                  <a:latin typeface="Cambria Math" panose="02040503050406030204" pitchFamily="18" charset="0"/>
+                                </a:rPr>
+                                <m:t>∇</m:t>
+                              </m:r>
+                            </m:e>
+                            <m:sub>
+                              <m:r>
+                                <a:rPr lang="en-US" altLang="zh-TW" i="1">
+                                  <a:latin typeface="Cambria Math" panose="02040503050406030204" pitchFamily="18" charset="0"/>
+                                </a:rPr>
+                                <m:t>∥</m:t>
+                              </m:r>
+                            </m:sub>
+                            <m:sup>
+                              <m:r>
+                                <a:rPr lang="en-US" altLang="zh-TW" i="1">
+                                  <a:latin typeface="Cambria Math" panose="02040503050406030204" pitchFamily="18" charset="0"/>
+                                </a:rPr>
+                                <m:t>2</m:t>
+                              </m:r>
+                            </m:sup>
+                          </m:sSubSup>
+                          <m:r>
+                            <a:rPr lang="en-US" altLang="zh-TW" i="1">
+                              <a:latin typeface="Cambria Math" panose="02040503050406030204" pitchFamily="18" charset="0"/>
+                            </a:rPr>
+                            <m:t>𝑈</m:t>
+                          </m:r>
+                          <m:d>
+                            <m:dPr>
+                              <m:ctrlPr>
+                                <a:rPr lang="en-US" altLang="zh-TW" i="1">
+                                  <a:latin typeface="Cambria Math" panose="02040503050406030204" pitchFamily="18" charset="0"/>
+                                </a:rPr>
+                              </m:ctrlPr>
+                            </m:dPr>
+                            <m:e>
+                              <m:r>
+                                <a:rPr lang="en-US" altLang="zh-TW" b="1" i="1">
+                                  <a:latin typeface="Cambria Math" panose="02040503050406030204" pitchFamily="18" charset="0"/>
+                                </a:rPr>
+                                <m:t>𝒓</m:t>
+                              </m:r>
+                            </m:e>
+                          </m:d>
+                        </m:e>
+                      </m:d>
+                    </m:oMath>
+                  </m:oMathPara>
+                </a14:m>
+                <a:endParaRPr lang="zh-TW" altLang="en-US" dirty="0">
+                  <a:latin typeface="Times New Roman" panose="02020603050405020304" pitchFamily="18" charset="0"/>
+                  <a:cs typeface="Times New Roman" panose="02020603050405020304" pitchFamily="18" charset="0"/>
+                </a:endParaRPr>
+              </a:p>
+            </p:txBody>
+          </p:sp>
+        </mc:Choice>
+        <mc:Fallback>
+          <p:sp>
+            <p:nvSpPr>
+              <p:cNvPr id="10" name="矩形 9">
+                <a:extLst>
+                  <a:ext uri="{FF2B5EF4-FFF2-40B4-BE49-F238E27FC236}">
+                    <a16:creationId xmlns:a16="http://schemas.microsoft.com/office/drawing/2014/main" id="{CB486E36-28C5-4F23-AFE2-1F534A15C9DD}"/>
+                  </a:ext>
+                </a:extLst>
+              </p:cNvPr>
+              <p:cNvSpPr>
+                <a:spLocks noRot="1" noChangeAspect="1" noMove="1" noResize="1" noEditPoints="1" noAdjustHandles="1" noChangeArrowheads="1" noChangeShapeType="1" noTextEdit="1"/>
+              </p:cNvSpPr>
+              <p:nvPr/>
+            </p:nvSpPr>
+            <p:spPr>
+              <a:xfrm>
+                <a:off x="1078463" y="4104569"/>
+                <a:ext cx="2946399" cy="717248"/>
+              </a:xfrm>
+              <a:prstGeom prst="rect">
+                <a:avLst/>
+              </a:prstGeom>
+              <a:blipFill>
+                <a:blip r:embed="rId5"/>
+                <a:stretch>
+                  <a:fillRect/>
+                </a:stretch>
+              </a:blipFill>
+            </p:spPr>
+            <p:txBody>
+              <a:bodyPr/>
+              <a:lstStyle/>
+              <a:p>
+                <a:r>
+                  <a:rPr lang="zh-TW" altLang="en-US">
+                    <a:noFill/>
+                  </a:rPr>
+                  <a:t> </a:t>
+                </a:r>
+              </a:p>
+            </p:txBody>
+          </p:sp>
+        </mc:Fallback>
+      </mc:AlternateContent>
+      <p:sp>
+        <p:nvSpPr>
+          <p:cNvPr id="7" name="矩形 6">
+            <a:extLst>
+              <a:ext uri="{FF2B5EF4-FFF2-40B4-BE49-F238E27FC236}">
+                <a16:creationId xmlns:a16="http://schemas.microsoft.com/office/drawing/2014/main" id="{11A73260-E74B-461A-9D7F-F42C525E9176}"/>
+              </a:ext>
+            </a:extLst>
+          </p:cNvPr>
+          <p:cNvSpPr/>
+          <p:nvPr/>
+        </p:nvSpPr>
+        <p:spPr>
+          <a:xfrm>
+            <a:off x="587397" y="5559143"/>
+            <a:ext cx="2871299" cy="369332"/>
+          </a:xfrm>
+          <a:prstGeom prst="rect">
+            <a:avLst/>
+          </a:prstGeom>
+        </p:spPr>
+        <p:txBody>
+          <a:bodyPr wrap="none">
+            <a:spAutoFit/>
+          </a:bodyPr>
+          <a:lstStyle/>
+          <a:p>
+            <a:r>
+              <a:rPr lang="en-US" altLang="zh-TW" dirty="0">
+                <a:latin typeface="Times New Roman" panose="02020603050405020304" pitchFamily="18" charset="0"/>
+                <a:cs typeface="Times New Roman" panose="02020603050405020304" pitchFamily="18" charset="0"/>
+              </a:rPr>
+              <a:t>paraxial Helmholtz</a:t>
+            </a:r>
+            <a:r>
+              <a:rPr lang="zh-TW" altLang="en-US" dirty="0">
+                <a:latin typeface="Times New Roman" panose="02020603050405020304" pitchFamily="18" charset="0"/>
+                <a:cs typeface="Times New Roman" panose="02020603050405020304" pitchFamily="18" charset="0"/>
+              </a:rPr>
+              <a:t> </a:t>
+            </a:r>
+            <a:r>
+              <a:rPr lang="en-US" altLang="zh-TW" dirty="0">
+                <a:latin typeface="Times New Roman" panose="02020603050405020304" pitchFamily="18" charset="0"/>
+                <a:cs typeface="Times New Roman" panose="02020603050405020304" pitchFamily="18" charset="0"/>
+              </a:rPr>
+              <a:t>equation </a:t>
+            </a:r>
+            <a:endParaRPr lang="zh-TW" altLang="en-US" dirty="0"/>
+          </a:p>
+        </p:txBody>
+      </p:sp>
+      <p:sp>
+        <p:nvSpPr>
+          <p:cNvPr id="12" name="矩形 11">
+            <a:extLst>
+              <a:ext uri="{FF2B5EF4-FFF2-40B4-BE49-F238E27FC236}">
+                <a16:creationId xmlns:a16="http://schemas.microsoft.com/office/drawing/2014/main" id="{76369130-8182-495D-A6DC-A29FAC282A54}"/>
+              </a:ext>
+            </a:extLst>
+          </p:cNvPr>
+          <p:cNvSpPr/>
+          <p:nvPr/>
+        </p:nvSpPr>
+        <p:spPr>
+          <a:xfrm>
+            <a:off x="587397" y="1629562"/>
+            <a:ext cx="2666114" cy="369332"/>
+          </a:xfrm>
+          <a:prstGeom prst="rect">
+            <a:avLst/>
+          </a:prstGeom>
+        </p:spPr>
+        <p:txBody>
+          <a:bodyPr wrap="none">
+            <a:spAutoFit/>
+          </a:bodyPr>
+          <a:lstStyle/>
+          <a:p>
+            <a:r>
+              <a:rPr lang="en-US" altLang="zh-TW" dirty="0">
+                <a:latin typeface="Times New Roman" panose="02020603050405020304" pitchFamily="18" charset="0"/>
+                <a:cs typeface="Times New Roman" panose="02020603050405020304" pitchFamily="18" charset="0"/>
+              </a:rPr>
+              <a:t>scalar Helmholtz</a:t>
+            </a:r>
+            <a:r>
+              <a:rPr lang="zh-TW" altLang="en-US" dirty="0">
+                <a:latin typeface="Times New Roman" panose="02020603050405020304" pitchFamily="18" charset="0"/>
+                <a:cs typeface="Times New Roman" panose="02020603050405020304" pitchFamily="18" charset="0"/>
+              </a:rPr>
+              <a:t> </a:t>
+            </a:r>
+            <a:r>
+              <a:rPr lang="en-US" altLang="zh-TW" dirty="0">
+                <a:latin typeface="Times New Roman" panose="02020603050405020304" pitchFamily="18" charset="0"/>
+                <a:cs typeface="Times New Roman" panose="02020603050405020304" pitchFamily="18" charset="0"/>
+              </a:rPr>
+              <a:t>equation </a:t>
+            </a:r>
+            <a:endParaRPr lang="zh-TW" altLang="en-US" dirty="0"/>
+          </a:p>
+        </p:txBody>
+      </p:sp>
+      <p:cxnSp>
+        <p:nvCxnSpPr>
+          <p:cNvPr id="14" name="直線單箭頭接點 13">
+            <a:extLst>
+              <a:ext uri="{FF2B5EF4-FFF2-40B4-BE49-F238E27FC236}">
+                <a16:creationId xmlns:a16="http://schemas.microsoft.com/office/drawing/2014/main" id="{5659DFB7-24F7-49E7-9525-3402968A239B}"/>
+              </a:ext>
+            </a:extLst>
+          </p:cNvPr>
+          <p:cNvCxnSpPr>
+            <a:cxnSpLocks/>
+          </p:cNvCxnSpPr>
+          <p:nvPr/>
+        </p:nvCxnSpPr>
+        <p:spPr>
+          <a:xfrm>
+            <a:off x="514381" y="1657158"/>
+            <a:ext cx="0" cy="4961466"/>
+          </a:xfrm>
+          <a:prstGeom prst="straightConnector1">
+            <a:avLst/>
+          </a:prstGeom>
+          <a:ln>
+            <a:tailEnd type="triangle" w="lg" len="lg"/>
+          </a:ln>
+        </p:spPr>
+        <p:style>
+          <a:lnRef idx="3">
+            <a:schemeClr val="dk1"/>
+          </a:lnRef>
+          <a:fillRef idx="0">
+            <a:schemeClr val="dk1"/>
+          </a:fillRef>
+          <a:effectRef idx="2">
+            <a:schemeClr val="dk1"/>
+          </a:effectRef>
+          <a:fontRef idx="minor">
+            <a:schemeClr val="tx1"/>
+          </a:fontRef>
+        </p:style>
+      </p:cxnSp>
+      <mc:AlternateContent xmlns:mc="http://schemas.openxmlformats.org/markup-compatibility/2006">
+        <mc:Choice xmlns:a14="http://schemas.microsoft.com/office/drawing/2010/main" Requires="a14">
+          <p:sp>
+            <p:nvSpPr>
+              <p:cNvPr id="16" name="矩形 15">
+                <a:extLst>
+                  <a:ext uri="{FF2B5EF4-FFF2-40B4-BE49-F238E27FC236}">
+                    <a16:creationId xmlns:a16="http://schemas.microsoft.com/office/drawing/2014/main" id="{832905F5-D97F-423C-B774-9D41176262C3}"/>
+                  </a:ext>
+                </a:extLst>
+              </p:cNvPr>
+              <p:cNvSpPr/>
+              <p:nvPr/>
+            </p:nvSpPr>
+            <p:spPr>
+              <a:xfrm>
+                <a:off x="1078463" y="2883980"/>
+                <a:ext cx="3510643" cy="720325"/>
+              </a:xfrm>
+              <a:prstGeom prst="rect">
+                <a:avLst/>
+              </a:prstGeom>
+            </p:spPr>
+            <p:txBody>
+              <a:bodyPr wrap="square">
+                <a:spAutoFit/>
+              </a:bodyPr>
+              <a:lstStyle/>
+              <a:p>
+                <a:pPr/>
+                <a14:m>
+                  <m:oMathPara xmlns:m="http://schemas.openxmlformats.org/officeDocument/2006/math">
+                    <m:oMathParaPr>
+                      <m:jc m:val="left"/>
+                    </m:oMathParaPr>
+                    <m:oMath xmlns:m="http://schemas.openxmlformats.org/officeDocument/2006/math">
+                      <m:d>
+                        <m:dPr>
+                          <m:ctrlPr>
+                            <a:rPr lang="en-US" altLang="zh-TW" b="0" i="1" smtClean="0">
+                              <a:latin typeface="Cambria Math" panose="02040503050406030204" pitchFamily="18" charset="0"/>
+                            </a:rPr>
+                          </m:ctrlPr>
+                        </m:dPr>
+                        <m:e>
+                          <m:sSubSup>
+                            <m:sSubSupPr>
+                              <m:ctrlPr>
+                                <a:rPr lang="en-US" altLang="zh-TW" i="1">
+                                  <a:latin typeface="Cambria Math" panose="02040503050406030204" pitchFamily="18" charset="0"/>
+                                </a:rPr>
+                              </m:ctrlPr>
+                            </m:sSubSupPr>
+                            <m:e>
+                              <m:r>
+                                <m:rPr>
+                                  <m:sty m:val="p"/>
+                                </m:rPr>
+                                <a:rPr lang="en-US" altLang="zh-TW">
+                                  <a:latin typeface="Cambria Math" panose="02040503050406030204" pitchFamily="18" charset="0"/>
+                                </a:rPr>
+                                <m:t>∇</m:t>
+                              </m:r>
+                            </m:e>
+                            <m:sub>
+                              <m:r>
+                                <a:rPr lang="en-US" altLang="zh-TW" i="1">
+                                  <a:latin typeface="Cambria Math" panose="02040503050406030204" pitchFamily="18" charset="0"/>
+                                </a:rPr>
+                                <m:t>∥</m:t>
+                              </m:r>
+                            </m:sub>
+                            <m:sup>
+                              <m:r>
+                                <a:rPr lang="en-US" altLang="zh-TW" i="1">
+                                  <a:latin typeface="Cambria Math" panose="02040503050406030204" pitchFamily="18" charset="0"/>
+                                </a:rPr>
+                                <m:t>2</m:t>
+                              </m:r>
+                            </m:sup>
+                          </m:sSubSup>
+                          <m:r>
+                            <a:rPr lang="en-US" altLang="zh-TW" i="1">
+                              <a:latin typeface="Cambria Math" panose="02040503050406030204" pitchFamily="18" charset="0"/>
+                            </a:rPr>
+                            <m:t>+ </m:t>
+                          </m:r>
+                          <m:f>
+                            <m:fPr>
+                              <m:ctrlPr>
+                                <a:rPr lang="en-US" altLang="zh-TW" i="1">
+                                  <a:latin typeface="Cambria Math" panose="02040503050406030204" pitchFamily="18" charset="0"/>
+                                </a:rPr>
+                              </m:ctrlPr>
+                            </m:fPr>
+                            <m:num>
+                              <m:sSup>
+                                <m:sSupPr>
+                                  <m:ctrlPr>
+                                    <a:rPr lang="en-US" altLang="zh-TW" i="1">
+                                      <a:latin typeface="Cambria Math" panose="02040503050406030204" pitchFamily="18" charset="0"/>
+                                    </a:rPr>
+                                  </m:ctrlPr>
+                                </m:sSupPr>
+                                <m:e>
+                                  <m:r>
+                                    <a:rPr lang="en-US" altLang="zh-TW" i="1">
+                                      <a:latin typeface="Cambria Math" panose="02040503050406030204" pitchFamily="18" charset="0"/>
+                                    </a:rPr>
+                                    <m:t>𝜕</m:t>
+                                  </m:r>
+                                </m:e>
+                                <m:sup>
+                                  <m:r>
+                                    <a:rPr lang="en-US" altLang="zh-TW" i="1">
+                                      <a:latin typeface="Cambria Math" panose="02040503050406030204" pitchFamily="18" charset="0"/>
+                                    </a:rPr>
+                                    <m:t>2</m:t>
+                                  </m:r>
+                                </m:sup>
+                              </m:sSup>
+                            </m:num>
+                            <m:den>
+                              <m:r>
+                                <a:rPr lang="en-US" altLang="zh-TW" i="1">
+                                  <a:latin typeface="Cambria Math" panose="02040503050406030204" pitchFamily="18" charset="0"/>
+                                </a:rPr>
+                                <m:t>𝜕</m:t>
+                              </m:r>
+                              <m:r>
+                                <a:rPr lang="en-US" altLang="zh-TW" i="1">
+                                  <a:latin typeface="Cambria Math" panose="02040503050406030204" pitchFamily="18" charset="0"/>
+                                </a:rPr>
+                                <m:t> </m:t>
+                              </m:r>
+                              <m:sSup>
+                                <m:sSupPr>
+                                  <m:ctrlPr>
+                                    <a:rPr lang="en-US" altLang="zh-TW" i="1">
+                                      <a:latin typeface="Cambria Math" panose="02040503050406030204" pitchFamily="18" charset="0"/>
+                                    </a:rPr>
+                                  </m:ctrlPr>
+                                </m:sSupPr>
+                                <m:e>
+                                  <m:r>
+                                    <a:rPr lang="en-US" altLang="zh-TW" i="1">
+                                      <a:latin typeface="Cambria Math" panose="02040503050406030204" pitchFamily="18" charset="0"/>
+                                    </a:rPr>
+                                    <m:t>𝑧</m:t>
+                                  </m:r>
+                                </m:e>
+                                <m:sup>
+                                  <m:r>
+                                    <a:rPr lang="en-US" altLang="zh-TW" i="1">
+                                      <a:latin typeface="Cambria Math" panose="02040503050406030204" pitchFamily="18" charset="0"/>
+                                    </a:rPr>
+                                    <m:t>2</m:t>
+                                  </m:r>
+                                </m:sup>
+                              </m:sSup>
+                            </m:den>
+                          </m:f>
+                          <m:r>
+                            <a:rPr lang="en-US" altLang="zh-TW" i="1">
+                              <a:latin typeface="Cambria Math" panose="02040503050406030204" pitchFamily="18" charset="0"/>
+                            </a:rPr>
+                            <m:t>+</m:t>
+                          </m:r>
+                          <m:sSubSup>
+                            <m:sSubSupPr>
+                              <m:ctrlPr>
+                                <a:rPr lang="en-US" altLang="zh-TW" i="1">
+                                  <a:latin typeface="Cambria Math" panose="02040503050406030204" pitchFamily="18" charset="0"/>
+                                </a:rPr>
+                              </m:ctrlPr>
+                            </m:sSubSupPr>
+                            <m:e>
+                              <m:r>
+                                <a:rPr lang="en-US" altLang="zh-TW" i="1">
+                                  <a:latin typeface="Cambria Math" panose="02040503050406030204" pitchFamily="18" charset="0"/>
+                                </a:rPr>
+                                <m:t>𝑞</m:t>
+                              </m:r>
+                            </m:e>
+                            <m:sub>
+                              <m:r>
+                                <a:rPr lang="en-US" altLang="zh-TW" i="1">
+                                  <a:latin typeface="Cambria Math" panose="02040503050406030204" pitchFamily="18" charset="0"/>
+                                </a:rPr>
+                                <m:t>0</m:t>
+                              </m:r>
+                            </m:sub>
+                            <m:sup>
+                              <m:r>
+                                <a:rPr lang="en-US" altLang="zh-TW" b="0" i="1" smtClean="0">
+                                  <a:latin typeface="Cambria Math" panose="02040503050406030204" pitchFamily="18" charset="0"/>
+                                </a:rPr>
+                                <m:t> </m:t>
+                              </m:r>
+                            </m:sup>
+                          </m:sSubSup>
+                          <m:f>
+                            <m:fPr>
+                              <m:ctrlPr>
+                                <a:rPr lang="en-US" altLang="zh-TW" i="1">
+                                  <a:latin typeface="Cambria Math" panose="02040503050406030204" pitchFamily="18" charset="0"/>
+                                </a:rPr>
+                              </m:ctrlPr>
+                            </m:fPr>
+                            <m:num>
+                              <m:r>
+                                <a:rPr lang="en-US" altLang="zh-TW" i="1">
+                                  <a:latin typeface="Cambria Math" panose="02040503050406030204" pitchFamily="18" charset="0"/>
+                                </a:rPr>
+                                <m:t>𝜕</m:t>
+                              </m:r>
+                            </m:num>
+                            <m:den>
+                              <m:r>
+                                <a:rPr lang="en-US" altLang="zh-TW" i="1">
+                                  <a:latin typeface="Cambria Math" panose="02040503050406030204" pitchFamily="18" charset="0"/>
+                                </a:rPr>
+                                <m:t>𝜕</m:t>
+                              </m:r>
+                              <m:r>
+                                <a:rPr lang="en-US" altLang="zh-TW" i="1">
+                                  <a:latin typeface="Cambria Math" panose="02040503050406030204" pitchFamily="18" charset="0"/>
+                                </a:rPr>
+                                <m:t> </m:t>
+                              </m:r>
+                              <m:r>
+                                <a:rPr lang="en-US" altLang="zh-TW" i="1">
+                                  <a:latin typeface="Cambria Math" panose="02040503050406030204" pitchFamily="18" charset="0"/>
+                                </a:rPr>
+                                <m:t>𝑧</m:t>
+                              </m:r>
+                            </m:den>
+                          </m:f>
+                        </m:e>
+                      </m:d>
+                      <m:r>
+                        <a:rPr lang="en-US" altLang="zh-TW" i="1">
+                          <a:latin typeface="Cambria Math" panose="02040503050406030204" pitchFamily="18" charset="0"/>
+                        </a:rPr>
+                        <m:t>𝑈</m:t>
+                      </m:r>
+                      <m:d>
+                        <m:dPr>
+                          <m:ctrlPr>
+                            <a:rPr lang="en-US" altLang="zh-TW" i="1">
+                              <a:latin typeface="Cambria Math" panose="02040503050406030204" pitchFamily="18" charset="0"/>
+                            </a:rPr>
+                          </m:ctrlPr>
+                        </m:dPr>
+                        <m:e>
+                          <m:r>
+                            <a:rPr lang="en-US" altLang="zh-TW" b="1" i="1">
+                              <a:latin typeface="Cambria Math" panose="02040503050406030204" pitchFamily="18" charset="0"/>
+                            </a:rPr>
+                            <m:t>𝒓</m:t>
+                          </m:r>
+                        </m:e>
+                      </m:d>
+                      <m:r>
+                        <a:rPr lang="en-US" altLang="zh-TW" i="1" smtClean="0">
+                          <a:latin typeface="Cambria Math" panose="02040503050406030204" pitchFamily="18" charset="0"/>
+                        </a:rPr>
+                        <m:t>= 0</m:t>
+                      </m:r>
+                    </m:oMath>
+                  </m:oMathPara>
+                </a14:m>
+                <a:endParaRPr lang="zh-TW" altLang="en-US" dirty="0">
+                  <a:latin typeface="Times New Roman" panose="02020603050405020304" pitchFamily="18" charset="0"/>
+                  <a:cs typeface="Times New Roman" panose="02020603050405020304" pitchFamily="18" charset="0"/>
+                </a:endParaRPr>
+              </a:p>
+            </p:txBody>
+          </p:sp>
+        </mc:Choice>
+        <mc:Fallback>
+          <p:sp>
+            <p:nvSpPr>
+              <p:cNvPr id="16" name="矩形 15">
+                <a:extLst>
+                  <a:ext uri="{FF2B5EF4-FFF2-40B4-BE49-F238E27FC236}">
+                    <a16:creationId xmlns:a16="http://schemas.microsoft.com/office/drawing/2014/main" id="{832905F5-D97F-423C-B774-9D41176262C3}"/>
+                  </a:ext>
+                </a:extLst>
+              </p:cNvPr>
+              <p:cNvSpPr>
+                <a:spLocks noRot="1" noChangeAspect="1" noMove="1" noResize="1" noEditPoints="1" noAdjustHandles="1" noChangeArrowheads="1" noChangeShapeType="1" noTextEdit="1"/>
+              </p:cNvSpPr>
+              <p:nvPr/>
+            </p:nvSpPr>
+            <p:spPr>
+              <a:xfrm>
+                <a:off x="1078463" y="2883980"/>
+                <a:ext cx="3510643" cy="720325"/>
+              </a:xfrm>
+              <a:prstGeom prst="rect">
+                <a:avLst/>
+              </a:prstGeom>
+              <a:blipFill>
+                <a:blip r:embed="rId6"/>
+                <a:stretch>
+                  <a:fillRect/>
+                </a:stretch>
+              </a:blipFill>
+            </p:spPr>
+            <p:txBody>
+              <a:bodyPr/>
+              <a:lstStyle/>
+              <a:p>
+                <a:r>
+                  <a:rPr lang="zh-TW" altLang="en-US">
+                    <a:noFill/>
+                  </a:rPr>
+                  <a:t> </a:t>
+                </a:r>
+              </a:p>
+            </p:txBody>
+          </p:sp>
+        </mc:Fallback>
+      </mc:AlternateContent>
+      <mc:AlternateContent xmlns:mc="http://schemas.openxmlformats.org/markup-compatibility/2006">
+        <mc:Choice xmlns:a14="http://schemas.microsoft.com/office/drawing/2010/main" Requires="a14">
+          <p:sp>
+            <p:nvSpPr>
+              <p:cNvPr id="17" name="內容版面配置區 2">
+                <a:extLst>
+                  <a:ext uri="{FF2B5EF4-FFF2-40B4-BE49-F238E27FC236}">
+                    <a16:creationId xmlns:a16="http://schemas.microsoft.com/office/drawing/2014/main" id="{0B13C1D9-CDE7-41BE-AD8C-6F4D0E41AEA4}"/>
+                  </a:ext>
+                </a:extLst>
+              </p:cNvPr>
+              <p:cNvSpPr txBox="1">
+                <a:spLocks/>
+              </p:cNvSpPr>
+              <p:nvPr/>
+            </p:nvSpPr>
+            <p:spPr>
+              <a:xfrm>
+                <a:off x="587397" y="2393755"/>
+                <a:ext cx="4449650" cy="480186"/>
+              </a:xfrm>
+              <a:prstGeom prst="rect">
+                <a:avLst/>
+              </a:prstGeom>
+            </p:spPr>
+            <p:txBody>
+              <a:bodyPr vert="horz" lIns="91440" tIns="45720" rIns="91440" bIns="45720" rtlCol="0">
+                <a:noAutofit/>
+              </a:bodyPr>
+              <a:lstStyle>
+                <a:lvl1pPr marL="228600" indent="-228600" algn="l" defTabSz="914400" rtl="0" eaLnBrk="1" latinLnBrk="0" hangingPunct="1">
+                  <a:lnSpc>
+                    <a:spcPct val="90000"/>
+                  </a:lnSpc>
+                  <a:spcBef>
+                    <a:spcPts val="1000"/>
+                  </a:spcBef>
+                  <a:buFont typeface="Arial" panose="020B0604020202020204" pitchFamily="34" charset="0"/>
+                  <a:buChar char="•"/>
+                  <a:defRPr sz="2800" kern="1200">
+                    <a:solidFill>
+                      <a:schemeClr val="tx1"/>
+                    </a:solidFill>
+                    <a:latin typeface="+mn-lt"/>
+                    <a:ea typeface="+mn-ea"/>
+                    <a:cs typeface="+mn-cs"/>
+                  </a:defRPr>
+                </a:lvl1pPr>
+                <a:lvl2pPr marL="685800" indent="-228600" algn="l" defTabSz="914400" rtl="0" eaLnBrk="1" latinLnBrk="0" hangingPunct="1">
+                  <a:lnSpc>
+                    <a:spcPct val="90000"/>
+                  </a:lnSpc>
+                  <a:spcBef>
+                    <a:spcPts val="500"/>
+                  </a:spcBef>
+                  <a:buFont typeface="Arial" panose="020B0604020202020204" pitchFamily="34" charset="0"/>
+                  <a:buChar char="•"/>
+                  <a:defRPr sz="2400" kern="1200">
+                    <a:solidFill>
+                      <a:schemeClr val="tx1"/>
+                    </a:solidFill>
+                    <a:latin typeface="+mn-lt"/>
+                    <a:ea typeface="+mn-ea"/>
+                    <a:cs typeface="+mn-cs"/>
+                  </a:defRPr>
+                </a:lvl2pPr>
+                <a:lvl3pPr marL="1143000" indent="-228600" algn="l" defTabSz="914400" rtl="0" eaLnBrk="1" latinLnBrk="0" hangingPunct="1">
+                  <a:lnSpc>
+                    <a:spcPct val="90000"/>
+                  </a:lnSpc>
+                  <a:spcBef>
+                    <a:spcPts val="500"/>
+                  </a:spcBef>
+                  <a:buFont typeface="Arial" panose="020B0604020202020204" pitchFamily="34" charset="0"/>
+                  <a:buChar char="•"/>
+                  <a:defRPr sz="2000" kern="1200">
+                    <a:solidFill>
+                      <a:schemeClr val="tx1"/>
+                    </a:solidFill>
+                    <a:latin typeface="+mn-lt"/>
+                    <a:ea typeface="+mn-ea"/>
+                    <a:cs typeface="+mn-cs"/>
+                  </a:defRPr>
+                </a:lvl3pPr>
+                <a:lvl4pPr marL="1600200" indent="-228600" algn="l" defTabSz="914400" rtl="0" eaLnBrk="1" latinLnBrk="0" hangingPunct="1">
+                  <a:lnSpc>
+                    <a:spcPct val="90000"/>
+                  </a:lnSpc>
+                  <a:spcBef>
+                    <a:spcPts val="500"/>
+                  </a:spcBef>
+                  <a:buFont typeface="Arial" panose="020B0604020202020204" pitchFamily="34" charset="0"/>
+                  <a:buChar char="•"/>
+                  <a:defRPr sz="1800" kern="1200">
+                    <a:solidFill>
+                      <a:schemeClr val="tx1"/>
+                    </a:solidFill>
+                    <a:latin typeface="+mn-lt"/>
+                    <a:ea typeface="+mn-ea"/>
+                    <a:cs typeface="+mn-cs"/>
+                  </a:defRPr>
+                </a:lvl4pPr>
+                <a:lvl5pPr marL="2057400" indent="-228600" algn="l" defTabSz="914400" rtl="0" eaLnBrk="1" latinLnBrk="0" hangingPunct="1">
+                  <a:lnSpc>
+                    <a:spcPct val="90000"/>
+                  </a:lnSpc>
+                  <a:spcBef>
+                    <a:spcPts val="500"/>
+                  </a:spcBef>
+                  <a:buFont typeface="Arial" panose="020B0604020202020204" pitchFamily="34" charset="0"/>
+                  <a:buChar char="•"/>
+                  <a:defRPr sz="1800" kern="1200">
+                    <a:solidFill>
+                      <a:schemeClr val="tx1"/>
+                    </a:solidFill>
+                    <a:latin typeface="+mn-lt"/>
+                    <a:ea typeface="+mn-ea"/>
+                    <a:cs typeface="+mn-cs"/>
+                  </a:defRPr>
+                </a:lvl5pPr>
+                <a:lvl6pPr marL="2514600" indent="-228600" algn="l" defTabSz="914400" rtl="0" eaLnBrk="1" latinLnBrk="0" hangingPunct="1">
+                  <a:lnSpc>
+                    <a:spcPct val="90000"/>
+                  </a:lnSpc>
+                  <a:spcBef>
+                    <a:spcPts val="500"/>
+                  </a:spcBef>
+                  <a:buFont typeface="Arial" panose="020B0604020202020204" pitchFamily="34" charset="0"/>
+                  <a:buChar char="•"/>
+                  <a:defRPr sz="1800" kern="1200">
+                    <a:solidFill>
+                      <a:schemeClr val="tx1"/>
+                    </a:solidFill>
+                    <a:latin typeface="+mn-lt"/>
+                    <a:ea typeface="+mn-ea"/>
+                    <a:cs typeface="+mn-cs"/>
+                  </a:defRPr>
+                </a:lvl6pPr>
+                <a:lvl7pPr marL="2971800" indent="-228600" algn="l" defTabSz="914400" rtl="0" eaLnBrk="1" latinLnBrk="0" hangingPunct="1">
+                  <a:lnSpc>
+                    <a:spcPct val="90000"/>
+                  </a:lnSpc>
+                  <a:spcBef>
+                    <a:spcPts val="500"/>
+                  </a:spcBef>
+                  <a:buFont typeface="Arial" panose="020B0604020202020204" pitchFamily="34" charset="0"/>
+                  <a:buChar char="•"/>
+                  <a:defRPr sz="1800" kern="1200">
+                    <a:solidFill>
+                      <a:schemeClr val="tx1"/>
+                    </a:solidFill>
+                    <a:latin typeface="+mn-lt"/>
+                    <a:ea typeface="+mn-ea"/>
+                    <a:cs typeface="+mn-cs"/>
+                  </a:defRPr>
+                </a:lvl7pPr>
+                <a:lvl8pPr marL="3429000" indent="-228600" algn="l" defTabSz="914400" rtl="0" eaLnBrk="1" latinLnBrk="0" hangingPunct="1">
+                  <a:lnSpc>
+                    <a:spcPct val="90000"/>
+                  </a:lnSpc>
+                  <a:spcBef>
+                    <a:spcPts val="500"/>
+                  </a:spcBef>
+                  <a:buFont typeface="Arial" panose="020B0604020202020204" pitchFamily="34" charset="0"/>
+                  <a:buChar char="•"/>
+                  <a:defRPr sz="1800" kern="1200">
+                    <a:solidFill>
+                      <a:schemeClr val="tx1"/>
+                    </a:solidFill>
+                    <a:latin typeface="+mn-lt"/>
+                    <a:ea typeface="+mn-ea"/>
+                    <a:cs typeface="+mn-cs"/>
+                  </a:defRPr>
+                </a:lvl8pPr>
+                <a:lvl9pPr marL="3886200" indent="-228600" algn="l" defTabSz="914400" rtl="0" eaLnBrk="1" latinLnBrk="0" hangingPunct="1">
+                  <a:lnSpc>
+                    <a:spcPct val="90000"/>
+                  </a:lnSpc>
+                  <a:spcBef>
+                    <a:spcPts val="500"/>
+                  </a:spcBef>
+                  <a:buFont typeface="Arial" panose="020B0604020202020204" pitchFamily="34" charset="0"/>
+                  <a:buChar char="•"/>
+                  <a:defRPr sz="1800" kern="1200">
+                    <a:solidFill>
+                      <a:schemeClr val="tx1"/>
+                    </a:solidFill>
+                    <a:latin typeface="+mn-lt"/>
+                    <a:ea typeface="+mn-ea"/>
+                    <a:cs typeface="+mn-cs"/>
+                  </a:defRPr>
+                </a:lvl9pPr>
+              </a:lstStyle>
+              <a:p>
+                <a:pPr marL="0" indent="0">
+                  <a:lnSpc>
+                    <a:spcPct val="150000"/>
+                  </a:lnSpc>
+                  <a:buClr>
+                    <a:schemeClr val="accent1">
+                      <a:lumMod val="75000"/>
+                    </a:schemeClr>
+                  </a:buClr>
+                  <a:buNone/>
+                </a:pPr>
+                <a:r>
+                  <a:rPr lang="en-US" altLang="zh-TW" sz="1800" dirty="0">
+                    <a:solidFill>
+                      <a:schemeClr val="tx1"/>
+                    </a:solidFill>
+                    <a:latin typeface="Times New Roman" panose="02020603050405020304" pitchFamily="18" charset="0"/>
+                    <a:cs typeface="Times New Roman" panose="02020603050405020304" pitchFamily="18" charset="0"/>
+                  </a:rPr>
+                  <a:t>paraxial wave</a:t>
+                </a:r>
+                <a:r>
+                  <a:rPr lang="zh-TW" altLang="en-US" sz="1800" dirty="0">
+                    <a:solidFill>
+                      <a:schemeClr val="tx1"/>
+                    </a:solidFill>
+                    <a:latin typeface="Times New Roman" panose="02020603050405020304" pitchFamily="18" charset="0"/>
+                    <a:cs typeface="Times New Roman" panose="02020603050405020304" pitchFamily="18" charset="0"/>
+                  </a:rPr>
+                  <a:t> </a:t>
+                </a:r>
+                <a:r>
+                  <a:rPr lang="en-US" altLang="zh-TW" sz="1800" dirty="0" err="1">
+                    <a:solidFill>
+                      <a:schemeClr val="tx1"/>
+                    </a:solidFill>
+                    <a:latin typeface="Times New Roman" panose="02020603050405020304" pitchFamily="18" charset="0"/>
+                    <a:cs typeface="Times New Roman" panose="02020603050405020304" pitchFamily="18" charset="0"/>
+                  </a:rPr>
+                  <a:t>ansztz</a:t>
+                </a:r>
+                <a:r>
+                  <a:rPr lang="en-US" altLang="zh-TW" sz="1800" dirty="0">
+                    <a:solidFill>
+                      <a:schemeClr val="tx1"/>
+                    </a:solidFill>
+                    <a:latin typeface="Times New Roman" panose="02020603050405020304" pitchFamily="18" charset="0"/>
+                    <a:cs typeface="Times New Roman" panose="02020603050405020304" pitchFamily="18" charset="0"/>
+                  </a:rPr>
+                  <a:t> </a:t>
+                </a:r>
+                <a14:m>
+                  <m:oMath xmlns:m="http://schemas.openxmlformats.org/officeDocument/2006/math">
+                    <m:d>
+                      <m:dPr>
+                        <m:ctrlPr>
+                          <a:rPr lang="en-US" altLang="zh-TW" sz="1800" b="0" i="1" smtClean="0">
+                            <a:solidFill>
+                              <a:schemeClr val="tx1"/>
+                            </a:solidFill>
+                            <a:latin typeface="Cambria Math" panose="02040503050406030204" pitchFamily="18" charset="0"/>
+                            <a:cs typeface="Times New Roman" panose="02020603050405020304" pitchFamily="18" charset="0"/>
+                          </a:rPr>
+                        </m:ctrlPr>
+                      </m:dPr>
+                      <m:e>
+                        <m:sSup>
+                          <m:sSupPr>
+                            <m:ctrlPr>
+                              <a:rPr lang="en-US" altLang="zh-TW" sz="1800" i="1">
+                                <a:latin typeface="Cambria Math" panose="02040503050406030204" pitchFamily="18" charset="0"/>
+                              </a:rPr>
+                            </m:ctrlPr>
+                          </m:sSupPr>
+                          <m:e>
+                            <m:r>
+                              <a:rPr lang="en-US" altLang="zh-TW" sz="1800" i="1">
+                                <a:latin typeface="Cambria Math" panose="02040503050406030204" pitchFamily="18" charset="0"/>
+                              </a:rPr>
+                              <m:t>𝐴</m:t>
+                            </m:r>
+                          </m:e>
+                          <m:sup>
+                            <m:r>
+                              <a:rPr lang="en-US" altLang="zh-TW" sz="1800" i="1">
+                                <a:latin typeface="Cambria Math" panose="02040503050406030204" pitchFamily="18" charset="0"/>
+                              </a:rPr>
+                              <m:t>𝐿</m:t>
+                            </m:r>
+                          </m:sup>
+                        </m:sSup>
+                        <m:d>
+                          <m:dPr>
+                            <m:ctrlPr>
+                              <a:rPr lang="en-US" altLang="zh-TW" sz="1800" i="1">
+                                <a:latin typeface="Cambria Math" panose="02040503050406030204" pitchFamily="18" charset="0"/>
+                              </a:rPr>
+                            </m:ctrlPr>
+                          </m:dPr>
+                          <m:e>
+                            <m:r>
+                              <a:rPr lang="en-US" altLang="zh-TW" sz="1800" b="1" i="1">
+                                <a:latin typeface="Cambria Math" panose="02040503050406030204" pitchFamily="18" charset="0"/>
+                              </a:rPr>
+                              <m:t>𝒓</m:t>
+                            </m:r>
+                          </m:e>
+                        </m:d>
+                        <m:r>
+                          <a:rPr lang="en-US" altLang="zh-TW" sz="1800" b="1" i="1">
+                            <a:latin typeface="Cambria Math" panose="02040503050406030204" pitchFamily="18" charset="0"/>
+                          </a:rPr>
+                          <m:t>=</m:t>
+                        </m:r>
+                        <m:r>
+                          <a:rPr lang="en-US" altLang="zh-TW" sz="1800" i="1">
+                            <a:latin typeface="Cambria Math" panose="02040503050406030204" pitchFamily="18" charset="0"/>
+                          </a:rPr>
+                          <m:t>𝑈</m:t>
+                        </m:r>
+                        <m:d>
+                          <m:dPr>
+                            <m:ctrlPr>
+                              <a:rPr lang="en-US" altLang="zh-TW" sz="1800" i="1">
+                                <a:latin typeface="Cambria Math" panose="02040503050406030204" pitchFamily="18" charset="0"/>
+                              </a:rPr>
+                            </m:ctrlPr>
+                          </m:dPr>
+                          <m:e>
+                            <m:r>
+                              <a:rPr lang="en-US" altLang="zh-TW" sz="1800" b="1" i="1">
+                                <a:latin typeface="Cambria Math" panose="02040503050406030204" pitchFamily="18" charset="0"/>
+                              </a:rPr>
+                              <m:t>𝒓</m:t>
+                            </m:r>
+                          </m:e>
+                        </m:d>
+                        <m:sSup>
+                          <m:sSupPr>
+                            <m:ctrlPr>
+                              <a:rPr lang="en-US" altLang="zh-TW" sz="1800" i="1">
+                                <a:latin typeface="Cambria Math" panose="02040503050406030204" pitchFamily="18" charset="0"/>
+                              </a:rPr>
+                            </m:ctrlPr>
+                          </m:sSupPr>
+                          <m:e>
+                            <m:r>
+                              <a:rPr lang="en-US" altLang="zh-TW" sz="1800" i="1">
+                                <a:latin typeface="Cambria Math" panose="02040503050406030204" pitchFamily="18" charset="0"/>
+                              </a:rPr>
+                              <m:t>𝑒</m:t>
+                            </m:r>
+                          </m:e>
+                          <m:sup>
+                            <m:r>
+                              <a:rPr lang="en-US" altLang="zh-TW" sz="1800" i="1">
+                                <a:latin typeface="Cambria Math" panose="02040503050406030204" pitchFamily="18" charset="0"/>
+                              </a:rPr>
+                              <m:t>𝑖</m:t>
+                            </m:r>
+                            <m:sSub>
+                              <m:sSubPr>
+                                <m:ctrlPr>
+                                  <a:rPr lang="en-US" altLang="zh-TW" sz="1800" i="1">
+                                    <a:latin typeface="Cambria Math" panose="02040503050406030204" pitchFamily="18" charset="0"/>
+                                  </a:rPr>
+                                </m:ctrlPr>
+                              </m:sSubPr>
+                              <m:e>
+                                <m:r>
+                                  <a:rPr lang="en-US" altLang="zh-TW" sz="1800" i="1">
+                                    <a:latin typeface="Cambria Math" panose="02040503050406030204" pitchFamily="18" charset="0"/>
+                                  </a:rPr>
+                                  <m:t>𝑞</m:t>
+                                </m:r>
+                              </m:e>
+                              <m:sub>
+                                <m:r>
+                                  <a:rPr lang="en-US" altLang="zh-TW" sz="1800" i="1">
+                                    <a:latin typeface="Cambria Math" panose="02040503050406030204" pitchFamily="18" charset="0"/>
+                                  </a:rPr>
+                                  <m:t>0</m:t>
+                                </m:r>
+                              </m:sub>
+                            </m:sSub>
+                            <m:r>
+                              <a:rPr lang="en-US" altLang="zh-TW" sz="1800" i="1">
+                                <a:latin typeface="Cambria Math" panose="02040503050406030204" pitchFamily="18" charset="0"/>
+                              </a:rPr>
+                              <m:t>𝑧</m:t>
+                            </m:r>
+                          </m:sup>
+                        </m:sSup>
+                      </m:e>
+                    </m:d>
+                  </m:oMath>
+                </a14:m>
+                <a:endParaRPr lang="en-US" altLang="zh-TW" sz="1800" dirty="0">
+                  <a:solidFill>
+                    <a:schemeClr val="tx1"/>
+                  </a:solidFill>
+                  <a:latin typeface="Times New Roman" panose="02020603050405020304" pitchFamily="18" charset="0"/>
+                  <a:cs typeface="Times New Roman" panose="02020603050405020304" pitchFamily="18" charset="0"/>
+                </a:endParaRPr>
+              </a:p>
+            </p:txBody>
+          </p:sp>
+        </mc:Choice>
+        <mc:Fallback>
+          <p:sp>
+            <p:nvSpPr>
+              <p:cNvPr id="17" name="內容版面配置區 2">
+                <a:extLst>
+                  <a:ext uri="{FF2B5EF4-FFF2-40B4-BE49-F238E27FC236}">
+                    <a16:creationId xmlns:a16="http://schemas.microsoft.com/office/drawing/2014/main" id="{0B13C1D9-CDE7-41BE-AD8C-6F4D0E41AEA4}"/>
+                  </a:ext>
+                </a:extLst>
+              </p:cNvPr>
+              <p:cNvSpPr txBox="1">
+                <a:spLocks noRot="1" noChangeAspect="1" noMove="1" noResize="1" noEditPoints="1" noAdjustHandles="1" noChangeArrowheads="1" noChangeShapeType="1" noTextEdit="1"/>
+              </p:cNvSpPr>
+              <p:nvPr/>
+            </p:nvSpPr>
+            <p:spPr>
+              <a:xfrm>
+                <a:off x="587397" y="2393755"/>
+                <a:ext cx="4449650" cy="480186"/>
+              </a:xfrm>
+              <a:prstGeom prst="rect">
+                <a:avLst/>
+              </a:prstGeom>
+              <a:blipFill>
+                <a:blip r:embed="rId7"/>
+                <a:stretch>
+                  <a:fillRect l="-1096" b="-24359"/>
+                </a:stretch>
+              </a:blipFill>
+            </p:spPr>
+            <p:txBody>
+              <a:bodyPr/>
+              <a:lstStyle/>
+              <a:p>
+                <a:r>
+                  <a:rPr lang="zh-TW" altLang="en-US">
+                    <a:noFill/>
+                  </a:rPr>
+                  <a:t> </a:t>
+                </a:r>
+              </a:p>
+            </p:txBody>
+          </p:sp>
+        </mc:Fallback>
+      </mc:AlternateContent>
+      <p:sp>
+        <p:nvSpPr>
+          <p:cNvPr id="19" name="矩形 18">
+            <a:extLst>
+              <a:ext uri="{FF2B5EF4-FFF2-40B4-BE49-F238E27FC236}">
+                <a16:creationId xmlns:a16="http://schemas.microsoft.com/office/drawing/2014/main" id="{64697F6B-5EB0-403A-810C-422B401D8463}"/>
+              </a:ext>
+            </a:extLst>
+          </p:cNvPr>
+          <p:cNvSpPr/>
+          <p:nvPr/>
+        </p:nvSpPr>
+        <p:spPr>
+          <a:xfrm>
+            <a:off x="324206" y="1278192"/>
+            <a:ext cx="2569934" cy="369332"/>
+          </a:xfrm>
+          <a:prstGeom prst="rect">
+            <a:avLst/>
+          </a:prstGeom>
+        </p:spPr>
+        <p:txBody>
+          <a:bodyPr wrap="none">
+            <a:spAutoFit/>
+          </a:bodyPr>
+          <a:lstStyle/>
+          <a:p>
+            <a:r>
+              <a:rPr lang="en-US" altLang="zh-TW" dirty="0">
+                <a:latin typeface="Times New Roman" panose="02020603050405020304" pitchFamily="18" charset="0"/>
+                <a:cs typeface="Times New Roman" panose="02020603050405020304" pitchFamily="18" charset="0"/>
+              </a:rPr>
+              <a:t>From Maxwell equations:</a:t>
+            </a:r>
+          </a:p>
+        </p:txBody>
+      </p:sp>
+      <p:sp>
+        <p:nvSpPr>
+          <p:cNvPr id="21" name="內容版面配置區 2">
+            <a:extLst>
+              <a:ext uri="{FF2B5EF4-FFF2-40B4-BE49-F238E27FC236}">
+                <a16:creationId xmlns:a16="http://schemas.microsoft.com/office/drawing/2014/main" id="{95B97DEC-3E57-44A2-90B4-96CD8428CDAE}"/>
+              </a:ext>
+            </a:extLst>
+          </p:cNvPr>
+          <p:cNvSpPr txBox="1">
+            <a:spLocks/>
+          </p:cNvSpPr>
+          <p:nvPr/>
+        </p:nvSpPr>
+        <p:spPr>
+          <a:xfrm>
+            <a:off x="587397" y="3614344"/>
+            <a:ext cx="4041561" cy="480186"/>
+          </a:xfrm>
+          <a:prstGeom prst="rect">
+            <a:avLst/>
+          </a:prstGeom>
+        </p:spPr>
+        <p:txBody>
+          <a:bodyPr vert="horz" lIns="91440" tIns="45720" rIns="91440" bIns="45720" rtlCol="0">
+            <a:noAutofit/>
+          </a:bodyPr>
+          <a:lstStyle>
+            <a:lvl1pPr marL="228600" indent="-228600" algn="l" defTabSz="914400" rtl="0" eaLnBrk="1" latinLnBrk="0" hangingPunct="1">
+              <a:lnSpc>
+                <a:spcPct val="90000"/>
+              </a:lnSpc>
+              <a:spcBef>
+                <a:spcPts val="1000"/>
+              </a:spcBef>
+              <a:buFont typeface="Arial" panose="020B0604020202020204" pitchFamily="34" charset="0"/>
+              <a:buChar char="•"/>
+              <a:defRPr sz="2800" kern="1200">
+                <a:solidFill>
+                  <a:schemeClr val="tx1"/>
+                </a:solidFill>
+                <a:latin typeface="+mn-lt"/>
+                <a:ea typeface="+mn-ea"/>
+                <a:cs typeface="+mn-cs"/>
+              </a:defRPr>
+            </a:lvl1pPr>
+            <a:lvl2pPr marL="685800" indent="-228600" algn="l" defTabSz="914400" rtl="0" eaLnBrk="1" latinLnBrk="0" hangingPunct="1">
+              <a:lnSpc>
+                <a:spcPct val="90000"/>
+              </a:lnSpc>
+              <a:spcBef>
+                <a:spcPts val="500"/>
+              </a:spcBef>
+              <a:buFont typeface="Arial" panose="020B0604020202020204" pitchFamily="34" charset="0"/>
+              <a:buChar char="•"/>
+              <a:defRPr sz="2400" kern="1200">
+                <a:solidFill>
+                  <a:schemeClr val="tx1"/>
+                </a:solidFill>
+                <a:latin typeface="+mn-lt"/>
+                <a:ea typeface="+mn-ea"/>
+                <a:cs typeface="+mn-cs"/>
+              </a:defRPr>
+            </a:lvl2pPr>
+            <a:lvl3pPr marL="1143000" indent="-228600" algn="l" defTabSz="914400" rtl="0" eaLnBrk="1" latinLnBrk="0" hangingPunct="1">
+              <a:lnSpc>
+                <a:spcPct val="90000"/>
+              </a:lnSpc>
+              <a:spcBef>
+                <a:spcPts val="500"/>
+              </a:spcBef>
+              <a:buFont typeface="Arial" panose="020B0604020202020204" pitchFamily="34" charset="0"/>
+              <a:buChar char="•"/>
+              <a:defRPr sz="2000" kern="1200">
+                <a:solidFill>
+                  <a:schemeClr val="tx1"/>
+                </a:solidFill>
+                <a:latin typeface="+mn-lt"/>
+                <a:ea typeface="+mn-ea"/>
+                <a:cs typeface="+mn-cs"/>
+              </a:defRPr>
+            </a:lvl3pPr>
+            <a:lvl4pPr marL="1600200" indent="-228600" algn="l" defTabSz="914400" rtl="0" eaLnBrk="1" latinLnBrk="0" hangingPunct="1">
+              <a:lnSpc>
+                <a:spcPct val="90000"/>
+              </a:lnSpc>
+              <a:spcBef>
+                <a:spcPts val="500"/>
+              </a:spcBef>
+              <a:buFont typeface="Arial" panose="020B0604020202020204" pitchFamily="34" charset="0"/>
+              <a:buChar char="•"/>
+              <a:defRPr sz="1800" kern="1200">
+                <a:solidFill>
+                  <a:schemeClr val="tx1"/>
+                </a:solidFill>
+                <a:latin typeface="+mn-lt"/>
+                <a:ea typeface="+mn-ea"/>
+                <a:cs typeface="+mn-cs"/>
+              </a:defRPr>
+            </a:lvl4pPr>
+            <a:lvl5pPr marL="2057400" indent="-228600" algn="l" defTabSz="914400" rtl="0" eaLnBrk="1" latinLnBrk="0" hangingPunct="1">
+              <a:lnSpc>
+                <a:spcPct val="90000"/>
+              </a:lnSpc>
+              <a:spcBef>
+                <a:spcPts val="500"/>
+              </a:spcBef>
+              <a:buFont typeface="Arial" panose="020B0604020202020204" pitchFamily="34" charset="0"/>
+              <a:buChar char="•"/>
+              <a:defRPr sz="1800" kern="1200">
+                <a:solidFill>
+                  <a:schemeClr val="tx1"/>
+                </a:solidFill>
+                <a:latin typeface="+mn-lt"/>
+                <a:ea typeface="+mn-ea"/>
+                <a:cs typeface="+mn-cs"/>
+              </a:defRPr>
+            </a:lvl5pPr>
+            <a:lvl6pPr marL="2514600" indent="-228600" algn="l" defTabSz="914400" rtl="0" eaLnBrk="1" latinLnBrk="0" hangingPunct="1">
+              <a:lnSpc>
+                <a:spcPct val="90000"/>
+              </a:lnSpc>
+              <a:spcBef>
+                <a:spcPts val="500"/>
+              </a:spcBef>
+              <a:buFont typeface="Arial" panose="020B0604020202020204" pitchFamily="34" charset="0"/>
+              <a:buChar char="•"/>
+              <a:defRPr sz="1800" kern="1200">
+                <a:solidFill>
+                  <a:schemeClr val="tx1"/>
+                </a:solidFill>
+                <a:latin typeface="+mn-lt"/>
+                <a:ea typeface="+mn-ea"/>
+                <a:cs typeface="+mn-cs"/>
+              </a:defRPr>
+            </a:lvl6pPr>
+            <a:lvl7pPr marL="2971800" indent="-228600" algn="l" defTabSz="914400" rtl="0" eaLnBrk="1" latinLnBrk="0" hangingPunct="1">
+              <a:lnSpc>
+                <a:spcPct val="90000"/>
+              </a:lnSpc>
+              <a:spcBef>
+                <a:spcPts val="500"/>
+              </a:spcBef>
+              <a:buFont typeface="Arial" panose="020B0604020202020204" pitchFamily="34" charset="0"/>
+              <a:buChar char="•"/>
+              <a:defRPr sz="1800" kern="1200">
+                <a:solidFill>
+                  <a:schemeClr val="tx1"/>
+                </a:solidFill>
+                <a:latin typeface="+mn-lt"/>
+                <a:ea typeface="+mn-ea"/>
+                <a:cs typeface="+mn-cs"/>
+              </a:defRPr>
+            </a:lvl7pPr>
+            <a:lvl8pPr marL="3429000" indent="-228600" algn="l" defTabSz="914400" rtl="0" eaLnBrk="1" latinLnBrk="0" hangingPunct="1">
+              <a:lnSpc>
+                <a:spcPct val="90000"/>
+              </a:lnSpc>
+              <a:spcBef>
+                <a:spcPts val="500"/>
+              </a:spcBef>
+              <a:buFont typeface="Arial" panose="020B0604020202020204" pitchFamily="34" charset="0"/>
+              <a:buChar char="•"/>
+              <a:defRPr sz="1800" kern="1200">
+                <a:solidFill>
+                  <a:schemeClr val="tx1"/>
+                </a:solidFill>
+                <a:latin typeface="+mn-lt"/>
+                <a:ea typeface="+mn-ea"/>
+                <a:cs typeface="+mn-cs"/>
+              </a:defRPr>
+            </a:lvl8pPr>
+            <a:lvl9pPr marL="3886200" indent="-228600" algn="l" defTabSz="914400" rtl="0" eaLnBrk="1" latinLnBrk="0" hangingPunct="1">
+              <a:lnSpc>
+                <a:spcPct val="90000"/>
+              </a:lnSpc>
+              <a:spcBef>
+                <a:spcPts val="500"/>
+              </a:spcBef>
+              <a:buFont typeface="Arial" panose="020B0604020202020204" pitchFamily="34" charset="0"/>
+              <a:buChar char="•"/>
+              <a:defRPr sz="1800" kern="1200">
+                <a:solidFill>
+                  <a:schemeClr val="tx1"/>
+                </a:solidFill>
+                <a:latin typeface="+mn-lt"/>
+                <a:ea typeface="+mn-ea"/>
+                <a:cs typeface="+mn-cs"/>
+              </a:defRPr>
+            </a:lvl9pPr>
+          </a:lstStyle>
+          <a:p>
+            <a:pPr marL="0" indent="0">
+              <a:lnSpc>
+                <a:spcPct val="150000"/>
+              </a:lnSpc>
+              <a:buClr>
+                <a:schemeClr val="accent1">
+                  <a:lumMod val="75000"/>
+                </a:schemeClr>
+              </a:buClr>
+              <a:buNone/>
+            </a:pPr>
+            <a:r>
+              <a:rPr lang="en-US" altLang="zh-TW" sz="1800" b="1" dirty="0">
+                <a:solidFill>
+                  <a:schemeClr val="tx1"/>
+                </a:solidFill>
+                <a:latin typeface="Times New Roman" panose="02020603050405020304" pitchFamily="18" charset="0"/>
+                <a:cs typeface="Times New Roman" panose="02020603050405020304" pitchFamily="18" charset="0"/>
+              </a:rPr>
+              <a:t>paraxial approximation</a:t>
+            </a:r>
+          </a:p>
+        </p:txBody>
+      </p:sp>
+      <mc:AlternateContent xmlns:mc="http://schemas.openxmlformats.org/markup-compatibility/2006">
+        <mc:Choice xmlns:a14="http://schemas.microsoft.com/office/drawing/2010/main" Requires="a14">
+          <p:sp>
+            <p:nvSpPr>
+              <p:cNvPr id="22" name="矩形 21">
+                <a:extLst>
+                  <a:ext uri="{FF2B5EF4-FFF2-40B4-BE49-F238E27FC236}">
+                    <a16:creationId xmlns:a16="http://schemas.microsoft.com/office/drawing/2014/main" id="{DF091636-A308-4B62-B200-4CD68CFF3B30}"/>
+                  </a:ext>
+                </a:extLst>
+              </p:cNvPr>
+              <p:cNvSpPr/>
+              <p:nvPr/>
+            </p:nvSpPr>
+            <p:spPr>
+              <a:xfrm>
+                <a:off x="1078463" y="4831856"/>
+                <a:ext cx="2946399" cy="717248"/>
+              </a:xfrm>
+              <a:prstGeom prst="rect">
+                <a:avLst/>
+              </a:prstGeom>
+            </p:spPr>
+            <p:txBody>
+              <a:bodyPr wrap="square">
+                <a:spAutoFit/>
+              </a:bodyPr>
+              <a:lstStyle/>
+              <a:p>
+                <a:pPr/>
+                <a14:m>
+                  <m:oMathPara xmlns:m="http://schemas.openxmlformats.org/officeDocument/2006/math">
+                    <m:oMathParaPr>
+                      <m:jc m:val="left"/>
+                    </m:oMathParaPr>
+                    <m:oMath xmlns:m="http://schemas.openxmlformats.org/officeDocument/2006/math">
+                      <m:d>
+                        <m:dPr>
+                          <m:begChr m:val="|"/>
+                          <m:endChr m:val="|"/>
+                          <m:ctrlPr>
+                            <a:rPr lang="en-US" altLang="zh-TW" b="0" i="1" smtClean="0">
+                              <a:latin typeface="Cambria Math" panose="02040503050406030204" pitchFamily="18" charset="0"/>
+                            </a:rPr>
+                          </m:ctrlPr>
+                        </m:dPr>
+                        <m:e>
+                          <m:f>
+                            <m:fPr>
+                              <m:ctrlPr>
+                                <a:rPr lang="en-US" altLang="zh-TW" i="1">
+                                  <a:latin typeface="Cambria Math" panose="02040503050406030204" pitchFamily="18" charset="0"/>
+                                </a:rPr>
+                              </m:ctrlPr>
+                            </m:fPr>
+                            <m:num>
+                              <m:sSup>
+                                <m:sSupPr>
+                                  <m:ctrlPr>
+                                    <a:rPr lang="en-US" altLang="zh-TW" i="1">
+                                      <a:latin typeface="Cambria Math" panose="02040503050406030204" pitchFamily="18" charset="0"/>
+                                    </a:rPr>
+                                  </m:ctrlPr>
+                                </m:sSupPr>
+                                <m:e>
+                                  <m:r>
+                                    <a:rPr lang="en-US" altLang="zh-TW" i="1">
+                                      <a:latin typeface="Cambria Math" panose="02040503050406030204" pitchFamily="18" charset="0"/>
+                                    </a:rPr>
+                                    <m:t>𝜕</m:t>
+                                  </m:r>
+                                </m:e>
+                                <m:sup>
+                                  <m:r>
+                                    <a:rPr lang="en-US" altLang="zh-TW" i="1">
+                                      <a:latin typeface="Cambria Math" panose="02040503050406030204" pitchFamily="18" charset="0"/>
+                                    </a:rPr>
+                                    <m:t>2</m:t>
+                                  </m:r>
+                                </m:sup>
+                              </m:sSup>
+                            </m:num>
+                            <m:den>
+                              <m:r>
+                                <a:rPr lang="en-US" altLang="zh-TW" i="1">
+                                  <a:latin typeface="Cambria Math" panose="02040503050406030204" pitchFamily="18" charset="0"/>
+                                </a:rPr>
+                                <m:t>𝜕</m:t>
+                              </m:r>
+                              <m:r>
+                                <a:rPr lang="en-US" altLang="zh-TW" i="1">
+                                  <a:latin typeface="Cambria Math" panose="02040503050406030204" pitchFamily="18" charset="0"/>
+                                </a:rPr>
+                                <m:t> </m:t>
+                              </m:r>
+                              <m:sSup>
+                                <m:sSupPr>
+                                  <m:ctrlPr>
+                                    <a:rPr lang="en-US" altLang="zh-TW" i="1">
+                                      <a:latin typeface="Cambria Math" panose="02040503050406030204" pitchFamily="18" charset="0"/>
+                                    </a:rPr>
+                                  </m:ctrlPr>
+                                </m:sSupPr>
+                                <m:e>
+                                  <m:r>
+                                    <a:rPr lang="en-US" altLang="zh-TW" i="1">
+                                      <a:latin typeface="Cambria Math" panose="02040503050406030204" pitchFamily="18" charset="0"/>
+                                    </a:rPr>
+                                    <m:t>𝑧</m:t>
+                                  </m:r>
+                                </m:e>
+                                <m:sup>
+                                  <m:r>
+                                    <a:rPr lang="en-US" altLang="zh-TW" i="1">
+                                      <a:latin typeface="Cambria Math" panose="02040503050406030204" pitchFamily="18" charset="0"/>
+                                    </a:rPr>
+                                    <m:t>2</m:t>
+                                  </m:r>
+                                </m:sup>
+                              </m:sSup>
+                            </m:den>
+                          </m:f>
+                          <m:r>
+                            <a:rPr lang="en-US" altLang="zh-TW" i="1">
+                              <a:latin typeface="Cambria Math" panose="02040503050406030204" pitchFamily="18" charset="0"/>
+                            </a:rPr>
+                            <m:t>𝑈</m:t>
+                          </m:r>
+                          <m:d>
+                            <m:dPr>
+                              <m:ctrlPr>
+                                <a:rPr lang="en-US" altLang="zh-TW" i="1">
+                                  <a:latin typeface="Cambria Math" panose="02040503050406030204" pitchFamily="18" charset="0"/>
+                                </a:rPr>
+                              </m:ctrlPr>
+                            </m:dPr>
+                            <m:e>
+                              <m:r>
+                                <a:rPr lang="en-US" altLang="zh-TW" b="1" i="1">
+                                  <a:latin typeface="Cambria Math" panose="02040503050406030204" pitchFamily="18" charset="0"/>
+                                </a:rPr>
+                                <m:t>𝒓</m:t>
+                              </m:r>
+                            </m:e>
+                          </m:d>
+                        </m:e>
+                      </m:d>
+                      <m:r>
+                        <a:rPr lang="en-US" altLang="zh-TW" b="0" i="1" smtClean="0">
+                          <a:latin typeface="Cambria Math" panose="02040503050406030204" pitchFamily="18" charset="0"/>
+                        </a:rPr>
+                        <m:t>≪</m:t>
+                      </m:r>
+                      <m:sSubSup>
+                        <m:sSubSupPr>
+                          <m:ctrlPr>
+                            <a:rPr lang="en-US" altLang="zh-TW" i="1">
+                              <a:latin typeface="Cambria Math" panose="02040503050406030204" pitchFamily="18" charset="0"/>
+                            </a:rPr>
+                          </m:ctrlPr>
+                        </m:sSubSupPr>
+                        <m:e>
+                          <m:r>
+                            <a:rPr lang="en-US" altLang="zh-TW" i="1">
+                              <a:latin typeface="Cambria Math" panose="02040503050406030204" pitchFamily="18" charset="0"/>
+                            </a:rPr>
+                            <m:t>𝑞</m:t>
+                          </m:r>
+                        </m:e>
+                        <m:sub>
+                          <m:r>
+                            <a:rPr lang="en-US" altLang="zh-TW" i="1">
+                              <a:latin typeface="Cambria Math" panose="02040503050406030204" pitchFamily="18" charset="0"/>
+                            </a:rPr>
+                            <m:t>0</m:t>
+                          </m:r>
+                        </m:sub>
+                        <m:sup>
+                          <m:r>
+                            <a:rPr lang="en-US" altLang="zh-TW" i="1">
+                              <a:latin typeface="Cambria Math" panose="02040503050406030204" pitchFamily="18" charset="0"/>
+                            </a:rPr>
+                            <m:t> </m:t>
+                          </m:r>
+                        </m:sup>
+                      </m:sSubSup>
+                      <m:d>
+                        <m:dPr>
+                          <m:begChr m:val="|"/>
+                          <m:endChr m:val="|"/>
+                          <m:ctrlPr>
+                            <a:rPr lang="en-US" altLang="zh-TW" b="0" i="1" smtClean="0">
+                              <a:latin typeface="Cambria Math" panose="02040503050406030204" pitchFamily="18" charset="0"/>
+                            </a:rPr>
+                          </m:ctrlPr>
+                        </m:dPr>
+                        <m:e>
+                          <m:f>
+                            <m:fPr>
+                              <m:ctrlPr>
+                                <a:rPr lang="en-US" altLang="zh-TW" i="1">
+                                  <a:latin typeface="Cambria Math" panose="02040503050406030204" pitchFamily="18" charset="0"/>
+                                </a:rPr>
+                              </m:ctrlPr>
+                            </m:fPr>
+                            <m:num>
+                              <m:r>
+                                <a:rPr lang="en-US" altLang="zh-TW" i="1">
+                                  <a:latin typeface="Cambria Math" panose="02040503050406030204" pitchFamily="18" charset="0"/>
+                                </a:rPr>
+                                <m:t>𝜕</m:t>
+                              </m:r>
+                            </m:num>
+                            <m:den>
+                              <m:r>
+                                <a:rPr lang="en-US" altLang="zh-TW" i="1">
+                                  <a:latin typeface="Cambria Math" panose="02040503050406030204" pitchFamily="18" charset="0"/>
+                                </a:rPr>
+                                <m:t>𝜕</m:t>
+                              </m:r>
+                              <m:r>
+                                <a:rPr lang="en-US" altLang="zh-TW" i="1">
+                                  <a:latin typeface="Cambria Math" panose="02040503050406030204" pitchFamily="18" charset="0"/>
+                                </a:rPr>
+                                <m:t> </m:t>
+                              </m:r>
+                              <m:r>
+                                <a:rPr lang="en-US" altLang="zh-TW" i="1">
+                                  <a:latin typeface="Cambria Math" panose="02040503050406030204" pitchFamily="18" charset="0"/>
+                                </a:rPr>
+                                <m:t>𝑧</m:t>
+                              </m:r>
+                            </m:den>
+                          </m:f>
+                          <m:r>
+                            <a:rPr lang="en-US" altLang="zh-TW" i="1">
+                              <a:latin typeface="Cambria Math" panose="02040503050406030204" pitchFamily="18" charset="0"/>
+                            </a:rPr>
+                            <m:t>𝑈</m:t>
+                          </m:r>
+                          <m:d>
+                            <m:dPr>
+                              <m:ctrlPr>
+                                <a:rPr lang="en-US" altLang="zh-TW" i="1">
+                                  <a:latin typeface="Cambria Math" panose="02040503050406030204" pitchFamily="18" charset="0"/>
+                                </a:rPr>
+                              </m:ctrlPr>
+                            </m:dPr>
+                            <m:e>
+                              <m:r>
+                                <a:rPr lang="en-US" altLang="zh-TW" b="1" i="1">
+                                  <a:latin typeface="Cambria Math" panose="02040503050406030204" pitchFamily="18" charset="0"/>
+                                </a:rPr>
+                                <m:t>𝒓</m:t>
+                              </m:r>
+                            </m:e>
+                          </m:d>
+                        </m:e>
+                      </m:d>
+                    </m:oMath>
+                  </m:oMathPara>
+                </a14:m>
+                <a:endParaRPr lang="zh-TW" altLang="en-US" dirty="0">
+                  <a:latin typeface="Times New Roman" panose="02020603050405020304" pitchFamily="18" charset="0"/>
+                  <a:cs typeface="Times New Roman" panose="02020603050405020304" pitchFamily="18" charset="0"/>
+                </a:endParaRPr>
+              </a:p>
+            </p:txBody>
+          </p:sp>
+        </mc:Choice>
+        <mc:Fallback>
+          <p:sp>
+            <p:nvSpPr>
+              <p:cNvPr id="22" name="矩形 21">
+                <a:extLst>
+                  <a:ext uri="{FF2B5EF4-FFF2-40B4-BE49-F238E27FC236}">
+                    <a16:creationId xmlns:a16="http://schemas.microsoft.com/office/drawing/2014/main" id="{DF091636-A308-4B62-B200-4CD68CFF3B30}"/>
+                  </a:ext>
+                </a:extLst>
+              </p:cNvPr>
+              <p:cNvSpPr>
+                <a:spLocks noRot="1" noChangeAspect="1" noMove="1" noResize="1" noEditPoints="1" noAdjustHandles="1" noChangeArrowheads="1" noChangeShapeType="1" noTextEdit="1"/>
+              </p:cNvSpPr>
+              <p:nvPr/>
+            </p:nvSpPr>
+            <p:spPr>
+              <a:xfrm>
+                <a:off x="1078463" y="4831856"/>
+                <a:ext cx="2946399" cy="717248"/>
+              </a:xfrm>
+              <a:prstGeom prst="rect">
+                <a:avLst/>
+              </a:prstGeom>
+              <a:blipFill>
+                <a:blip r:embed="rId8"/>
+                <a:stretch>
+                  <a:fillRect/>
+                </a:stretch>
+              </a:blipFill>
+            </p:spPr>
+            <p:txBody>
+              <a:bodyPr/>
+              <a:lstStyle/>
+              <a:p>
+                <a:r>
+                  <a:rPr lang="zh-TW" altLang="en-US">
+                    <a:noFill/>
+                  </a:rPr>
+                  <a:t> </a:t>
+                </a:r>
+              </a:p>
+            </p:txBody>
+          </p:sp>
+        </mc:Fallback>
+      </mc:AlternateContent>
+      <p:sp>
+        <p:nvSpPr>
+          <p:cNvPr id="26" name="矩形 25">
+            <a:extLst>
+              <a:ext uri="{FF2B5EF4-FFF2-40B4-BE49-F238E27FC236}">
+                <a16:creationId xmlns:a16="http://schemas.microsoft.com/office/drawing/2014/main" id="{7D470F9A-C972-4278-AEDD-9C1C747619F5}"/>
+              </a:ext>
+            </a:extLst>
+          </p:cNvPr>
+          <p:cNvSpPr/>
+          <p:nvPr/>
+        </p:nvSpPr>
+        <p:spPr>
+          <a:xfrm>
+            <a:off x="5639685" y="1830642"/>
+            <a:ext cx="6433716" cy="369332"/>
+          </a:xfrm>
+          <a:prstGeom prst="rect">
+            <a:avLst/>
+          </a:prstGeom>
+        </p:spPr>
+        <p:txBody>
+          <a:bodyPr wrap="square">
+            <a:spAutoFit/>
+          </a:bodyPr>
+          <a:lstStyle/>
+          <a:p>
+            <a:r>
+              <a:rPr lang="en-US" altLang="zh-TW" dirty="0">
+                <a:latin typeface="Times New Roman" panose="02020603050405020304" pitchFamily="18" charset="0"/>
+                <a:cs typeface="Times New Roman" panose="02020603050405020304" pitchFamily="18" charset="0"/>
+              </a:rPr>
+              <a:t>Transversely polarized light in Coulomb gauge gives the condition</a:t>
+            </a:r>
+          </a:p>
+        </p:txBody>
+      </p:sp>
+      <mc:AlternateContent xmlns:mc="http://schemas.openxmlformats.org/markup-compatibility/2006">
+        <mc:Choice xmlns:a14="http://schemas.microsoft.com/office/drawing/2010/main" Requires="a14">
+          <p:sp>
+            <p:nvSpPr>
+              <p:cNvPr id="32" name="矩形 31">
+                <a:extLst>
+                  <a:ext uri="{FF2B5EF4-FFF2-40B4-BE49-F238E27FC236}">
+                    <a16:creationId xmlns:a16="http://schemas.microsoft.com/office/drawing/2014/main" id="{888D4A24-8A04-41DE-9C19-EE882D56FED9}"/>
+                  </a:ext>
+                </a:extLst>
+              </p:cNvPr>
+              <p:cNvSpPr/>
+              <p:nvPr/>
+            </p:nvSpPr>
+            <p:spPr>
+              <a:xfrm>
+                <a:off x="5639685" y="2225613"/>
+                <a:ext cx="3324628" cy="382477"/>
+              </a:xfrm>
+              <a:prstGeom prst="rect">
+                <a:avLst/>
+              </a:prstGeom>
+            </p:spPr>
+            <p:txBody>
+              <a:bodyPr wrap="none">
+                <a:spAutoFit/>
+              </a:bodyPr>
+              <a:lstStyle/>
+              <a:p>
+                <a:pPr/>
+                <a14:m>
+                  <m:oMathPara xmlns:m="http://schemas.openxmlformats.org/officeDocument/2006/math">
+                    <m:oMathParaPr>
+                      <m:jc m:val="left"/>
+                    </m:oMathParaPr>
+                    <m:oMath xmlns:m="http://schemas.openxmlformats.org/officeDocument/2006/math">
+                      <m:r>
+                        <a:rPr lang="en-US" altLang="zh-TW" b="1" i="1" smtClean="0">
+                          <a:latin typeface="Cambria Math" panose="02040503050406030204" pitchFamily="18" charset="0"/>
+                        </a:rPr>
+                        <m:t>𝛁</m:t>
+                      </m:r>
+                      <m:r>
+                        <a:rPr lang="en-US" altLang="zh-TW" i="1">
+                          <a:latin typeface="Cambria Math" panose="02040503050406030204" pitchFamily="18" charset="0"/>
+                        </a:rPr>
+                        <m:t>⋅</m:t>
+                      </m:r>
+                      <m:sSup>
+                        <m:sSupPr>
+                          <m:ctrlPr>
+                            <a:rPr lang="en-US" altLang="zh-TW" i="1">
+                              <a:latin typeface="Cambria Math" panose="02040503050406030204" pitchFamily="18" charset="0"/>
+                            </a:rPr>
+                          </m:ctrlPr>
+                        </m:sSupPr>
+                        <m:e>
+                          <m:r>
+                            <a:rPr lang="en-US" altLang="zh-TW" b="1" i="1">
+                              <a:latin typeface="Cambria Math" panose="02040503050406030204" pitchFamily="18" charset="0"/>
+                            </a:rPr>
+                            <m:t>𝑨</m:t>
+                          </m:r>
+                        </m:e>
+                        <m:sup>
+                          <m:r>
+                            <a:rPr lang="en-US" altLang="zh-TW" i="1">
+                              <a:latin typeface="Cambria Math" panose="02040503050406030204" pitchFamily="18" charset="0"/>
+                            </a:rPr>
+                            <m:t>𝐶</m:t>
+                          </m:r>
+                        </m:sup>
+                      </m:sSup>
+                      <m:d>
+                        <m:dPr>
+                          <m:ctrlPr>
+                            <a:rPr lang="en-US" altLang="zh-TW" i="1">
+                              <a:latin typeface="Cambria Math" panose="02040503050406030204" pitchFamily="18" charset="0"/>
+                            </a:rPr>
+                          </m:ctrlPr>
+                        </m:dPr>
+                        <m:e>
+                          <m:r>
+                            <a:rPr lang="en-US" altLang="zh-TW" b="1" i="1">
+                              <a:latin typeface="Cambria Math" panose="02040503050406030204" pitchFamily="18" charset="0"/>
+                            </a:rPr>
+                            <m:t>𝒓</m:t>
+                          </m:r>
+                          <m:r>
+                            <a:rPr lang="en-US" altLang="zh-TW" b="1" i="1">
+                              <a:latin typeface="Cambria Math" panose="02040503050406030204" pitchFamily="18" charset="0"/>
+                            </a:rPr>
+                            <m:t>,</m:t>
+                          </m:r>
+                          <m:r>
+                            <a:rPr lang="en-US" altLang="zh-TW" i="1">
+                              <a:latin typeface="Cambria Math" panose="02040503050406030204" pitchFamily="18" charset="0"/>
+                            </a:rPr>
+                            <m:t> </m:t>
+                          </m:r>
+                          <m:r>
+                            <a:rPr lang="en-US" altLang="zh-TW" i="1">
+                              <a:latin typeface="Cambria Math" panose="02040503050406030204" pitchFamily="18" charset="0"/>
+                            </a:rPr>
+                            <m:t>𝑡</m:t>
+                          </m:r>
+                        </m:e>
+                      </m:d>
+                      <m:r>
+                        <a:rPr lang="en-US" altLang="zh-TW" i="1" smtClean="0">
+                          <a:latin typeface="Cambria Math" panose="02040503050406030204" pitchFamily="18" charset="0"/>
+                        </a:rPr>
+                        <m:t>=</m:t>
+                      </m:r>
+                      <m:acc>
+                        <m:accPr>
+                          <m:chr m:val="̂"/>
+                          <m:ctrlPr>
+                            <a:rPr lang="en-US" altLang="zh-TW" b="1" i="1" smtClean="0">
+                              <a:latin typeface="Cambria Math" panose="02040503050406030204" pitchFamily="18" charset="0"/>
+                            </a:rPr>
+                          </m:ctrlPr>
+                        </m:accPr>
+                        <m:e>
+                          <m:r>
+                            <a:rPr lang="zh-TW" altLang="en-US" b="1" i="1" smtClean="0">
+                              <a:latin typeface="Cambria Math" panose="02040503050406030204" pitchFamily="18" charset="0"/>
+                            </a:rPr>
+                            <m:t>𝜺</m:t>
+                          </m:r>
+                        </m:e>
+                      </m:acc>
+                      <m:r>
+                        <a:rPr lang="en-US" altLang="zh-TW" b="1" i="1" smtClean="0">
+                          <a:latin typeface="Cambria Math" panose="02040503050406030204" pitchFamily="18" charset="0"/>
+                        </a:rPr>
+                        <m:t>⋅</m:t>
+                      </m:r>
+                      <m:sSub>
+                        <m:sSubPr>
+                          <m:ctrlPr>
+                            <a:rPr lang="en-US" altLang="zh-TW" b="1" i="0" smtClean="0">
+                              <a:latin typeface="Cambria Math" panose="02040503050406030204" pitchFamily="18" charset="0"/>
+                            </a:rPr>
+                          </m:ctrlPr>
+                        </m:sSubPr>
+                        <m:e>
+                          <m:r>
+                            <a:rPr lang="en-US" altLang="zh-TW" b="1" i="0">
+                              <a:latin typeface="Cambria Math" panose="02040503050406030204" pitchFamily="18" charset="0"/>
+                            </a:rPr>
+                            <m:t>𝛁</m:t>
+                          </m:r>
+                        </m:e>
+                        <m:sub>
+                          <m:r>
+                            <a:rPr lang="en-US" altLang="zh-TW" b="1" i="1" smtClean="0">
+                              <a:latin typeface="Cambria Math" panose="02040503050406030204" pitchFamily="18" charset="0"/>
+                            </a:rPr>
+                            <m:t>∥</m:t>
+                          </m:r>
+                        </m:sub>
+                      </m:sSub>
+                      <m:sSup>
+                        <m:sSupPr>
+                          <m:ctrlPr>
+                            <a:rPr lang="en-US" altLang="zh-TW" i="1">
+                              <a:latin typeface="Cambria Math" panose="02040503050406030204" pitchFamily="18" charset="0"/>
+                            </a:rPr>
+                          </m:ctrlPr>
+                        </m:sSupPr>
+                        <m:e>
+                          <m:r>
+                            <a:rPr lang="en-US" altLang="zh-TW" b="0" i="1">
+                              <a:latin typeface="Cambria Math" panose="02040503050406030204" pitchFamily="18" charset="0"/>
+                            </a:rPr>
+                            <m:t>𝐴</m:t>
+                          </m:r>
+                        </m:e>
+                        <m:sup>
+                          <m:r>
+                            <a:rPr lang="en-US" altLang="zh-TW" i="1">
+                              <a:latin typeface="Cambria Math" panose="02040503050406030204" pitchFamily="18" charset="0"/>
+                            </a:rPr>
+                            <m:t>𝐶</m:t>
+                          </m:r>
+                        </m:sup>
+                      </m:sSup>
+                      <m:d>
+                        <m:dPr>
+                          <m:ctrlPr>
+                            <a:rPr lang="en-US" altLang="zh-TW" i="1">
+                              <a:latin typeface="Cambria Math" panose="02040503050406030204" pitchFamily="18" charset="0"/>
+                            </a:rPr>
+                          </m:ctrlPr>
+                        </m:dPr>
+                        <m:e>
+                          <m:r>
+                            <a:rPr lang="en-US" altLang="zh-TW" b="1" i="1">
+                              <a:latin typeface="Cambria Math" panose="02040503050406030204" pitchFamily="18" charset="0"/>
+                            </a:rPr>
+                            <m:t>𝒓</m:t>
+                          </m:r>
+                          <m:r>
+                            <a:rPr lang="en-US" altLang="zh-TW" b="1" i="1">
+                              <a:latin typeface="Cambria Math" panose="02040503050406030204" pitchFamily="18" charset="0"/>
+                            </a:rPr>
+                            <m:t>,</m:t>
+                          </m:r>
+                          <m:r>
+                            <a:rPr lang="en-US" altLang="zh-TW" i="1">
+                              <a:latin typeface="Cambria Math" panose="02040503050406030204" pitchFamily="18" charset="0"/>
+                            </a:rPr>
+                            <m:t> </m:t>
+                          </m:r>
+                          <m:r>
+                            <a:rPr lang="en-US" altLang="zh-TW" i="1">
+                              <a:latin typeface="Cambria Math" panose="02040503050406030204" pitchFamily="18" charset="0"/>
+                            </a:rPr>
+                            <m:t>𝑡</m:t>
+                          </m:r>
+                        </m:e>
+                      </m:d>
+                      <m:r>
+                        <a:rPr lang="en-US" altLang="zh-TW" b="1" i="1" smtClean="0">
+                          <a:latin typeface="Cambria Math" panose="02040503050406030204" pitchFamily="18" charset="0"/>
+                        </a:rPr>
+                        <m:t>=</m:t>
+                      </m:r>
+                      <m:r>
+                        <a:rPr lang="en-US" altLang="zh-TW" b="0" i="1" smtClean="0">
+                          <a:latin typeface="Cambria Math" panose="02040503050406030204" pitchFamily="18" charset="0"/>
+                        </a:rPr>
+                        <m:t>0</m:t>
+                      </m:r>
+                    </m:oMath>
+                  </m:oMathPara>
+                </a14:m>
+                <a:endParaRPr lang="zh-TW" altLang="en-US" dirty="0"/>
+              </a:p>
+            </p:txBody>
+          </p:sp>
+        </mc:Choice>
+        <mc:Fallback>
+          <p:sp>
+            <p:nvSpPr>
+              <p:cNvPr id="32" name="矩形 31">
+                <a:extLst>
+                  <a:ext uri="{FF2B5EF4-FFF2-40B4-BE49-F238E27FC236}">
+                    <a16:creationId xmlns:a16="http://schemas.microsoft.com/office/drawing/2014/main" id="{888D4A24-8A04-41DE-9C19-EE882D56FED9}"/>
+                  </a:ext>
+                </a:extLst>
+              </p:cNvPr>
+              <p:cNvSpPr>
+                <a:spLocks noRot="1" noChangeAspect="1" noMove="1" noResize="1" noEditPoints="1" noAdjustHandles="1" noChangeArrowheads="1" noChangeShapeType="1" noTextEdit="1"/>
+              </p:cNvSpPr>
+              <p:nvPr/>
+            </p:nvSpPr>
+            <p:spPr>
+              <a:xfrm>
+                <a:off x="5639685" y="2225613"/>
+                <a:ext cx="3324628" cy="382477"/>
+              </a:xfrm>
+              <a:prstGeom prst="rect">
+                <a:avLst/>
+              </a:prstGeom>
+              <a:blipFill>
+                <a:blip r:embed="rId9"/>
+                <a:stretch>
+                  <a:fillRect t="-3175" b="-6349"/>
+                </a:stretch>
+              </a:blipFill>
+            </p:spPr>
+            <p:txBody>
+              <a:bodyPr/>
+              <a:lstStyle/>
+              <a:p>
+                <a:r>
+                  <a:rPr lang="zh-TW" altLang="en-US">
+                    <a:noFill/>
+                  </a:rPr>
+                  <a:t> </a:t>
+                </a:r>
+              </a:p>
+            </p:txBody>
+          </p:sp>
+        </mc:Fallback>
+      </mc:AlternateContent>
+      <mc:AlternateContent xmlns:mc="http://schemas.openxmlformats.org/markup-compatibility/2006">
+        <mc:Choice xmlns:a14="http://schemas.microsoft.com/office/drawing/2010/main" Requires="a14">
+          <p:sp>
+            <p:nvSpPr>
+              <p:cNvPr id="33" name="矩形 32">
+                <a:extLst>
+                  <a:ext uri="{FF2B5EF4-FFF2-40B4-BE49-F238E27FC236}">
+                    <a16:creationId xmlns:a16="http://schemas.microsoft.com/office/drawing/2014/main" id="{DB73E709-6CD1-4CB0-8A66-80162ED8B780}"/>
+                  </a:ext>
+                </a:extLst>
+              </p:cNvPr>
+              <p:cNvSpPr/>
+              <p:nvPr/>
+            </p:nvSpPr>
+            <p:spPr>
+              <a:xfrm>
+                <a:off x="5958177" y="4161457"/>
+                <a:ext cx="3064557" cy="714683"/>
+              </a:xfrm>
+              <a:prstGeom prst="rect">
+                <a:avLst/>
+              </a:prstGeom>
+            </p:spPr>
+            <p:txBody>
+              <a:bodyPr wrap="none">
+                <a:spAutoFit/>
+              </a:bodyPr>
+              <a:lstStyle/>
+              <a:p>
+                <a:pPr/>
+                <a14:m>
+                  <m:oMathPara xmlns:m="http://schemas.openxmlformats.org/officeDocument/2006/math">
+                    <m:oMathParaPr>
+                      <m:jc m:val="left"/>
+                    </m:oMathParaPr>
+                    <m:oMath xmlns:m="http://schemas.openxmlformats.org/officeDocument/2006/math">
+                      <m:d>
+                        <m:dPr>
+                          <m:ctrlPr>
+                            <a:rPr lang="en-US" altLang="zh-TW" b="0" i="1" smtClean="0">
+                              <a:latin typeface="Cambria Math" panose="02040503050406030204" pitchFamily="18" charset="0"/>
+                            </a:rPr>
+                          </m:ctrlPr>
+                        </m:dPr>
+                        <m:e>
+                          <m:f>
+                            <m:fPr>
+                              <m:ctrlPr>
+                                <a:rPr lang="en-US" altLang="zh-TW" i="1">
+                                  <a:latin typeface="Cambria Math" panose="02040503050406030204" pitchFamily="18" charset="0"/>
+                                </a:rPr>
+                              </m:ctrlPr>
+                            </m:fPr>
+                            <m:num>
+                              <m:r>
+                                <a:rPr lang="en-US" altLang="zh-TW" i="1">
+                                  <a:latin typeface="Cambria Math" panose="02040503050406030204" pitchFamily="18" charset="0"/>
+                                </a:rPr>
+                                <m:t>𝜕</m:t>
+                              </m:r>
+                            </m:num>
+                            <m:den>
+                              <m:r>
+                                <a:rPr lang="en-US" altLang="zh-TW" i="1">
+                                  <a:latin typeface="Cambria Math" panose="02040503050406030204" pitchFamily="18" charset="0"/>
+                                </a:rPr>
+                                <m:t>𝜕</m:t>
+                              </m:r>
+                              <m:r>
+                                <a:rPr lang="en-US" altLang="zh-TW" i="1">
+                                  <a:latin typeface="Cambria Math" panose="02040503050406030204" pitchFamily="18" charset="0"/>
+                                </a:rPr>
+                                <m:t> </m:t>
+                              </m:r>
+                              <m:r>
+                                <a:rPr lang="en-US" altLang="zh-TW" b="0" i="1" smtClean="0">
+                                  <a:latin typeface="Cambria Math" panose="02040503050406030204" pitchFamily="18" charset="0"/>
+                                </a:rPr>
+                                <m:t>𝑥</m:t>
+                              </m:r>
+                            </m:den>
+                          </m:f>
+                          <m:acc>
+                            <m:accPr>
+                              <m:chr m:val="̂"/>
+                              <m:ctrlPr>
+                                <a:rPr lang="en-US" altLang="zh-TW" b="0" i="1" smtClean="0">
+                                  <a:latin typeface="Cambria Math" panose="02040503050406030204" pitchFamily="18" charset="0"/>
+                                </a:rPr>
+                              </m:ctrlPr>
+                            </m:accPr>
+                            <m:e>
+                              <m:r>
+                                <a:rPr lang="en-US" altLang="zh-TW" b="1" i="1" smtClean="0">
+                                  <a:latin typeface="Cambria Math" panose="02040503050406030204" pitchFamily="18" charset="0"/>
+                                </a:rPr>
+                                <m:t>𝒙</m:t>
+                              </m:r>
+                            </m:e>
+                          </m:acc>
+                          <m:r>
+                            <a:rPr lang="en-US" altLang="zh-TW" b="0" i="1" smtClean="0">
+                              <a:latin typeface="Cambria Math" panose="02040503050406030204" pitchFamily="18" charset="0"/>
+                            </a:rPr>
+                            <m:t>±</m:t>
+                          </m:r>
+                          <m:r>
+                            <a:rPr lang="en-US" altLang="zh-TW" b="0" i="1" smtClean="0">
+                              <a:latin typeface="Cambria Math" panose="02040503050406030204" pitchFamily="18" charset="0"/>
+                            </a:rPr>
+                            <m:t>𝑖</m:t>
+                          </m:r>
+                          <m:f>
+                            <m:fPr>
+                              <m:ctrlPr>
+                                <a:rPr lang="en-US" altLang="zh-TW" i="1">
+                                  <a:latin typeface="Cambria Math" panose="02040503050406030204" pitchFamily="18" charset="0"/>
+                                </a:rPr>
+                              </m:ctrlPr>
+                            </m:fPr>
+                            <m:num>
+                              <m:r>
+                                <a:rPr lang="en-US" altLang="zh-TW" i="1">
+                                  <a:latin typeface="Cambria Math" panose="02040503050406030204" pitchFamily="18" charset="0"/>
+                                </a:rPr>
+                                <m:t>𝜕</m:t>
+                              </m:r>
+                            </m:num>
+                            <m:den>
+                              <m:r>
+                                <a:rPr lang="en-US" altLang="zh-TW" i="1">
+                                  <a:latin typeface="Cambria Math" panose="02040503050406030204" pitchFamily="18" charset="0"/>
+                                </a:rPr>
+                                <m:t>𝜕</m:t>
+                              </m:r>
+                              <m:r>
+                                <a:rPr lang="en-US" altLang="zh-TW" i="1">
+                                  <a:latin typeface="Cambria Math" panose="02040503050406030204" pitchFamily="18" charset="0"/>
+                                </a:rPr>
+                                <m:t> </m:t>
+                              </m:r>
+                              <m:r>
+                                <a:rPr lang="en-US" altLang="zh-TW" b="0" i="1" smtClean="0">
+                                  <a:latin typeface="Cambria Math" panose="02040503050406030204" pitchFamily="18" charset="0"/>
+                                </a:rPr>
+                                <m:t>𝑦</m:t>
+                              </m:r>
+                            </m:den>
+                          </m:f>
+                          <m:acc>
+                            <m:accPr>
+                              <m:chr m:val="̂"/>
+                              <m:ctrlPr>
+                                <a:rPr lang="en-US" altLang="zh-TW" i="1">
+                                  <a:latin typeface="Cambria Math" panose="02040503050406030204" pitchFamily="18" charset="0"/>
+                                </a:rPr>
+                              </m:ctrlPr>
+                            </m:accPr>
+                            <m:e>
+                              <m:r>
+                                <a:rPr lang="en-US" altLang="zh-TW" b="1" i="1" smtClean="0">
+                                  <a:latin typeface="Cambria Math" panose="02040503050406030204" pitchFamily="18" charset="0"/>
+                                </a:rPr>
+                                <m:t>𝒚</m:t>
+                              </m:r>
+                            </m:e>
+                          </m:acc>
+                        </m:e>
+                      </m:d>
+                      <m:r>
+                        <a:rPr lang="en-US" altLang="zh-TW" b="0" i="1" smtClean="0">
+                          <a:latin typeface="Cambria Math" panose="02040503050406030204" pitchFamily="18" charset="0"/>
+                        </a:rPr>
+                        <m:t> </m:t>
+                      </m:r>
+                      <m:sSup>
+                        <m:sSupPr>
+                          <m:ctrlPr>
+                            <a:rPr lang="en-US" altLang="zh-TW" i="1">
+                              <a:latin typeface="Cambria Math" panose="02040503050406030204" pitchFamily="18" charset="0"/>
+                            </a:rPr>
+                          </m:ctrlPr>
+                        </m:sSupPr>
+                        <m:e>
+                          <m:r>
+                            <a:rPr lang="en-US" altLang="zh-TW" i="1">
+                              <a:latin typeface="Cambria Math" panose="02040503050406030204" pitchFamily="18" charset="0"/>
+                            </a:rPr>
+                            <m:t>𝐴</m:t>
+                          </m:r>
+                        </m:e>
+                        <m:sup>
+                          <m:r>
+                            <a:rPr lang="en-US" altLang="zh-TW" i="1">
+                              <a:latin typeface="Cambria Math" panose="02040503050406030204" pitchFamily="18" charset="0"/>
+                            </a:rPr>
+                            <m:t>𝐶</m:t>
+                          </m:r>
+                        </m:sup>
+                      </m:sSup>
+                      <m:d>
+                        <m:dPr>
+                          <m:ctrlPr>
+                            <a:rPr lang="en-US" altLang="zh-TW" i="1">
+                              <a:latin typeface="Cambria Math" panose="02040503050406030204" pitchFamily="18" charset="0"/>
+                            </a:rPr>
+                          </m:ctrlPr>
+                        </m:dPr>
+                        <m:e>
+                          <m:r>
+                            <a:rPr lang="en-US" altLang="zh-TW" b="1" i="1">
+                              <a:latin typeface="Cambria Math" panose="02040503050406030204" pitchFamily="18" charset="0"/>
+                            </a:rPr>
+                            <m:t>𝒓</m:t>
+                          </m:r>
+                        </m:e>
+                      </m:d>
+                      <m:r>
+                        <a:rPr lang="en-US" altLang="zh-TW" b="1" i="1" smtClean="0">
+                          <a:latin typeface="Cambria Math" panose="02040503050406030204" pitchFamily="18" charset="0"/>
+                        </a:rPr>
+                        <m:t>=</m:t>
+                      </m:r>
+                      <m:r>
+                        <a:rPr lang="en-US" altLang="zh-TW" b="0" i="1" smtClean="0">
+                          <a:latin typeface="Cambria Math" panose="02040503050406030204" pitchFamily="18" charset="0"/>
+                        </a:rPr>
+                        <m:t>0</m:t>
+                      </m:r>
+                    </m:oMath>
+                  </m:oMathPara>
+                </a14:m>
+                <a:endParaRPr lang="zh-TW" altLang="en-US" dirty="0"/>
+              </a:p>
+            </p:txBody>
+          </p:sp>
+        </mc:Choice>
+        <mc:Fallback>
+          <p:sp>
+            <p:nvSpPr>
+              <p:cNvPr id="33" name="矩形 32">
+                <a:extLst>
+                  <a:ext uri="{FF2B5EF4-FFF2-40B4-BE49-F238E27FC236}">
+                    <a16:creationId xmlns:a16="http://schemas.microsoft.com/office/drawing/2014/main" id="{DB73E709-6CD1-4CB0-8A66-80162ED8B780}"/>
+                  </a:ext>
+                </a:extLst>
+              </p:cNvPr>
+              <p:cNvSpPr>
+                <a:spLocks noRot="1" noChangeAspect="1" noMove="1" noResize="1" noEditPoints="1" noAdjustHandles="1" noChangeArrowheads="1" noChangeShapeType="1" noTextEdit="1"/>
+              </p:cNvSpPr>
+              <p:nvPr/>
+            </p:nvSpPr>
+            <p:spPr>
+              <a:xfrm>
+                <a:off x="5958177" y="4161457"/>
+                <a:ext cx="3064557" cy="714683"/>
+              </a:xfrm>
+              <a:prstGeom prst="rect">
+                <a:avLst/>
+              </a:prstGeom>
+              <a:blipFill>
+                <a:blip r:embed="rId10"/>
+                <a:stretch>
+                  <a:fillRect/>
+                </a:stretch>
+              </a:blipFill>
+            </p:spPr>
+            <p:txBody>
+              <a:bodyPr/>
+              <a:lstStyle/>
+              <a:p>
+                <a:r>
+                  <a:rPr lang="zh-TW" altLang="en-US">
+                    <a:noFill/>
+                  </a:rPr>
+                  <a:t> </a:t>
+                </a:r>
+              </a:p>
+            </p:txBody>
+          </p:sp>
+        </mc:Fallback>
+      </mc:AlternateContent>
+      <mc:AlternateContent xmlns:mc="http://schemas.openxmlformats.org/markup-compatibility/2006">
+        <mc:Choice xmlns:a14="http://schemas.microsoft.com/office/drawing/2010/main" Requires="a14">
+          <p:sp>
+            <p:nvSpPr>
+              <p:cNvPr id="36" name="矩形 35">
+                <a:extLst>
+                  <a:ext uri="{FF2B5EF4-FFF2-40B4-BE49-F238E27FC236}">
+                    <a16:creationId xmlns:a16="http://schemas.microsoft.com/office/drawing/2014/main" id="{40134526-F49B-4A6D-803D-D92DF04DCF41}"/>
+                  </a:ext>
+                </a:extLst>
+              </p:cNvPr>
+              <p:cNvSpPr/>
+              <p:nvPr/>
+            </p:nvSpPr>
+            <p:spPr>
+              <a:xfrm>
+                <a:off x="6023910" y="5462257"/>
+                <a:ext cx="5404236" cy="714683"/>
+              </a:xfrm>
+              <a:prstGeom prst="rect">
+                <a:avLst/>
+              </a:prstGeom>
+            </p:spPr>
+            <p:txBody>
+              <a:bodyPr wrap="none">
+                <a:spAutoFit/>
+              </a:bodyPr>
+              <a:lstStyle/>
+              <a:p>
+                <a:pPr/>
+                <a14:m>
+                  <m:oMathPara xmlns:m="http://schemas.openxmlformats.org/officeDocument/2006/math">
+                    <m:oMathParaPr>
+                      <m:jc m:val="left"/>
+                    </m:oMathParaPr>
+                    <m:oMath xmlns:m="http://schemas.openxmlformats.org/officeDocument/2006/math">
+                      <m:sSubSup>
+                        <m:sSubSupPr>
+                          <m:ctrlPr>
+                            <a:rPr lang="en-US" altLang="zh-TW" i="1" smtClean="0">
+                              <a:latin typeface="Cambria Math" panose="02040503050406030204" pitchFamily="18" charset="0"/>
+                            </a:rPr>
+                          </m:ctrlPr>
+                        </m:sSubSupPr>
+                        <m:e>
+                          <m:r>
+                            <m:rPr>
+                              <m:sty m:val="p"/>
+                            </m:rPr>
+                            <a:rPr lang="en-US" altLang="zh-TW">
+                              <a:latin typeface="Cambria Math" panose="02040503050406030204" pitchFamily="18" charset="0"/>
+                            </a:rPr>
+                            <m:t>∇</m:t>
+                          </m:r>
+                        </m:e>
+                        <m:sub>
+                          <m:r>
+                            <a:rPr lang="en-US" altLang="zh-TW" i="1">
+                              <a:latin typeface="Cambria Math" panose="02040503050406030204" pitchFamily="18" charset="0"/>
+                            </a:rPr>
+                            <m:t>∥</m:t>
+                          </m:r>
+                        </m:sub>
+                        <m:sup>
+                          <m:r>
+                            <a:rPr lang="en-US" altLang="zh-TW" i="1">
+                              <a:latin typeface="Cambria Math" panose="02040503050406030204" pitchFamily="18" charset="0"/>
+                            </a:rPr>
+                            <m:t>2</m:t>
+                          </m:r>
+                        </m:sup>
+                      </m:sSubSup>
+                      <m:sSup>
+                        <m:sSupPr>
+                          <m:ctrlPr>
+                            <a:rPr lang="en-US" altLang="zh-TW" i="1">
+                              <a:latin typeface="Cambria Math" panose="02040503050406030204" pitchFamily="18" charset="0"/>
+                            </a:rPr>
+                          </m:ctrlPr>
+                        </m:sSupPr>
+                        <m:e>
+                          <m:r>
+                            <a:rPr lang="en-US" altLang="zh-TW" i="1">
+                              <a:latin typeface="Cambria Math" panose="02040503050406030204" pitchFamily="18" charset="0"/>
+                            </a:rPr>
+                            <m:t>𝐴</m:t>
+                          </m:r>
+                        </m:e>
+                        <m:sup>
+                          <m:r>
+                            <a:rPr lang="en-US" altLang="zh-TW" i="1">
+                              <a:latin typeface="Cambria Math" panose="02040503050406030204" pitchFamily="18" charset="0"/>
+                            </a:rPr>
+                            <m:t>𝐶</m:t>
+                          </m:r>
+                        </m:sup>
+                      </m:sSup>
+                      <m:d>
+                        <m:dPr>
+                          <m:ctrlPr>
+                            <a:rPr lang="en-US" altLang="zh-TW" i="1">
+                              <a:latin typeface="Cambria Math" panose="02040503050406030204" pitchFamily="18" charset="0"/>
+                            </a:rPr>
+                          </m:ctrlPr>
+                        </m:dPr>
+                        <m:e>
+                          <m:r>
+                            <a:rPr lang="en-US" altLang="zh-TW" b="1" i="1" smtClean="0">
+                              <a:latin typeface="Cambria Math" panose="02040503050406030204" pitchFamily="18" charset="0"/>
+                            </a:rPr>
+                            <m:t>𝒓</m:t>
+                          </m:r>
+                          <m:r>
+                            <a:rPr lang="en-US" altLang="zh-TW" b="1" i="1" smtClean="0">
+                              <a:latin typeface="Cambria Math" panose="02040503050406030204" pitchFamily="18" charset="0"/>
+                            </a:rPr>
+                            <m:t>,</m:t>
+                          </m:r>
+                          <m:r>
+                            <a:rPr lang="en-US" altLang="zh-TW" b="0" i="1" smtClean="0">
+                              <a:latin typeface="Cambria Math" panose="02040503050406030204" pitchFamily="18" charset="0"/>
+                            </a:rPr>
+                            <m:t> </m:t>
+                          </m:r>
+                          <m:r>
+                            <a:rPr lang="en-US" altLang="zh-TW" b="0" i="1" smtClean="0">
+                              <a:latin typeface="Cambria Math" panose="02040503050406030204" pitchFamily="18" charset="0"/>
+                            </a:rPr>
+                            <m:t>𝑡</m:t>
+                          </m:r>
+                        </m:e>
+                      </m:d>
+                      <m:r>
+                        <a:rPr lang="en-US" altLang="zh-TW" b="1" i="1" smtClean="0">
+                          <a:latin typeface="Cambria Math" panose="02040503050406030204" pitchFamily="18" charset="0"/>
+                        </a:rPr>
+                        <m:t>=</m:t>
+                      </m:r>
+                      <m:d>
+                        <m:dPr>
+                          <m:ctrlPr>
+                            <a:rPr lang="en-US" altLang="zh-TW" i="1">
+                              <a:latin typeface="Cambria Math" panose="02040503050406030204" pitchFamily="18" charset="0"/>
+                            </a:rPr>
+                          </m:ctrlPr>
+                        </m:dPr>
+                        <m:e>
+                          <m:f>
+                            <m:fPr>
+                              <m:ctrlPr>
+                                <a:rPr lang="en-US" altLang="zh-TW" i="1">
+                                  <a:latin typeface="Cambria Math" panose="02040503050406030204" pitchFamily="18" charset="0"/>
+                                </a:rPr>
+                              </m:ctrlPr>
+                            </m:fPr>
+                            <m:num>
+                              <m:r>
+                                <a:rPr lang="en-US" altLang="zh-TW" i="1">
+                                  <a:latin typeface="Cambria Math" panose="02040503050406030204" pitchFamily="18" charset="0"/>
+                                </a:rPr>
+                                <m:t>𝜕</m:t>
+                              </m:r>
+                            </m:num>
+                            <m:den>
+                              <m:r>
+                                <a:rPr lang="en-US" altLang="zh-TW" i="1">
+                                  <a:latin typeface="Cambria Math" panose="02040503050406030204" pitchFamily="18" charset="0"/>
+                                </a:rPr>
+                                <m:t>𝜕</m:t>
+                              </m:r>
+                              <m:r>
+                                <a:rPr lang="en-US" altLang="zh-TW" i="1">
+                                  <a:latin typeface="Cambria Math" panose="02040503050406030204" pitchFamily="18" charset="0"/>
+                                </a:rPr>
+                                <m:t> </m:t>
+                              </m:r>
+                              <m:r>
+                                <a:rPr lang="en-US" altLang="zh-TW" i="1">
+                                  <a:latin typeface="Cambria Math" panose="02040503050406030204" pitchFamily="18" charset="0"/>
+                                </a:rPr>
+                                <m:t>𝑥</m:t>
+                              </m:r>
+                            </m:den>
+                          </m:f>
+                          <m:r>
+                            <a:rPr lang="en-US" altLang="zh-TW" i="1">
+                              <a:latin typeface="Cambria Math" panose="02040503050406030204" pitchFamily="18" charset="0"/>
+                            </a:rPr>
+                            <m:t>+</m:t>
+                          </m:r>
+                          <m:r>
+                            <a:rPr lang="en-US" altLang="zh-TW" b="0" i="1" smtClean="0">
+                              <a:latin typeface="Cambria Math" panose="02040503050406030204" pitchFamily="18" charset="0"/>
+                            </a:rPr>
+                            <m:t>𝑖</m:t>
+                          </m:r>
+                          <m:f>
+                            <m:fPr>
+                              <m:ctrlPr>
+                                <a:rPr lang="en-US" altLang="zh-TW" i="1">
+                                  <a:latin typeface="Cambria Math" panose="02040503050406030204" pitchFamily="18" charset="0"/>
+                                </a:rPr>
+                              </m:ctrlPr>
+                            </m:fPr>
+                            <m:num>
+                              <m:r>
+                                <a:rPr lang="en-US" altLang="zh-TW" i="1">
+                                  <a:latin typeface="Cambria Math" panose="02040503050406030204" pitchFamily="18" charset="0"/>
+                                </a:rPr>
+                                <m:t>𝜕</m:t>
+                              </m:r>
+                            </m:num>
+                            <m:den>
+                              <m:r>
+                                <a:rPr lang="en-US" altLang="zh-TW" i="1">
+                                  <a:latin typeface="Cambria Math" panose="02040503050406030204" pitchFamily="18" charset="0"/>
+                                </a:rPr>
+                                <m:t>𝜕</m:t>
+                              </m:r>
+                              <m:r>
+                                <a:rPr lang="en-US" altLang="zh-TW" i="1">
+                                  <a:latin typeface="Cambria Math" panose="02040503050406030204" pitchFamily="18" charset="0"/>
+                                </a:rPr>
+                                <m:t> </m:t>
+                              </m:r>
+                              <m:r>
+                                <a:rPr lang="en-US" altLang="zh-TW" i="1">
+                                  <a:latin typeface="Cambria Math" panose="02040503050406030204" pitchFamily="18" charset="0"/>
+                                </a:rPr>
+                                <m:t>𝑦</m:t>
+                              </m:r>
+                            </m:den>
+                          </m:f>
+                        </m:e>
+                      </m:d>
+                      <m:d>
+                        <m:dPr>
+                          <m:ctrlPr>
+                            <a:rPr lang="en-US" altLang="zh-TW" i="1">
+                              <a:latin typeface="Cambria Math" panose="02040503050406030204" pitchFamily="18" charset="0"/>
+                            </a:rPr>
+                          </m:ctrlPr>
+                        </m:dPr>
+                        <m:e>
+                          <m:f>
+                            <m:fPr>
+                              <m:ctrlPr>
+                                <a:rPr lang="en-US" altLang="zh-TW" i="1">
+                                  <a:latin typeface="Cambria Math" panose="02040503050406030204" pitchFamily="18" charset="0"/>
+                                </a:rPr>
+                              </m:ctrlPr>
+                            </m:fPr>
+                            <m:num>
+                              <m:r>
+                                <a:rPr lang="en-US" altLang="zh-TW" i="1">
+                                  <a:latin typeface="Cambria Math" panose="02040503050406030204" pitchFamily="18" charset="0"/>
+                                </a:rPr>
+                                <m:t>𝜕</m:t>
+                              </m:r>
+                            </m:num>
+                            <m:den>
+                              <m:r>
+                                <a:rPr lang="en-US" altLang="zh-TW" i="1">
+                                  <a:latin typeface="Cambria Math" panose="02040503050406030204" pitchFamily="18" charset="0"/>
+                                </a:rPr>
+                                <m:t>𝜕</m:t>
+                              </m:r>
+                              <m:r>
+                                <a:rPr lang="en-US" altLang="zh-TW" i="1">
+                                  <a:latin typeface="Cambria Math" panose="02040503050406030204" pitchFamily="18" charset="0"/>
+                                </a:rPr>
+                                <m:t> </m:t>
+                              </m:r>
+                              <m:r>
+                                <a:rPr lang="en-US" altLang="zh-TW" i="1">
+                                  <a:latin typeface="Cambria Math" panose="02040503050406030204" pitchFamily="18" charset="0"/>
+                                </a:rPr>
+                                <m:t>𝑥</m:t>
+                              </m:r>
+                            </m:den>
+                          </m:f>
+                          <m:r>
+                            <a:rPr lang="en-US" altLang="zh-TW" b="0" i="1" smtClean="0">
+                              <a:latin typeface="Cambria Math" panose="02040503050406030204" pitchFamily="18" charset="0"/>
+                            </a:rPr>
+                            <m:t>−</m:t>
+                          </m:r>
+                          <m:r>
+                            <a:rPr lang="en-US" altLang="zh-TW" b="0" i="1" smtClean="0">
+                              <a:latin typeface="Cambria Math" panose="02040503050406030204" pitchFamily="18" charset="0"/>
+                            </a:rPr>
+                            <m:t>𝑖</m:t>
+                          </m:r>
+                          <m:f>
+                            <m:fPr>
+                              <m:ctrlPr>
+                                <a:rPr lang="en-US" altLang="zh-TW" i="1">
+                                  <a:latin typeface="Cambria Math" panose="02040503050406030204" pitchFamily="18" charset="0"/>
+                                </a:rPr>
+                              </m:ctrlPr>
+                            </m:fPr>
+                            <m:num>
+                              <m:r>
+                                <a:rPr lang="en-US" altLang="zh-TW" i="1">
+                                  <a:latin typeface="Cambria Math" panose="02040503050406030204" pitchFamily="18" charset="0"/>
+                                </a:rPr>
+                                <m:t>𝜕</m:t>
+                              </m:r>
+                            </m:num>
+                            <m:den>
+                              <m:r>
+                                <a:rPr lang="en-US" altLang="zh-TW" i="1">
+                                  <a:latin typeface="Cambria Math" panose="02040503050406030204" pitchFamily="18" charset="0"/>
+                                </a:rPr>
+                                <m:t>𝜕</m:t>
+                              </m:r>
+                              <m:r>
+                                <a:rPr lang="en-US" altLang="zh-TW" i="1">
+                                  <a:latin typeface="Cambria Math" panose="02040503050406030204" pitchFamily="18" charset="0"/>
+                                </a:rPr>
+                                <m:t> </m:t>
+                              </m:r>
+                              <m:r>
+                                <a:rPr lang="en-US" altLang="zh-TW" i="1">
+                                  <a:latin typeface="Cambria Math" panose="02040503050406030204" pitchFamily="18" charset="0"/>
+                                </a:rPr>
+                                <m:t>𝑦</m:t>
+                              </m:r>
+                            </m:den>
+                          </m:f>
+                        </m:e>
+                      </m:d>
+                      <m:sSup>
+                        <m:sSupPr>
+                          <m:ctrlPr>
+                            <a:rPr lang="en-US" altLang="zh-TW" i="1">
+                              <a:latin typeface="Cambria Math" panose="02040503050406030204" pitchFamily="18" charset="0"/>
+                            </a:rPr>
+                          </m:ctrlPr>
+                        </m:sSupPr>
+                        <m:e>
+                          <m:r>
+                            <a:rPr lang="en-US" altLang="zh-TW" i="1">
+                              <a:latin typeface="Cambria Math" panose="02040503050406030204" pitchFamily="18" charset="0"/>
+                            </a:rPr>
+                            <m:t>𝐴</m:t>
+                          </m:r>
+                        </m:e>
+                        <m:sup>
+                          <m:r>
+                            <a:rPr lang="en-US" altLang="zh-TW" i="1">
+                              <a:latin typeface="Cambria Math" panose="02040503050406030204" pitchFamily="18" charset="0"/>
+                            </a:rPr>
+                            <m:t>𝐶</m:t>
+                          </m:r>
+                        </m:sup>
+                      </m:sSup>
+                      <m:d>
+                        <m:dPr>
+                          <m:ctrlPr>
+                            <a:rPr lang="en-US" altLang="zh-TW" i="1">
+                              <a:latin typeface="Cambria Math" panose="02040503050406030204" pitchFamily="18" charset="0"/>
+                            </a:rPr>
+                          </m:ctrlPr>
+                        </m:dPr>
+                        <m:e>
+                          <m:r>
+                            <a:rPr lang="en-US" altLang="zh-TW" b="1" i="1">
+                              <a:latin typeface="Cambria Math" panose="02040503050406030204" pitchFamily="18" charset="0"/>
+                            </a:rPr>
+                            <m:t>𝒓</m:t>
+                          </m:r>
+                        </m:e>
+                      </m:d>
+                      <m:r>
+                        <a:rPr lang="en-US" altLang="zh-TW" b="1" i="1" smtClean="0">
+                          <a:latin typeface="Cambria Math" panose="02040503050406030204" pitchFamily="18" charset="0"/>
+                        </a:rPr>
+                        <m:t>=</m:t>
+                      </m:r>
+                      <m:r>
+                        <a:rPr lang="en-US" altLang="zh-TW" b="0" i="1" smtClean="0">
+                          <a:latin typeface="Cambria Math" panose="02040503050406030204" pitchFamily="18" charset="0"/>
+                        </a:rPr>
+                        <m:t>0</m:t>
+                      </m:r>
+                    </m:oMath>
+                  </m:oMathPara>
+                </a14:m>
+                <a:endParaRPr lang="zh-TW" altLang="en-US" dirty="0"/>
+              </a:p>
+            </p:txBody>
+          </p:sp>
+        </mc:Choice>
+        <mc:Fallback>
+          <p:sp>
+            <p:nvSpPr>
+              <p:cNvPr id="36" name="矩形 35">
+                <a:extLst>
+                  <a:ext uri="{FF2B5EF4-FFF2-40B4-BE49-F238E27FC236}">
+                    <a16:creationId xmlns:a16="http://schemas.microsoft.com/office/drawing/2014/main" id="{40134526-F49B-4A6D-803D-D92DF04DCF41}"/>
+                  </a:ext>
+                </a:extLst>
+              </p:cNvPr>
+              <p:cNvSpPr>
+                <a:spLocks noRot="1" noChangeAspect="1" noMove="1" noResize="1" noEditPoints="1" noAdjustHandles="1" noChangeArrowheads="1" noChangeShapeType="1" noTextEdit="1"/>
+              </p:cNvSpPr>
+              <p:nvPr/>
+            </p:nvSpPr>
+            <p:spPr>
+              <a:xfrm>
+                <a:off x="6023910" y="5462257"/>
+                <a:ext cx="5404236" cy="714683"/>
+              </a:xfrm>
+              <a:prstGeom prst="rect">
+                <a:avLst/>
+              </a:prstGeom>
+              <a:blipFill>
+                <a:blip r:embed="rId11"/>
+                <a:stretch>
+                  <a:fillRect/>
+                </a:stretch>
+              </a:blipFill>
+            </p:spPr>
+            <p:txBody>
+              <a:bodyPr/>
+              <a:lstStyle/>
+              <a:p>
+                <a:r>
+                  <a:rPr lang="zh-TW" altLang="en-US">
+                    <a:noFill/>
+                  </a:rPr>
+                  <a:t> </a:t>
+                </a:r>
+              </a:p>
+            </p:txBody>
+          </p:sp>
+        </mc:Fallback>
+      </mc:AlternateContent>
+      <p:sp>
+        <p:nvSpPr>
+          <p:cNvPr id="41" name="投影片編號版面配置區 40">
+            <a:extLst>
+              <a:ext uri="{FF2B5EF4-FFF2-40B4-BE49-F238E27FC236}">
+                <a16:creationId xmlns:a16="http://schemas.microsoft.com/office/drawing/2014/main" id="{C762BEBE-DC66-48DD-BF9A-BA0DCD192B1F}"/>
               </a:ext>
             </a:extLst>
           </p:cNvPr>
@@ -7542,9 +11479,295 @@
           <a:bodyPr/>
           <a:lstStyle/>
           <a:p>
-            <a:r>
-              <a:rPr lang="en-US" altLang="zh-TW" dirty="0"/>
-              <a:t>1</a:t>
+            <a:fld id="{9094BDCA-F584-4E62-B2F1-580C4F37E8BD}" type="slidenum">
+              <a:rPr lang="zh-TW" altLang="en-US" smtClean="0"/>
+              <a:t>6</a:t>
+            </a:fld>
+            <a:endParaRPr lang="zh-TW" altLang="en-US"/>
+          </a:p>
+        </p:txBody>
+      </p:sp>
+      <mc:AlternateContent xmlns:mc="http://schemas.openxmlformats.org/markup-compatibility/2006">
+        <mc:Choice xmlns:a14="http://schemas.microsoft.com/office/drawing/2010/main" Requires="a14">
+          <p:sp>
+            <p:nvSpPr>
+              <p:cNvPr id="42" name="矩形 41">
+                <a:extLst>
+                  <a:ext uri="{FF2B5EF4-FFF2-40B4-BE49-F238E27FC236}">
+                    <a16:creationId xmlns:a16="http://schemas.microsoft.com/office/drawing/2014/main" id="{66C545FC-8818-435D-B8E4-EBA3B6F5DDE8}"/>
+                  </a:ext>
+                </a:extLst>
+              </p:cNvPr>
+              <p:cNvSpPr/>
+              <p:nvPr/>
+            </p:nvSpPr>
+            <p:spPr>
+              <a:xfrm>
+                <a:off x="5608399" y="3097859"/>
+                <a:ext cx="6235258" cy="369332"/>
+              </a:xfrm>
+              <a:prstGeom prst="rect">
+                <a:avLst/>
+              </a:prstGeom>
+            </p:spPr>
+            <p:txBody>
+              <a:bodyPr wrap="square">
+                <a:spAutoFit/>
+              </a:bodyPr>
+              <a:lstStyle/>
+              <a:p>
+                <a:r>
+                  <a:rPr lang="en-US" altLang="zh-TW" dirty="0">
+                    <a:latin typeface="Times New Roman" panose="02020603050405020304" pitchFamily="18" charset="0"/>
+                    <a:cs typeface="Times New Roman" panose="02020603050405020304" pitchFamily="18" charset="0"/>
+                  </a:rPr>
+                  <a:t>The condition </a:t>
+                </a:r>
+                <a:r>
+                  <a:rPr lang="en-US" altLang="zh-TW" b="1" dirty="0">
+                    <a:solidFill>
+                      <a:srgbClr val="FF0000"/>
+                    </a:solidFill>
+                    <a:latin typeface="Times New Roman" panose="02020603050405020304" pitchFamily="18" charset="0"/>
+                    <a:cs typeface="Times New Roman" panose="02020603050405020304" pitchFamily="18" charset="0"/>
+                  </a:rPr>
+                  <a:t>fail</a:t>
+                </a:r>
+                <a:r>
+                  <a:rPr lang="en-US" altLang="zh-TW" b="1" dirty="0">
+                    <a:latin typeface="Times New Roman" panose="02020603050405020304" pitchFamily="18" charset="0"/>
+                    <a:cs typeface="Times New Roman" panose="02020603050405020304" pitchFamily="18" charset="0"/>
+                  </a:rPr>
+                  <a:t> t</a:t>
+                </a:r>
+                <a:r>
+                  <a:rPr lang="en-US" altLang="zh-TW" dirty="0">
+                    <a:latin typeface="Times New Roman" panose="02020603050405020304" pitchFamily="18" charset="0"/>
+                    <a:cs typeface="Times New Roman" panose="02020603050405020304" pitchFamily="18" charset="0"/>
+                  </a:rPr>
+                  <a:t>he paraxial approximation for </a:t>
+                </a:r>
+                <a14:m>
+                  <m:oMath xmlns:m="http://schemas.openxmlformats.org/officeDocument/2006/math">
+                    <m:acc>
+                      <m:accPr>
+                        <m:chr m:val="̂"/>
+                        <m:ctrlPr>
+                          <a:rPr lang="en-US" altLang="zh-TW" b="1" i="1">
+                            <a:latin typeface="Cambria Math" panose="02040503050406030204" pitchFamily="18" charset="0"/>
+                          </a:rPr>
+                        </m:ctrlPr>
+                      </m:accPr>
+                      <m:e>
+                        <m:r>
+                          <a:rPr lang="zh-TW" altLang="en-US" b="1" i="1">
+                            <a:latin typeface="Cambria Math" panose="02040503050406030204" pitchFamily="18" charset="0"/>
+                          </a:rPr>
+                          <m:t>𝜺</m:t>
+                        </m:r>
+                      </m:e>
+                    </m:acc>
+                    <m:r>
+                      <a:rPr lang="en-US" altLang="zh-TW" b="1" i="1" smtClean="0">
+                        <a:latin typeface="Cambria Math" panose="02040503050406030204" pitchFamily="18" charset="0"/>
+                      </a:rPr>
+                      <m:t>=</m:t>
+                    </m:r>
+                    <m:acc>
+                      <m:accPr>
+                        <m:chr m:val="̂"/>
+                        <m:ctrlPr>
+                          <a:rPr lang="en-US" altLang="zh-TW" i="1">
+                            <a:latin typeface="Cambria Math" panose="02040503050406030204" pitchFamily="18" charset="0"/>
+                          </a:rPr>
+                        </m:ctrlPr>
+                      </m:accPr>
+                      <m:e>
+                        <m:r>
+                          <a:rPr lang="en-US" altLang="zh-TW" b="1" i="1">
+                            <a:latin typeface="Cambria Math" panose="02040503050406030204" pitchFamily="18" charset="0"/>
+                          </a:rPr>
+                          <m:t>𝒙</m:t>
+                        </m:r>
+                      </m:e>
+                    </m:acc>
+                    <m:r>
+                      <a:rPr lang="en-US" altLang="zh-TW" i="1">
+                        <a:latin typeface="Cambria Math" panose="02040503050406030204" pitchFamily="18" charset="0"/>
+                      </a:rPr>
+                      <m:t>±</m:t>
+                    </m:r>
+                    <m:r>
+                      <a:rPr lang="en-US" altLang="zh-TW" i="1">
+                        <a:latin typeface="Cambria Math" panose="02040503050406030204" pitchFamily="18" charset="0"/>
+                      </a:rPr>
+                      <m:t>𝑖</m:t>
+                    </m:r>
+                    <m:acc>
+                      <m:accPr>
+                        <m:chr m:val="̂"/>
+                        <m:ctrlPr>
+                          <a:rPr lang="en-US" altLang="zh-TW" i="1">
+                            <a:latin typeface="Cambria Math" panose="02040503050406030204" pitchFamily="18" charset="0"/>
+                          </a:rPr>
+                        </m:ctrlPr>
+                      </m:accPr>
+                      <m:e>
+                        <m:r>
+                          <a:rPr lang="en-US" altLang="zh-TW" b="1" i="1">
+                            <a:latin typeface="Cambria Math" panose="02040503050406030204" pitchFamily="18" charset="0"/>
+                          </a:rPr>
+                          <m:t>𝒚</m:t>
+                        </m:r>
+                      </m:e>
+                    </m:acc>
+                  </m:oMath>
+                </a14:m>
+                <a:endParaRPr lang="en-US" altLang="zh-TW" dirty="0">
+                  <a:latin typeface="Times New Roman" panose="02020603050405020304" pitchFamily="18" charset="0"/>
+                  <a:cs typeface="Times New Roman" panose="02020603050405020304" pitchFamily="18" charset="0"/>
+                </a:endParaRPr>
+              </a:p>
+            </p:txBody>
+          </p:sp>
+        </mc:Choice>
+        <mc:Fallback>
+          <p:sp>
+            <p:nvSpPr>
+              <p:cNvPr id="42" name="矩形 41">
+                <a:extLst>
+                  <a:ext uri="{FF2B5EF4-FFF2-40B4-BE49-F238E27FC236}">
+                    <a16:creationId xmlns:a16="http://schemas.microsoft.com/office/drawing/2014/main" id="{66C545FC-8818-435D-B8E4-EBA3B6F5DDE8}"/>
+                  </a:ext>
+                </a:extLst>
+              </p:cNvPr>
+              <p:cNvSpPr>
+                <a:spLocks noRot="1" noChangeAspect="1" noMove="1" noResize="1" noEditPoints="1" noAdjustHandles="1" noChangeArrowheads="1" noChangeShapeType="1" noTextEdit="1"/>
+              </p:cNvSpPr>
+              <p:nvPr/>
+            </p:nvSpPr>
+            <p:spPr>
+              <a:xfrm>
+                <a:off x="5608399" y="3097859"/>
+                <a:ext cx="6235258" cy="369332"/>
+              </a:xfrm>
+              <a:prstGeom prst="rect">
+                <a:avLst/>
+              </a:prstGeom>
+              <a:blipFill>
+                <a:blip r:embed="rId12"/>
+                <a:stretch>
+                  <a:fillRect l="-782" t="-8197" b="-24590"/>
+                </a:stretch>
+              </a:blipFill>
+            </p:spPr>
+            <p:txBody>
+              <a:bodyPr/>
+              <a:lstStyle/>
+              <a:p>
+                <a:r>
+                  <a:rPr lang="zh-TW" altLang="en-US">
+                    <a:noFill/>
+                  </a:rPr>
+                  <a:t> </a:t>
+                </a:r>
+              </a:p>
+            </p:txBody>
+          </p:sp>
+        </mc:Fallback>
+      </mc:AlternateContent>
+      <p:sp>
+        <p:nvSpPr>
+          <p:cNvPr id="43" name="矩形 42">
+            <a:extLst>
+              <a:ext uri="{FF2B5EF4-FFF2-40B4-BE49-F238E27FC236}">
+                <a16:creationId xmlns:a16="http://schemas.microsoft.com/office/drawing/2014/main" id="{AB03D92D-103D-4E04-8B33-5278CE36F1BB}"/>
+              </a:ext>
+            </a:extLst>
+          </p:cNvPr>
+          <p:cNvSpPr/>
+          <p:nvPr/>
+        </p:nvSpPr>
+        <p:spPr>
+          <a:xfrm>
+            <a:off x="5910978" y="3825812"/>
+            <a:ext cx="1531188" cy="369332"/>
+          </a:xfrm>
+          <a:prstGeom prst="rect">
+            <a:avLst/>
+          </a:prstGeom>
+        </p:spPr>
+        <p:txBody>
+          <a:bodyPr wrap="none">
+            <a:spAutoFit/>
+          </a:bodyPr>
+          <a:lstStyle/>
+          <a:p>
+            <a:r>
+              <a:rPr lang="en-US" altLang="zh-TW" dirty="0">
+                <a:latin typeface="Times New Roman" panose="02020603050405020304" pitchFamily="18" charset="0"/>
+                <a:cs typeface="Times New Roman" panose="02020603050405020304" pitchFamily="18" charset="0"/>
+              </a:rPr>
+              <a:t>The condition </a:t>
+            </a:r>
+            <a:endParaRPr lang="zh-TW" altLang="en-US" dirty="0"/>
+          </a:p>
+        </p:txBody>
+      </p:sp>
+      <p:sp>
+        <p:nvSpPr>
+          <p:cNvPr id="44" name="矩形 43">
+            <a:extLst>
+              <a:ext uri="{FF2B5EF4-FFF2-40B4-BE49-F238E27FC236}">
+                <a16:creationId xmlns:a16="http://schemas.microsoft.com/office/drawing/2014/main" id="{1060E675-1E0F-47F1-907F-126690C9EBA5}"/>
+              </a:ext>
+            </a:extLst>
+          </p:cNvPr>
+          <p:cNvSpPr/>
+          <p:nvPr/>
+        </p:nvSpPr>
+        <p:spPr>
+          <a:xfrm>
+            <a:off x="5910978" y="5054764"/>
+            <a:ext cx="3377848" cy="369332"/>
+          </a:xfrm>
+          <a:prstGeom prst="rect">
+            <a:avLst/>
+          </a:prstGeom>
+        </p:spPr>
+        <p:txBody>
+          <a:bodyPr wrap="none">
+            <a:spAutoFit/>
+          </a:bodyPr>
+          <a:lstStyle/>
+          <a:p>
+            <a:r>
+              <a:rPr lang="en-US" altLang="zh-TW" b="1" dirty="0">
+                <a:latin typeface="Times New Roman" panose="02020603050405020304" pitchFamily="18" charset="0"/>
+                <a:cs typeface="Times New Roman" panose="02020603050405020304" pitchFamily="18" charset="0"/>
+              </a:rPr>
+              <a:t>Fail</a:t>
+            </a:r>
+            <a:r>
+              <a:rPr lang="en-US" altLang="zh-TW" dirty="0">
+                <a:latin typeface="Times New Roman" panose="02020603050405020304" pitchFamily="18" charset="0"/>
+                <a:cs typeface="Times New Roman" panose="02020603050405020304" pitchFamily="18" charset="0"/>
+              </a:rPr>
+              <a:t> of </a:t>
+            </a:r>
+            <a:r>
+              <a:rPr lang="en-US" altLang="zh-TW" b="1" dirty="0">
+                <a:latin typeface="Times New Roman" panose="02020603050405020304" pitchFamily="18" charset="0"/>
+                <a:cs typeface="Times New Roman" panose="02020603050405020304" pitchFamily="18" charset="0"/>
+              </a:rPr>
+              <a:t>t</a:t>
+            </a:r>
+            <a:r>
+              <a:rPr lang="en-US" altLang="zh-TW" dirty="0">
+                <a:latin typeface="Times New Roman" panose="02020603050405020304" pitchFamily="18" charset="0"/>
+                <a:cs typeface="Times New Roman" panose="02020603050405020304" pitchFamily="18" charset="0"/>
+              </a:rPr>
+              <a:t>he paraxial approximation</a:t>
             </a:r>
             <a:endParaRPr lang="zh-TW" altLang="en-US" dirty="0"/>
           </a:p>
@@ -7937,35 +12160,6 @@
       </p:sp>
       <p:sp>
         <p:nvSpPr>
-          <p:cNvPr id="2" name="投影片編號版面配置區 1">
-            <a:extLst>
-              <a:ext uri="{FF2B5EF4-FFF2-40B4-BE49-F238E27FC236}">
-                <a16:creationId xmlns:a16="http://schemas.microsoft.com/office/drawing/2014/main" id="{98B65FA9-2C67-4FDA-8DAC-794A05FB29BA}"/>
-              </a:ext>
-            </a:extLst>
-          </p:cNvPr>
-          <p:cNvSpPr>
-            <a:spLocks noGrp="1"/>
-          </p:cNvSpPr>
-          <p:nvPr>
-            <p:ph type="sldNum" sz="quarter" idx="12"/>
-          </p:nvPr>
-        </p:nvSpPr>
-        <p:spPr/>
-        <p:txBody>
-          <a:bodyPr/>
-          <a:lstStyle/>
-          <a:p>
-            <a:r>
-              <a:rPr lang="en-US" altLang="zh-TW" dirty="0"/>
-              <a:t>1</a:t>
-            </a:r>
-            <a:endParaRPr lang="zh-TW" altLang="en-US" dirty="0"/>
-          </a:p>
-        </p:txBody>
-      </p:sp>
-      <p:sp>
-        <p:nvSpPr>
           <p:cNvPr id="6" name="內容版面配置區 2">
             <a:extLst>
               <a:ext uri="{FF2B5EF4-FFF2-40B4-BE49-F238E27FC236}">
@@ -8160,6 +12354,35 @@
               </a:rPr>
               <a:t>Summary and outlook</a:t>
             </a:r>
+          </a:p>
+        </p:txBody>
+      </p:sp>
+      <p:sp>
+        <p:nvSpPr>
+          <p:cNvPr id="3" name="投影片編號版面配置區 2">
+            <a:extLst>
+              <a:ext uri="{FF2B5EF4-FFF2-40B4-BE49-F238E27FC236}">
+                <a16:creationId xmlns:a16="http://schemas.microsoft.com/office/drawing/2014/main" id="{2895A4A1-A24F-4005-893F-E731AE9CC62C}"/>
+              </a:ext>
+            </a:extLst>
+          </p:cNvPr>
+          <p:cNvSpPr>
+            <a:spLocks noGrp="1"/>
+          </p:cNvSpPr>
+          <p:nvPr>
+            <p:ph type="sldNum" sz="quarter" idx="12"/>
+          </p:nvPr>
+        </p:nvSpPr>
+        <p:spPr/>
+        <p:txBody>
+          <a:bodyPr/>
+          <a:lstStyle/>
+          <a:p>
+            <a:fld id="{9094BDCA-F584-4E62-B2F1-580C4F37E8BD}" type="slidenum">
+              <a:rPr lang="zh-TW" altLang="en-US" smtClean="0"/>
+              <a:t>7</a:t>
+            </a:fld>
+            <a:endParaRPr lang="zh-TW" altLang="en-US"/>
           </a:p>
         </p:txBody>
       </p:sp>
@@ -8550,35 +12773,6 @@
       </p:sp>
       <p:sp>
         <p:nvSpPr>
-          <p:cNvPr id="2" name="投影片編號版面配置區 1">
-            <a:extLst>
-              <a:ext uri="{FF2B5EF4-FFF2-40B4-BE49-F238E27FC236}">
-                <a16:creationId xmlns:a16="http://schemas.microsoft.com/office/drawing/2014/main" id="{98B65FA9-2C67-4FDA-8DAC-794A05FB29BA}"/>
-              </a:ext>
-            </a:extLst>
-          </p:cNvPr>
-          <p:cNvSpPr>
-            <a:spLocks noGrp="1"/>
-          </p:cNvSpPr>
-          <p:nvPr>
-            <p:ph type="sldNum" sz="quarter" idx="12"/>
-          </p:nvPr>
-        </p:nvSpPr>
-        <p:spPr/>
-        <p:txBody>
-          <a:bodyPr/>
-          <a:lstStyle/>
-          <a:p>
-            <a:r>
-              <a:rPr lang="en-US" altLang="zh-TW" dirty="0"/>
-              <a:t>1</a:t>
-            </a:r>
-            <a:endParaRPr lang="zh-TW" altLang="en-US" dirty="0"/>
-          </a:p>
-        </p:txBody>
-      </p:sp>
-      <p:sp>
-        <p:nvSpPr>
           <p:cNvPr id="7" name="內容版面配置區 6">
             <a:extLst>
               <a:ext uri="{FF2B5EF4-FFF2-40B4-BE49-F238E27FC236}">
@@ -8598,6 +12792,35 @@
           <a:bodyPr/>
           <a:lstStyle/>
           <a:p>
+            <a:endParaRPr lang="zh-TW" altLang="en-US"/>
+          </a:p>
+        </p:txBody>
+      </p:sp>
+      <p:sp>
+        <p:nvSpPr>
+          <p:cNvPr id="3" name="投影片編號版面配置區 2">
+            <a:extLst>
+              <a:ext uri="{FF2B5EF4-FFF2-40B4-BE49-F238E27FC236}">
+                <a16:creationId xmlns:a16="http://schemas.microsoft.com/office/drawing/2014/main" id="{AE6C2075-3F5C-497E-9964-9867555ACC33}"/>
+              </a:ext>
+            </a:extLst>
+          </p:cNvPr>
+          <p:cNvSpPr>
+            <a:spLocks noGrp="1"/>
+          </p:cNvSpPr>
+          <p:nvPr>
+            <p:ph type="sldNum" sz="quarter" idx="12"/>
+          </p:nvPr>
+        </p:nvSpPr>
+        <p:spPr/>
+        <p:txBody>
+          <a:bodyPr/>
+          <a:lstStyle/>
+          <a:p>
+            <a:fld id="{9094BDCA-F584-4E62-B2F1-580C4F37E8BD}" type="slidenum">
+              <a:rPr lang="zh-TW" altLang="en-US" smtClean="0"/>
+              <a:t>8</a:t>
+            </a:fld>
             <a:endParaRPr lang="zh-TW" altLang="en-US"/>
           </a:p>
         </p:txBody>
@@ -8989,35 +13212,6 @@
       </p:sp>
       <p:sp>
         <p:nvSpPr>
-          <p:cNvPr id="2" name="投影片編號版面配置區 1">
-            <a:extLst>
-              <a:ext uri="{FF2B5EF4-FFF2-40B4-BE49-F238E27FC236}">
-                <a16:creationId xmlns:a16="http://schemas.microsoft.com/office/drawing/2014/main" id="{98B65FA9-2C67-4FDA-8DAC-794A05FB29BA}"/>
-              </a:ext>
-            </a:extLst>
-          </p:cNvPr>
-          <p:cNvSpPr>
-            <a:spLocks noGrp="1"/>
-          </p:cNvSpPr>
-          <p:nvPr>
-            <p:ph type="sldNum" sz="quarter" idx="12"/>
-          </p:nvPr>
-        </p:nvSpPr>
-        <p:spPr/>
-        <p:txBody>
-          <a:bodyPr/>
-          <a:lstStyle/>
-          <a:p>
-            <a:r>
-              <a:rPr lang="en-US" altLang="zh-TW" dirty="0"/>
-              <a:t>1</a:t>
-            </a:r>
-            <a:endParaRPr lang="zh-TW" altLang="en-US" dirty="0"/>
-          </a:p>
-        </p:txBody>
-      </p:sp>
-      <p:sp>
-        <p:nvSpPr>
           <p:cNvPr id="11" name="內容版面配置區 2">
             <a:extLst>
               <a:ext uri="{FF2B5EF4-FFF2-40B4-BE49-F238E27FC236}">
@@ -9190,6 +13384,35 @@
               </a:rPr>
               <a:t>Summary and outlook</a:t>
             </a:r>
+          </a:p>
+        </p:txBody>
+      </p:sp>
+      <p:sp>
+        <p:nvSpPr>
+          <p:cNvPr id="3" name="投影片編號版面配置區 2">
+            <a:extLst>
+              <a:ext uri="{FF2B5EF4-FFF2-40B4-BE49-F238E27FC236}">
+                <a16:creationId xmlns:a16="http://schemas.microsoft.com/office/drawing/2014/main" id="{909C0FAF-7BA8-41F3-B0A5-5F38A83D9716}"/>
+              </a:ext>
+            </a:extLst>
+          </p:cNvPr>
+          <p:cNvSpPr>
+            <a:spLocks noGrp="1"/>
+          </p:cNvSpPr>
+          <p:nvPr>
+            <p:ph type="sldNum" sz="quarter" idx="12"/>
+          </p:nvPr>
+        </p:nvSpPr>
+        <p:spPr/>
+        <p:txBody>
+          <a:bodyPr/>
+          <a:lstStyle/>
+          <a:p>
+            <a:fld id="{9094BDCA-F584-4E62-B2F1-580C4F37E8BD}" type="slidenum">
+              <a:rPr lang="zh-TW" altLang="en-US" smtClean="0"/>
+              <a:t>9</a:t>
+            </a:fld>
+            <a:endParaRPr lang="zh-TW" altLang="en-US"/>
           </a:p>
         </p:txBody>
       </p:sp>
